--- a/fixtures/real-world/oecd-economic-outlook-2017-de.pptx
+++ b/fixtures/real-world/oecd-economic-outlook-2017-de.pptx
@@ -2767,19 +2767,19 @@
             <a:rPr lang="en-GB" dirty="0" smtClean="0">
               <a:latin typeface="Calibri" panose="020F0502020204030204" pitchFamily="34" charset="0"/>
             </a:rPr>
-            <a:t>Global growth expected to pick-up modestly </a:t>
+            <a:t>DE: Global growth expected to pick-up modestly </a:t>
           </a:r>
           <a:r>
             <a:rPr lang="en-GB" smtClean="0">
               <a:latin typeface="Calibri" panose="020F0502020204030204" pitchFamily="34" charset="0"/>
             </a:rPr>
-            <a:t>with upside </a:t>
+            <a:t>DE: with upside </a:t>
           </a:r>
           <a:r>
             <a:rPr lang="en-GB" dirty="0" smtClean="0">
               <a:latin typeface="Calibri" panose="020F0502020204030204" pitchFamily="34" charset="0"/>
             </a:rPr>
-            <a:t>risks</a:t>
+            <a:t>DE: risks</a:t>
           </a:r>
         </a:p>
       </dgm:t>
@@ -2821,7 +2821,7 @@
             <a:rPr lang="en-GB" dirty="0" smtClean="0">
               <a:latin typeface="Calibri" panose="020F0502020204030204" pitchFamily="34" charset="0"/>
             </a:rPr>
-            <a:t>More needs to be done to share the gains from structural trends and trade</a:t>
+            <a:t>DE: More needs to be done to share the gains from structural trends and trade</a:t>
           </a:r>
         </a:p>
       </dgm:t>
@@ -2863,7 +2863,7 @@
             <a:rPr lang="en-GB" dirty="0" smtClean="0">
               <a:latin typeface="Calibri" panose="020F0502020204030204" pitchFamily="34" charset="0"/>
             </a:rPr>
-            <a:t>An integrated policy approach is needed to make globalisation work for all</a:t>
+            <a:t>DE: An integrated policy approach is needed to make globalisation work for all</a:t>
           </a:r>
         </a:p>
       </dgm:t>
@@ -2910,7 +2910,7 @@
               </a:solidFill>
               <a:latin typeface="Calibri" panose="020F0502020204030204" pitchFamily="34" charset="0"/>
             </a:rPr>
-            <a:t>Changes to technology, consumer preferences and trade are occurring simultaneously</a:t>
+            <a:t>DE: Changes to technology, consumer preferences and trade are occurring simultaneously</a:t>
           </a:r>
         </a:p>
       </dgm:t>
@@ -2958,7 +2958,7 @@
               </a:solidFill>
               <a:latin typeface="Calibri" panose="020F0502020204030204" pitchFamily="34" charset="0"/>
             </a:rPr>
-            <a:t>A more level playing field for the international system</a:t>
+            <a:t>DE: A more level playing field for the international system</a:t>
           </a:r>
         </a:p>
       </dgm:t>
@@ -3005,7 +3005,7 @@
               </a:solidFill>
               <a:latin typeface="Calibri" panose="020F0502020204030204" pitchFamily="34" charset="0"/>
             </a:rPr>
-            <a:t>Confidence is increasing and investment and trade are picking up from low levels</a:t>
+            <a:t>DE: Confidence is increasing and investment and trade are picking up from low levels</a:t>
           </a:r>
         </a:p>
       </dgm:t>
@@ -3052,7 +3052,7 @@
               </a:solidFill>
               <a:latin typeface="Calibri" panose="020F0502020204030204" pitchFamily="34" charset="0"/>
             </a:rPr>
-            <a:t>Signs of rising demand for high-tech goods and investment to upgrade capital</a:t>
+            <a:t>DE: Signs of rising demand for high-tech goods and investment to upgrade capital</a:t>
           </a:r>
         </a:p>
       </dgm:t>
@@ -3100,7 +3100,7 @@
               </a:solidFill>
               <a:latin typeface="Calibri" panose="020F0502020204030204" pitchFamily="34" charset="0"/>
             </a:rPr>
-            <a:t>Domestic reforms to boost competition, job creation, skills and innovation</a:t>
+            <a:t>DE: Domestic reforms to boost competition, job creation, skills and innovation</a:t>
           </a:r>
         </a:p>
       </dgm:t>
@@ -3142,7 +3142,7 @@
             <a:rPr lang="en-GB" dirty="0" smtClean="0">
               <a:latin typeface="Calibri" panose="020F0502020204030204" pitchFamily="34" charset="0"/>
             </a:rPr>
-            <a:t>Productivity and wage growth remain subdued; financial stability risks persist</a:t>
+            <a:t>DE: Productivity and wage growth remain subdued; financial stability risks persist</a:t>
           </a:r>
         </a:p>
       </dgm:t>
@@ -3189,7 +3189,7 @@
               </a:solidFill>
               <a:latin typeface="Calibri" panose="020F0502020204030204" pitchFamily="34" charset="0"/>
             </a:rPr>
-            <a:t>Job losses from shifts in activity are concentrated in manufacturing and specific regions</a:t>
+            <a:t>DE: Job losses from shifts in activity are concentrated in manufacturing and specific regions</a:t>
           </a:r>
         </a:p>
       </dgm:t>
@@ -3236,7 +3236,7 @@
               </a:solidFill>
               <a:latin typeface="Calibri" panose="020F0502020204030204" pitchFamily="34" charset="0"/>
             </a:rPr>
-            <a:t>Growth is broad based; recovery in commodity producers helps the modest global upturn</a:t>
+            <a:t>DE: Growth is broad based; recovery in commodity producers helps the modest global upturn</a:t>
           </a:r>
           <a:endParaRPr lang="en-GB" dirty="0" smtClean="0">
             <a:solidFill>
@@ -3291,7 +3291,7 @@
               </a:solidFill>
               <a:latin typeface="Calibri" panose="020F0502020204030204" pitchFamily="34" charset="0"/>
             </a:rPr>
-            <a:t>Headline employment indicators are improving but labour markets have not recovered</a:t>
+            <a:t>DE: Headline employment indicators are improving but labour markets have not recovered</a:t>
           </a:r>
         </a:p>
       </dgm:t>
@@ -3338,7 +3338,7 @@
               </a:solidFill>
               <a:latin typeface="Calibri" panose="020F0502020204030204" pitchFamily="34" charset="0"/>
             </a:rPr>
-            <a:t>Financial risks from high and rising credit growth, house price increases, interest rate gaps</a:t>
+            <a:t>DE: Financial risks from high and rising credit growth, house price increases, interest rate gaps</a:t>
           </a:r>
           <a:endParaRPr lang="en-GB" dirty="0" smtClean="0">
             <a:solidFill>
@@ -3394,7 +3394,7 @@
               </a:solidFill>
               <a:latin typeface="Calibri" panose="020F0502020204030204" pitchFamily="34" charset="0"/>
             </a:rPr>
-            <a:t>Targeted policies to help people who are left behind seize new opportunities</a:t>
+            <a:t>DE: Targeted policies to help people who are left behind seize new opportunities</a:t>
           </a:r>
         </a:p>
       </dgm:t>
@@ -3636,7 +3636,7 @@
             <a:rPr lang="en-GB" sz="2000" dirty="0" smtClean="0">
               <a:latin typeface="Calibri" panose="020F0502020204030204" pitchFamily="34" charset="0"/>
             </a:rPr>
-            <a:t>Actions to improve the international environment:</a:t>
+            <a:t>DE: Actions to improve the international environment:</a:t>
           </a:r>
         </a:p>
       </dgm:t>
@@ -3683,7 +3683,7 @@
               </a:solidFill>
               <a:latin typeface="Calibri" panose="020F0502020204030204" pitchFamily="34" charset="0"/>
             </a:rPr>
-            <a:t>Preserve institutions and standards, such as for labour and environmental protection</a:t>
+            <a:t>DE: Preserve institutions and standards, such as for labour and environmental protection</a:t>
           </a:r>
         </a:p>
       </dgm:t>
@@ -3730,7 +3730,7 @@
               </a:solidFill>
               <a:latin typeface="Calibri" panose="020F0502020204030204" pitchFamily="34" charset="0"/>
             </a:rPr>
-            <a:t>Pursue open markets for cross-border trade and investment</a:t>
+            <a:t>DE: Pursue open markets for cross-border trade and investment</a:t>
           </a:r>
         </a:p>
       </dgm:t>
@@ -3777,7 +3777,7 @@
               </a:solidFill>
               <a:latin typeface="Calibri" panose="020F0502020204030204" pitchFamily="34" charset="0"/>
             </a:rPr>
-            <a:t>Promote multilateral cooperation, e.g. on tax base erosion and profit shifting and competition policy</a:t>
+            <a:t>DE: Promote multilateral cooperation, e.g. on tax base erosion and profit shifting and competition policy</a:t>
           </a:r>
         </a:p>
       </dgm:t>
@@ -3824,7 +3824,7 @@
               </a:solidFill>
               <a:latin typeface="Calibri" panose="020F0502020204030204" pitchFamily="34" charset="0"/>
             </a:rPr>
-            <a:t>Combat corruption, illicit trade and counterfeiting</a:t>
+            <a:t>DE: Combat corruption, illicit trade and counterfeiting</a:t>
           </a:r>
         </a:p>
       </dgm:t>
@@ -4079,7 +4079,7 @@
             <a:rPr lang="en-GB" sz="1600" b="1" dirty="0" smtClean="0">
               <a:latin typeface="Calibri" panose="020F0502020204030204" pitchFamily="34" charset="0"/>
             </a:rPr>
-            <a:t>Make the international system fairer and work better</a:t>
+            <a:t>DE: Make the international system fairer and work better</a:t>
           </a:r>
           <a:endParaRPr lang="en-GB" sz="1600" b="1" dirty="0">
             <a:latin typeface="Calibri" panose="020F0502020204030204" pitchFamily="34" charset="0"/>
@@ -4127,7 +4127,7 @@
               </a:solidFill>
               <a:latin typeface="Calibri" panose="020F0502020204030204" pitchFamily="34" charset="0"/>
             </a:rPr>
-            <a:t>Policies to encourage new firms, innovation &amp; job creation</a:t>
+            <a:t>DE: Policies to encourage new firms, innovation  job creation</a:t>
           </a:r>
           <a:endParaRPr lang="en-GB" sz="1600" b="1" dirty="0">
             <a:solidFill>
@@ -4175,13 +4175,13 @@
             <a:rPr lang="en-GB" sz="1600" b="1" dirty="0" smtClean="0">
               <a:latin typeface="Calibri" panose="020F0502020204030204" pitchFamily="34" charset="0"/>
             </a:rPr>
-            <a:t>Targeted policies to help people seize new </a:t>
+            <a:t>DE: Targeted policies to help people seize new </a:t>
           </a:r>
           <a:r>
             <a:rPr lang="en-GB" sz="1550" b="1" dirty="0" smtClean="0">
               <a:latin typeface="Calibri" panose="020F0502020204030204" pitchFamily="34" charset="0"/>
             </a:rPr>
-            <a:t>opportunities</a:t>
+            <a:t>DE: opportunities</a:t>
           </a:r>
           <a:endParaRPr lang="en-GB" sz="1550" b="1" dirty="0">
             <a:latin typeface="Calibri" panose="020F0502020204030204" pitchFamily="34" charset="0"/>

--- a/fixtures/real-world/oecd-economic-outlook-2017-de.pptx
+++ b/fixtures/real-world/oecd-economic-outlook-2017-de.pptx
@@ -2767,19 +2767,19 @@
             <a:rPr lang="en-GB" dirty="0" smtClean="0">
               <a:latin typeface="Calibri" panose="020F0502020204030204" pitchFamily="34" charset="0"/>
             </a:rPr>
-            <a:t>DE: Global growth expected to pick-up modestly </a:t>
+            <a:t>Globales Wachstum dürfte moderat anziehen </a:t>
           </a:r>
           <a:r>
             <a:rPr lang="en-GB" smtClean="0">
               <a:latin typeface="Calibri" panose="020F0502020204030204" pitchFamily="34" charset="0"/>
             </a:rPr>
-            <a:t>DE: with upside </a:t>
+            <a:t>mit Aufwärts</a:t>
           </a:r>
           <a:r>
             <a:rPr lang="en-GB" dirty="0" smtClean="0">
               <a:latin typeface="Calibri" panose="020F0502020204030204" pitchFamily="34" charset="0"/>
             </a:rPr>
-            <a:t>DE: risks</a:t>
+            <a:t>risiken</a:t>
           </a:r>
         </a:p>
       </dgm:t>
@@ -2821,7 +2821,7 @@
             <a:rPr lang="en-GB" dirty="0" smtClean="0">
               <a:latin typeface="Calibri" panose="020F0502020204030204" pitchFamily="34" charset="0"/>
             </a:rPr>
-            <a:t>DE: More needs to be done to share the gains from structural trends and trade</a:t>
+            <a:t>Es bleibt mehr zu tun, um die Gewinne aus Strukturtrends und Handel breiter zu teilen</a:t>
           </a:r>
         </a:p>
       </dgm:t>
@@ -2863,7 +2863,7 @@
             <a:rPr lang="en-GB" dirty="0" smtClean="0">
               <a:latin typeface="Calibri" panose="020F0502020204030204" pitchFamily="34" charset="0"/>
             </a:rPr>
-            <a:t>DE: An integrated policy approach is needed to make globalisation work for all</a:t>
+            <a:t>Ein integrierter Politikansatz ist nötig, damit die Globalisierung allen zugutekommt</a:t>
           </a:r>
         </a:p>
       </dgm:t>
@@ -2910,7 +2910,7 @@
               </a:solidFill>
               <a:latin typeface="Calibri" panose="020F0502020204030204" pitchFamily="34" charset="0"/>
             </a:rPr>
-            <a:t>DE: Changes to technology, consumer preferences and trade are occurring simultaneously</a:t>
+            <a:t>Veränderungen bei Technologie, Verbraucherpräferenzen und Handel vollziehen sich gleichzeitig</a:t>
           </a:r>
         </a:p>
       </dgm:t>
@@ -2958,7 +2958,7 @@
               </a:solidFill>
               <a:latin typeface="Calibri" panose="020F0502020204030204" pitchFamily="34" charset="0"/>
             </a:rPr>
-            <a:t>DE: A more level playing field for the international system</a:t>
+            <a:t>Gleichere Wettbewerbsbedingungen für das internationale System</a:t>
           </a:r>
         </a:p>
       </dgm:t>
@@ -3005,7 +3005,7 @@
               </a:solidFill>
               <a:latin typeface="Calibri" panose="020F0502020204030204" pitchFamily="34" charset="0"/>
             </a:rPr>
-            <a:t>DE: Confidence is increasing and investment and trade are picking up from low levels</a:t>
+            <a:t>Das Vertrauen steigt, und Investitionen und Handel ziehen von niedrigem Niveau aus an</a:t>
           </a:r>
         </a:p>
       </dgm:t>
@@ -3052,7 +3052,7 @@
               </a:solidFill>
               <a:latin typeface="Calibri" panose="020F0502020204030204" pitchFamily="34" charset="0"/>
             </a:rPr>
-            <a:t>DE: Signs of rising demand for high-tech goods and investment to upgrade capital</a:t>
+            <a:t>Anzeichen für steigende Nachfrage nach Hightech-Gütern und Investitionen zur Modernisierung des Kapitals</a:t>
           </a:r>
         </a:p>
       </dgm:t>
@@ -3100,7 +3100,7 @@
               </a:solidFill>
               <a:latin typeface="Calibri" panose="020F0502020204030204" pitchFamily="34" charset="0"/>
             </a:rPr>
-            <a:t>DE: Domestic reforms to boost competition, job creation, skills and innovation</a:t>
+            <a:t>Inländische Reformen zur Stärkung von Wettbewerb, Beschäftigung, Qualifikationen und Innovation</a:t>
           </a:r>
         </a:p>
       </dgm:t>
@@ -3142,7 +3142,7 @@
             <a:rPr lang="en-GB" dirty="0" smtClean="0">
               <a:latin typeface="Calibri" panose="020F0502020204030204" pitchFamily="34" charset="0"/>
             </a:rPr>
-            <a:t>DE: Productivity and wage growth remain subdued; financial stability risks persist</a:t>
+            <a:t>Produktivitäts- und Lohnwachstum bleiben gedämpft; Risiken für die Finanzstabilität bestehen fort</a:t>
           </a:r>
         </a:p>
       </dgm:t>
@@ -3189,7 +3189,7 @@
               </a:solidFill>
               <a:latin typeface="Calibri" panose="020F0502020204030204" pitchFamily="34" charset="0"/>
             </a:rPr>
-            <a:t>DE: Job losses from shifts in activity are concentrated in manufacturing and specific regions</a:t>
+            <a:t>Arbeitsplatzverluste durch Aktivitätsverlagerungen konzentrieren sich auf das verarbeitende Gewerbe und bestimmte Regionen</a:t>
           </a:r>
         </a:p>
       </dgm:t>
@@ -3236,7 +3236,7 @@
               </a:solidFill>
               <a:latin typeface="Calibri" panose="020F0502020204030204" pitchFamily="34" charset="0"/>
             </a:rPr>
-            <a:t>DE: Growth is broad based; recovery in commodity producers helps the modest global upturn</a:t>
+            <a:t>Das Wachstum ist breit angelegt; die Erholung bei Rohstoffproduzenten stützt den moderaten globalen Aufschwung</a:t>
           </a:r>
           <a:endParaRPr lang="en-GB" dirty="0" smtClean="0">
             <a:solidFill>
@@ -3291,7 +3291,7 @@
               </a:solidFill>
               <a:latin typeface="Calibri" panose="020F0502020204030204" pitchFamily="34" charset="0"/>
             </a:rPr>
-            <a:t>DE: Headline employment indicators are improving but labour markets have not recovered</a:t>
+            <a:t>Die wichtigsten Beschäftigungsindikatoren verbessern sich, doch die Arbeitsmärkte haben sich noch nicht erholt</a:t>
           </a:r>
         </a:p>
       </dgm:t>
@@ -3338,7 +3338,7 @@
               </a:solidFill>
               <a:latin typeface="Calibri" panose="020F0502020204030204" pitchFamily="34" charset="0"/>
             </a:rPr>
-            <a:t>DE: Financial risks from high and rising credit growth, house price increases, interest rate gaps</a:t>
+            <a:t>Finanzielle Risiken durch hohes und steigendes Kreditwachstum, steigende Immobilienpreise und Zinsdivergenzen</a:t>
           </a:r>
           <a:endParaRPr lang="en-GB" dirty="0" smtClean="0">
             <a:solidFill>
@@ -3394,7 +3394,7 @@
               </a:solidFill>
               <a:latin typeface="Calibri" panose="020F0502020204030204" pitchFamily="34" charset="0"/>
             </a:rPr>
-            <a:t>DE: Targeted policies to help people who are left behind seize new opportunities</a:t>
+            <a:t>Gezielte Maßnahmen, um Menschen, die zurückbleiben, neue Chancen zu eröffnen</a:t>
           </a:r>
         </a:p>
       </dgm:t>
@@ -3636,7 +3636,7 @@
             <a:rPr lang="en-GB" sz="2000" dirty="0" smtClean="0">
               <a:latin typeface="Calibri" panose="020F0502020204030204" pitchFamily="34" charset="0"/>
             </a:rPr>
-            <a:t>DE: Actions to improve the international environment:</a:t>
+            <a:t>Maßnahmen zur Verbesserung des internationalen Umfelds:</a:t>
           </a:r>
         </a:p>
       </dgm:t>
@@ -3683,7 +3683,7 @@
               </a:solidFill>
               <a:latin typeface="Calibri" panose="020F0502020204030204" pitchFamily="34" charset="0"/>
             </a:rPr>
-            <a:t>DE: Preserve institutions and standards, such as for labour and environmental protection</a:t>
+            <a:t>Institutionen und Standards bewahren, etwa für Arbeits- und Umweltschutz</a:t>
           </a:r>
         </a:p>
       </dgm:t>
@@ -3730,7 +3730,7 @@
               </a:solidFill>
               <a:latin typeface="Calibri" panose="020F0502020204030204" pitchFamily="34" charset="0"/>
             </a:rPr>
-            <a:t>DE: Pursue open markets for cross-border trade and investment</a:t>
+            <a:t>Offene Märkte für grenzüberschreitenden Handel und Investitionen anstreben</a:t>
           </a:r>
         </a:p>
       </dgm:t>
@@ -3777,7 +3777,7 @@
               </a:solidFill>
               <a:latin typeface="Calibri" panose="020F0502020204030204" pitchFamily="34" charset="0"/>
             </a:rPr>
-            <a:t>DE: Promote multilateral cooperation, e.g. on tax base erosion and profit shifting and competition policy</a:t>
+            <a:t>Multilaterale Zusammenarbeit fördern, z. B. bei Gewinnverkürzung und Gewinnverlagerung sowie der Wettbewerbspolitik</a:t>
           </a:r>
         </a:p>
       </dgm:t>
@@ -3824,7 +3824,7 @@
               </a:solidFill>
               <a:latin typeface="Calibri" panose="020F0502020204030204" pitchFamily="34" charset="0"/>
             </a:rPr>
-            <a:t>DE: Combat corruption, illicit trade and counterfeiting</a:t>
+            <a:t>Korruption, illegalen Handel und Produktfälschung bekämpfen</a:t>
           </a:r>
         </a:p>
       </dgm:t>
@@ -4079,7 +4079,7 @@
             <a:rPr lang="en-GB" sz="1600" b="1" dirty="0" smtClean="0">
               <a:latin typeface="Calibri" panose="020F0502020204030204" pitchFamily="34" charset="0"/>
             </a:rPr>
-            <a:t>DE: Make the international system fairer and work better</a:t>
+            <a:t>Das internationale System gerechter gestalten und besser zum Funktionieren bringen</a:t>
           </a:r>
           <a:endParaRPr lang="en-GB" sz="1600" b="1" dirty="0">
             <a:latin typeface="Calibri" panose="020F0502020204030204" pitchFamily="34" charset="0"/>
@@ -4127,7 +4127,7 @@
               </a:solidFill>
               <a:latin typeface="Calibri" panose="020F0502020204030204" pitchFamily="34" charset="0"/>
             </a:rPr>
-            <a:t>DE: Policies to encourage new firms, innovation  job creation</a:t>
+            <a:t>Maßnahmen zur Förderung neuer Unternehmen, Innovation und Beschäftigung</a:t>
           </a:r>
           <a:endParaRPr lang="en-GB" sz="1600" b="1" dirty="0">
             <a:solidFill>
@@ -4175,13 +4175,13 @@
             <a:rPr lang="en-GB" sz="1600" b="1" dirty="0" smtClean="0">
               <a:latin typeface="Calibri" panose="020F0502020204030204" pitchFamily="34" charset="0"/>
             </a:rPr>
-            <a:t>DE: Targeted policies to help people seize new </a:t>
+            <a:t>Gezielte Maßnahmen, um Menschen zu helfen, neue </a:t>
           </a:r>
           <a:r>
             <a:rPr lang="en-GB" sz="1550" b="1" dirty="0" smtClean="0">
               <a:latin typeface="Calibri" panose="020F0502020204030204" pitchFamily="34" charset="0"/>
             </a:rPr>
-            <a:t>DE: opportunities</a:t>
+            <a:t>Chancen zu ergreifen</a:t>
           </a:r>
           <a:endParaRPr lang="en-GB" sz="1550" b="1" dirty="0">
             <a:latin typeface="Calibri" panose="020F0502020204030204" pitchFamily="34" charset="0"/>
@@ -4433,19 +4433,19 @@
             <a:rPr lang="en-GB" sz="2000" kern="1200" dirty="0" smtClean="0">
               <a:latin typeface="Calibri" panose="020F0502020204030204" pitchFamily="34" charset="0"/>
             </a:rPr>
-            <a:t>Global growth expected to pick-up modestly </a:t>
+            <a:t>Globales Wachstum dürfte moderat anziehen </a:t>
           </a:r>
           <a:r>
             <a:rPr lang="en-GB" sz="2000" kern="1200" smtClean="0">
               <a:latin typeface="Calibri" panose="020F0502020204030204" pitchFamily="34" charset="0"/>
             </a:rPr>
-            <a:t>with upside </a:t>
+            <a:t>mit Aufwärts</a:t>
           </a:r>
           <a:r>
             <a:rPr lang="en-GB" sz="2000" kern="1200" dirty="0" smtClean="0">
               <a:latin typeface="Calibri" panose="020F0502020204030204" pitchFamily="34" charset="0"/>
             </a:rPr>
-            <a:t>risks</a:t>
+            <a:t>risiken</a:t>
           </a:r>
         </a:p>
       </dsp:txBody>
@@ -4512,7 +4512,7 @@
               </a:solidFill>
               <a:latin typeface="Calibri" panose="020F0502020204030204" pitchFamily="34" charset="0"/>
             </a:rPr>
-            <a:t>Confidence is increasing and investment and trade are picking up from low levels</a:t>
+            <a:t>Es bleibt mehr zu tun, um die Gewinne aus Strukturtrends und Handel breiter zu teilen</a:t>
           </a:r>
         </a:p>
         <a:p>
@@ -4537,7 +4537,7 @@
               </a:solidFill>
               <a:latin typeface="Calibri" panose="020F0502020204030204" pitchFamily="34" charset="0"/>
             </a:rPr>
-            <a:t>Growth is broad based; recovery in commodity producers helps the modest global upturn</a:t>
+            <a:t>Ein integrierter Politikansatz ist nötig, damit die Globalisierung allen zugutekommt</a:t>
           </a:r>
           <a:endParaRPr lang="en-GB" sz="1600" kern="1200" dirty="0" smtClean="0">
             <a:solidFill>
@@ -4570,7 +4570,7 @@
               </a:solidFill>
               <a:latin typeface="Calibri" panose="020F0502020204030204" pitchFamily="34" charset="0"/>
             </a:rPr>
-            <a:t>Signs of rising demand for high-tech goods and investment to upgrade capital</a:t>
+            <a:t>Veränderungen bei Technologie, Verbraucherpräferenzen und Handel vollziehen sich gleichzeitig</a:t>
           </a:r>
         </a:p>
       </dsp:txBody>
@@ -4648,7 +4648,7 @@
             <a:rPr lang="en-GB" sz="2000" kern="1200" dirty="0" smtClean="0">
               <a:latin typeface="Calibri" panose="020F0502020204030204" pitchFamily="34" charset="0"/>
             </a:rPr>
-            <a:t>Productivity and wage growth remain subdued; financial stability risks persist</a:t>
+            <a:t>Gleichere Wettbewerbsbedingungen für das internationale System</a:t>
           </a:r>
         </a:p>
       </dsp:txBody>
@@ -4715,7 +4715,7 @@
               </a:solidFill>
               <a:latin typeface="Calibri" panose="020F0502020204030204" pitchFamily="34" charset="0"/>
             </a:rPr>
-            <a:t>Headline employment indicators are improving but labour markets have not recovered</a:t>
+            <a:t>Das Vertrauen steigt, und Investitionen und Handel ziehen von niedrigem Niveau aus an</a:t>
           </a:r>
         </a:p>
         <a:p>
@@ -4740,7 +4740,7 @@
               </a:solidFill>
               <a:latin typeface="Calibri" panose="020F0502020204030204" pitchFamily="34" charset="0"/>
             </a:rPr>
-            <a:t>Financial risks from high and rising credit growth, house price increases, interest rate gaps</a:t>
+            <a:t>Anzeichen für steigende Nachfrage nach Hightech-Gütern und Investitionen zur Modernisierung des Kapitals</a:t>
           </a:r>
           <a:endParaRPr lang="en-GB" sz="1600" kern="1200" dirty="0" smtClean="0">
             <a:solidFill>
@@ -4826,7 +4826,7 @@
             <a:rPr lang="en-GB" sz="2000" kern="1200" dirty="0" smtClean="0">
               <a:latin typeface="Calibri" panose="020F0502020204030204" pitchFamily="34" charset="0"/>
             </a:rPr>
-            <a:t>More needs to be done to share the gains from structural trends and trade</a:t>
+            <a:t>Inländische Reformen zur Stärkung von Wettbewerb, Beschäftigung, Qualifikationen und Innovation</a:t>
           </a:r>
         </a:p>
       </dsp:txBody>
@@ -4893,7 +4893,7 @@
               </a:solidFill>
               <a:latin typeface="Calibri" panose="020F0502020204030204" pitchFamily="34" charset="0"/>
             </a:rPr>
-            <a:t>Changes to technology, consumer preferences and trade are occurring simultaneously</a:t>
+            <a:t>Produktivitäts- und Lohnwachstum bleiben gedämpft; Risiken für die Finanzstabilität bestehen fort</a:t>
           </a:r>
         </a:p>
         <a:p>
@@ -4918,7 +4918,7 @@
               </a:solidFill>
               <a:latin typeface="Calibri" panose="020F0502020204030204" pitchFamily="34" charset="0"/>
             </a:rPr>
-            <a:t>Job losses from shifts in activity are concentrated in manufacturing and specific regions</a:t>
+            <a:t>Arbeitsplatzverluste durch Aktivitätsverlagerungen konzentrieren sich auf das verarbeitende Gewerbe und bestimmte Regionen</a:t>
           </a:r>
         </a:p>
       </dsp:txBody>
@@ -4996,7 +4996,7 @@
             <a:rPr lang="en-GB" sz="2000" kern="1200" dirty="0" smtClean="0">
               <a:latin typeface="Calibri" panose="020F0502020204030204" pitchFamily="34" charset="0"/>
             </a:rPr>
-            <a:t>An integrated policy approach is needed to make globalisation work for all</a:t>
+            <a:t>Das Wachstum ist breit angelegt; die Erholung bei Rohstoffproduzenten stützt den moderaten globalen Aufschwung</a:t>
           </a:r>
         </a:p>
       </dsp:txBody>
@@ -5063,7 +5063,7 @@
               </a:solidFill>
               <a:latin typeface="Calibri" panose="020F0502020204030204" pitchFamily="34" charset="0"/>
             </a:rPr>
-            <a:t>A more level playing field for the international system</a:t>
+            <a:t>Die wichtigsten Beschäftigungsindikatoren verbessern sich, doch die Arbeitsmärkte haben sich noch nicht erholt</a:t>
           </a:r>
         </a:p>
         <a:p>
@@ -5088,7 +5088,7 @@
               </a:solidFill>
               <a:latin typeface="Calibri" panose="020F0502020204030204" pitchFamily="34" charset="0"/>
             </a:rPr>
-            <a:t>Domestic reforms to boost competition, job creation, skills and innovation</a:t>
+            <a:t>Finanzielle Risiken durch hohes und steigendes Kreditwachstum, steigende Immobilienpreise und Zinsdivergenzen</a:t>
           </a:r>
         </a:p>
         <a:p>
@@ -5113,7 +5113,7 @@
               </a:solidFill>
               <a:latin typeface="Calibri" panose="020F0502020204030204" pitchFamily="34" charset="0"/>
             </a:rPr>
-            <a:t>Targeted policies to help people who are left behind seize new opportunities</a:t>
+            <a:t>Gezielte Maßnahmen, um Menschen, die zurückbleiben, neue Chancen zu eröffnen</a:t>
           </a:r>
         </a:p>
       </dsp:txBody>
@@ -14308,7 +14308,6 @@
           </a:bodyPr>
           <a:lstStyle/>
           <a:p>
-            <a:pPr algn="ctr"/>
             <a:r>
               <a:rPr lang="en-GB" sz="3400" b="1" dirty="0" smtClean="0">
                 <a:solidFill>
@@ -14316,25 +14315,10 @@
                 </a:solidFill>
                 <a:latin typeface="Arial"/>
               </a:rPr>
-              <a:t/>
+              <a:t>OECD ECONOMIC OUTLOOK</a:t>
             </a:r>
-            <a:br>
-              <a:rPr lang="en-GB" sz="3400" b="1" dirty="0" smtClean="0">
-                <a:solidFill>
-                  <a:prstClr val="white"/>
-                </a:solidFill>
-                <a:latin typeface="Arial"/>
-              </a:rPr>
-            </a:br>
-            <a:r>
-              <a:rPr lang="en-GB" sz="3600" b="1" dirty="0" smtClean="0">
-                <a:solidFill>
-                  <a:prstClr val="white"/>
-                </a:solidFill>
-                <a:latin typeface="Arial"/>
-              </a:rPr>
-              <a:t>OECD WIRTSCHAFTSAUSBLICK</a:t>
-            </a:r>
+          </a:p>
+          <a:p>
             <a:r>
               <a:rPr lang="en-GB" sz="3400" b="1" dirty="0" smtClean="0">
                 <a:solidFill>
@@ -14342,40 +14326,8 @@
                 </a:solidFill>
                 <a:latin typeface="Arial"/>
               </a:rPr>
-              <a:t/>
-            </a:r>
-            <a:br>
-              <a:rPr lang="en-GB" sz="3400" b="1" dirty="0" smtClean="0">
-                <a:solidFill>
-                  <a:prstClr val="white"/>
-                </a:solidFill>
-                <a:latin typeface="Arial"/>
-              </a:rPr>
-            </a:br>
-            <a:endParaRPr lang="en-US" sz="3600" i="1" dirty="0" smtClean="0">
-              <a:solidFill>
-                <a:prstClr val="white"/>
-              </a:solidFill>
-              <a:latin typeface="Arial"/>
-            </a:endParaRPr>
-          </a:p>
-          <a:p>
-            <a:pPr algn="ctr"/>
-            <a:r>
-              <a:rPr lang="en-US" sz="4400" i="1" dirty="0" smtClean="0">
-                <a:solidFill>
-                  <a:prstClr val="white"/>
-                </a:solidFill>
-                <a:latin typeface="Arial"/>
-              </a:rPr>
               <a:t>Besser, aber noch nicht gut genug</a:t>
             </a:r>
-            <a:endParaRPr lang="en-US" sz="4400" i="1" dirty="0">
-              <a:solidFill>
-                <a:prstClr val="white"/>
-              </a:solidFill>
-              <a:latin typeface="Arial"/>
-            </a:endParaRPr>
           </a:p>
         </p:txBody>
       </p:sp>
@@ -14419,14 +14371,8 @@
                 </a:solidFill>
                 <a:latin typeface="Arial"/>
               </a:rPr>
-              <a:t>ECOSCOPE blog: oecdecoscope.wordpress.com</a:t>
+              <a:t>ECOSCOPE-Blog: oecdecoscope.wordpress.com</a:t>
             </a:r>
-            <a:endParaRPr lang="en-GB" sz="1600" dirty="0">
-              <a:solidFill>
-                <a:prstClr val="white"/>
-              </a:solidFill>
-              <a:latin typeface="Arial"/>
-            </a:endParaRPr>
           </a:p>
         </p:txBody>
       </p:sp>
@@ -14458,9 +14404,6 @@
           <a:bodyPr/>
           <a:lstStyle/>
           <a:p>
-            <a:pPr lvl="0" algn="ctr" eaLnBrk="0" hangingPunct="0">
-              <a:defRPr/>
-            </a:pPr>
             <a:r>
               <a:rPr lang="en-GB" sz="2800" b="1" dirty="0" smtClean="0">
                 <a:solidFill>
@@ -14471,139 +14414,41 @@
               </a:rPr>
               <a:t> </a:t>
             </a:r>
+          </a:p>
+          <a:p>
             <a:r>
-              <a:rPr lang="en-US" b="1" dirty="0" smtClean="0">
+              <a:rPr lang="en-GB" sz="2800" b="1" dirty="0" smtClean="0">
                 <a:solidFill>
-                  <a:schemeClr val="bg1"/>
+                  <a:srgbClr val="898989"/>
                 </a:solidFill>
-                <a:latin typeface="+mj-lt"/>
+                <a:latin typeface="+mn-lt"/>
                 <a:cs typeface="+mn-cs"/>
               </a:rPr>
               <a:t/>
             </a:r>
-            <a:br>
-              <a:rPr lang="en-US" b="1" dirty="0" smtClean="0">
-                <a:solidFill>
-                  <a:schemeClr val="bg1"/>
-                </a:solidFill>
-                <a:latin typeface="+mj-lt"/>
-                <a:cs typeface="+mn-cs"/>
-              </a:rPr>
-            </a:br>
-            <a:r>
-              <a:rPr lang="en-GB" b="1" dirty="0" smtClean="0">
-                <a:solidFill>
-                  <a:schemeClr val="bg1"/>
-                </a:solidFill>
-                <a:latin typeface="+mj-lt"/>
-                <a:cs typeface="+mn-cs"/>
-              </a:rPr>
-              <a:t/>
-            </a:r>
-            <a:br>
-              <a:rPr lang="en-GB" b="1" dirty="0" smtClean="0">
-                <a:solidFill>
-                  <a:schemeClr val="bg1"/>
-                </a:solidFill>
-                <a:latin typeface="+mj-lt"/>
-                <a:cs typeface="+mn-cs"/>
-              </a:rPr>
-            </a:br>
-            <a:endParaRPr lang="en-GB" b="1" dirty="0" smtClean="0">
-              <a:solidFill>
-                <a:schemeClr val="bg1"/>
-              </a:solidFill>
-              <a:latin typeface="+mj-lt"/>
-              <a:cs typeface="+mn-cs"/>
-            </a:endParaRPr>
           </a:p>
           <a:p>
-            <a:pPr lvl="0" algn="ctr" eaLnBrk="0" hangingPunct="0">
-              <a:defRPr/>
-            </a:pPr>
             <a:r>
-              <a:rPr lang="en-GB" b="1" dirty="0" smtClean="0">
+              <a:rPr lang="en-GB" sz="2800" b="1" dirty="0" smtClean="0">
                 <a:solidFill>
-                  <a:schemeClr val="bg1"/>
+                  <a:srgbClr val="898989"/>
                 </a:solidFill>
-                <a:latin typeface="+mj-lt"/>
-                <a:cs typeface="+mn-cs"/>
-              </a:rPr>
-              <a:t/>
-            </a:r>
-            <a:br>
-              <a:rPr lang="en-GB" b="1" dirty="0" smtClean="0">
-                <a:solidFill>
-                  <a:schemeClr val="bg1"/>
-                </a:solidFill>
-                <a:latin typeface="+mj-lt"/>
-                <a:cs typeface="+mn-cs"/>
-              </a:rPr>
-            </a:br>
-            <a:endParaRPr lang="en-GB" sz="800" b="1" dirty="0" smtClean="0">
-              <a:solidFill>
-                <a:schemeClr val="tx2">
-                  <a:lumMod val="40000"/>
-                  <a:lumOff val="60000"/>
-                </a:schemeClr>
-              </a:solidFill>
-              <a:latin typeface="+mj-lt"/>
-              <a:cs typeface="+mn-cs"/>
-            </a:endParaRPr>
-          </a:p>
-          <a:p>
-            <a:pPr algn="ctr" eaLnBrk="0" hangingPunct="0">
-              <a:spcBef>
-                <a:spcPts val="0"/>
-              </a:spcBef>
-              <a:defRPr/>
-            </a:pPr>
-            <a:r>
-              <a:rPr lang="en-GB" sz="2600" b="1" dirty="0" smtClean="0">
-                <a:solidFill>
-                  <a:schemeClr val="tx2">
-                    <a:lumMod val="40000"/>
-                    <a:lumOff val="60000"/>
-                  </a:schemeClr>
-                </a:solidFill>
-                <a:latin typeface="+mj-lt"/>
+                <a:latin typeface="+mn-lt"/>
                 <a:cs typeface="+mn-cs"/>
               </a:rPr>
               <a:t>Catherine L. Mann</a:t>
             </a:r>
           </a:p>
           <a:p>
-            <a:pPr algn="ctr" eaLnBrk="0" hangingPunct="0">
-              <a:spcBef>
-                <a:spcPts val="0"/>
-              </a:spcBef>
-              <a:defRPr/>
-            </a:pPr>
             <a:r>
-              <a:rPr lang="en-GB" sz="2200" b="1" dirty="0" smtClean="0">
+              <a:rPr lang="en-GB" sz="2800" b="1" dirty="0" smtClean="0">
                 <a:solidFill>
-                  <a:schemeClr val="tx2">
-                    <a:lumMod val="40000"/>
-                    <a:lumOff val="60000"/>
-                  </a:schemeClr>
+                  <a:srgbClr val="898989"/>
                 </a:solidFill>
-                <a:latin typeface="+mj-lt"/>
+                <a:latin typeface="+mn-lt"/>
                 <a:cs typeface="+mn-cs"/>
               </a:rPr>
-              <a:t>OECD-Chef</a:t>
-            </a:r>
-            <a:r>
-              <a:rPr lang="en-GB" sz="2200" b="1" dirty="0">
-                <a:solidFill>
-                  <a:schemeClr val="tx2">
-                    <a:lumMod val="40000"/>
-                    <a:lumOff val="60000"/>
-                  </a:schemeClr>
-                </a:solidFill>
-                <a:latin typeface="+mj-lt"/>
-                <a:cs typeface="+mn-cs"/>
-              </a:rPr>
-              <a:t>ökonom</a:t>
+              <a:t>OECD-Chefökonomin</a:t>
             </a:r>
           </a:p>
         </p:txBody>
@@ -14636,9 +14481,6 @@
           <a:bodyPr/>
           <a:lstStyle/>
           <a:p>
-            <a:pPr lvl="0" algn="ctr" eaLnBrk="0" hangingPunct="0">
-              <a:defRPr/>
-            </a:pPr>
             <a:r>
               <a:rPr lang="en-GB" sz="2800" b="1" dirty="0" smtClean="0">
                 <a:solidFill>
@@ -14647,66 +14489,8 @@
                 <a:latin typeface="+mn-lt"/>
                 <a:cs typeface="+mn-cs"/>
               </a:rPr>
-              <a:t> </a:t>
+              <a:t> 7. Juni 2017Paris</a:t>
             </a:r>
-            <a:r>
-              <a:rPr lang="en-US" b="1" dirty="0" smtClean="0">
-                <a:solidFill>
-                  <a:schemeClr val="bg1"/>
-                </a:solidFill>
-                <a:latin typeface="+mj-lt"/>
-                <a:cs typeface="+mn-cs"/>
-              </a:rPr>
-              <a:t>7. Juni 2017</a:t>
-            </a:r>
-            <a:br>
-              <a:rPr lang="en-US" b="1" dirty="0" smtClean="0">
-                <a:solidFill>
-                  <a:schemeClr val="bg1"/>
-                </a:solidFill>
-                <a:latin typeface="+mj-lt"/>
-                <a:cs typeface="+mn-cs"/>
-              </a:rPr>
-            </a:br>
-            <a:r>
-              <a:rPr lang="en-US" b="1" dirty="0" smtClean="0">
-                <a:solidFill>
-                  <a:schemeClr val="bg1"/>
-                </a:solidFill>
-                <a:latin typeface="+mj-lt"/>
-                <a:cs typeface="+mn-cs"/>
-              </a:rPr>
-              <a:t>Paris</a:t>
-            </a:r>
-            <a:r>
-              <a:rPr lang="en-GB" b="1" dirty="0" smtClean="0">
-                <a:solidFill>
-                  <a:schemeClr val="bg1"/>
-                </a:solidFill>
-                <a:latin typeface="+mj-lt"/>
-                <a:cs typeface="+mn-cs"/>
-              </a:rPr>
-              <a:t/>
-            </a:r>
-            <a:br>
-              <a:rPr lang="en-GB" b="1" dirty="0" smtClean="0">
-                <a:solidFill>
-                  <a:schemeClr val="bg1"/>
-                </a:solidFill>
-                <a:latin typeface="+mj-lt"/>
-                <a:cs typeface="+mn-cs"/>
-              </a:rPr>
-            </a:br>
-            <a:endParaRPr lang="en-GB" sz="2200" b="1" dirty="0">
-              <a:solidFill>
-                <a:schemeClr val="tx2">
-                  <a:lumMod val="40000"/>
-                  <a:lumOff val="60000"/>
-                </a:schemeClr>
-              </a:solidFill>
-              <a:latin typeface="+mj-lt"/>
-              <a:cs typeface="+mn-cs"/>
-            </a:endParaRPr>
           </a:p>
         </p:txBody>
       </p:sp>
@@ -14873,9 +14657,6 @@
           </a:bodyPr>
           <a:lstStyle/>
           <a:p>
-            <a:pPr algn="ctr">
-              <a:defRPr/>
-            </a:pPr>
             <a:r>
               <a:rPr lang="en-US" sz="2800" b="1" dirty="0" smtClean="0">
                 <a:solidFill>
@@ -14883,31 +14664,8 @@
                 </a:solidFill>
                 <a:latin typeface="+mj-lt"/>
               </a:rPr>
-              <a:t>Steigende private Kreditvergabe in Schwellenländern und </a:t>
+              <a:t>Steigende private Verschuldung in den Schwellenländern und Risiken am Wohnimmobilienmarkt in den fortgeschrittenen Volkswirtschaften</a:t>
             </a:r>
-            <a:br>
-              <a:rPr lang="en-US" sz="2800" b="1" dirty="0" smtClean="0">
-                <a:solidFill>
-                  <a:schemeClr val="tx2"/>
-                </a:solidFill>
-                <a:latin typeface="+mj-lt"/>
-              </a:rPr>
-            </a:br>
-            <a:r>
-              <a:rPr lang="en-US" sz="2800" b="1" dirty="0" smtClean="0">
-                <a:solidFill>
-                  <a:schemeClr val="tx2"/>
-                </a:solidFill>
-                <a:latin typeface="+mj-lt"/>
-              </a:rPr>
-              <a:t>Wohnungsmarktrisiken in fortgeschrittenen Volkswirtschaften</a:t>
-            </a:r>
-            <a:endParaRPr lang="en-GB" sz="2800" b="1" dirty="0">
-              <a:solidFill>
-                <a:schemeClr val="tx2"/>
-              </a:solidFill>
-              <a:latin typeface="+mj-lt"/>
-            </a:endParaRPr>
           </a:p>
         </p:txBody>
       </p:sp>
@@ -14942,125 +14700,8 @@
                 </a:solidFill>
                 <a:latin typeface="Calibri" panose="020F0502020204030204" pitchFamily="34" charset="0"/>
               </a:rPr>
-              <a:t>Anmerkung: Schwellenländer ohne China sind ein ungewichteter Durchschnitt der Quoten für Argentinien, Brasilien, Kolumbien</a:t>
+              <a:t>Anmerkung: Schwellenländer ohne China ist ein ungewichteter Durchschnitt der Quoten für Argentinien, Brasilien, Kolumbien, Indien, Indonesien, Mexiko, Russland, Malaysia, Südafrika und die Türkei.Quelle: BIZ; OECD Analytical House Price-Datenbank; und OECD-Berechnungen.</a:t>
             </a:r>
-            <a:r>
-              <a:rPr lang="en-US" sz="1200" dirty="0">
-                <a:solidFill>
-                  <a:schemeClr val="bg2">
-                    <a:lumMod val="10000"/>
-                  </a:schemeClr>
-                </a:solidFill>
-                <a:latin typeface="Calibri" panose="020F0502020204030204" pitchFamily="34" charset="0"/>
-              </a:rPr>
-              <a:t>, Indien, Indonesien, Mexiko, Russland, Malaysia, </a:t>
-            </a:r>
-            <a:r>
-              <a:rPr lang="en-US" sz="1200" dirty="0" smtClean="0">
-                <a:solidFill>
-                  <a:schemeClr val="bg2">
-                    <a:lumMod val="10000"/>
-                  </a:schemeClr>
-                </a:solidFill>
-                <a:latin typeface="Calibri" panose="020F0502020204030204" pitchFamily="34" charset="0"/>
-              </a:rPr>
-              <a:t>Süd</a:t>
-            </a:r>
-            <a:r>
-              <a:rPr lang="en-US" sz="1200" dirty="0">
-                <a:solidFill>
-                  <a:schemeClr val="bg2">
-                    <a:lumMod val="10000"/>
-                  </a:schemeClr>
-                </a:solidFill>
-                <a:latin typeface="Calibri" panose="020F0502020204030204" pitchFamily="34" charset="0"/>
-              </a:rPr>
-              <a:t>afrika und die Türkei.</a:t>
-            </a:r>
-            <a:br>
-              <a:rPr lang="en-US" sz="1200" dirty="0">
-                <a:solidFill>
-                  <a:schemeClr val="bg2">
-                    <a:lumMod val="10000"/>
-                  </a:schemeClr>
-                </a:solidFill>
-                <a:latin typeface="Calibri" panose="020F0502020204030204" pitchFamily="34" charset="0"/>
-              </a:rPr>
-            </a:br>
-            <a:r>
-              <a:rPr lang="en-US" sz="1200" dirty="0" smtClean="0">
-                <a:solidFill>
-                  <a:schemeClr val="bg2">
-                    <a:lumMod val="10000"/>
-                  </a:schemeClr>
-                </a:solidFill>
-                <a:latin typeface="Calibri" panose="020F0502020204030204" pitchFamily="34" charset="0"/>
-              </a:rPr>
-              <a:t>Quelle</a:t>
-            </a:r>
-            <a:r>
-              <a:rPr lang="en-US" sz="1200" dirty="0">
-                <a:solidFill>
-                  <a:schemeClr val="bg2">
-                    <a:lumMod val="10000"/>
-                  </a:schemeClr>
-                </a:solidFill>
-                <a:latin typeface="Calibri" panose="020F0502020204030204" pitchFamily="34" charset="0"/>
-              </a:rPr>
-              <a:t>: </a:t>
-            </a:r>
-            <a:r>
-              <a:rPr lang="en-US" sz="1200" dirty="0" smtClean="0">
-                <a:solidFill>
-                  <a:schemeClr val="bg2">
-                    <a:lumMod val="10000"/>
-                  </a:schemeClr>
-                </a:solidFill>
-                <a:latin typeface="Calibri" panose="020F0502020204030204" pitchFamily="34" charset="0"/>
-              </a:rPr>
-              <a:t>BIS; </a:t>
-            </a:r>
-            <a:r>
-              <a:rPr lang="en-US" sz="1200" dirty="0">
-                <a:solidFill>
-                  <a:schemeClr val="bg2">
-                    <a:lumMod val="10000"/>
-                  </a:schemeClr>
-                </a:solidFill>
-                <a:latin typeface="Calibri" panose="020F0502020204030204" pitchFamily="34" charset="0"/>
-              </a:rPr>
-              <a:t>OECD Analytische Hauspreisdatenbank</a:t>
-            </a:r>
-            <a:r>
-              <a:rPr lang="en-US" sz="1200" dirty="0" smtClean="0">
-                <a:solidFill>
-                  <a:schemeClr val="bg2">
-                    <a:lumMod val="10000"/>
-                  </a:schemeClr>
-                </a:solidFill>
-                <a:latin typeface="Calibri" panose="020F0502020204030204" pitchFamily="34" charset="0"/>
-              </a:rPr>
-              <a:t>; und </a:t>
-            </a:r>
-            <a:r>
-              <a:rPr lang="en-US" sz="1200" dirty="0">
-                <a:solidFill>
-                  <a:schemeClr val="bg2">
-                    <a:lumMod val="10000"/>
-                  </a:schemeClr>
-                </a:solidFill>
-                <a:latin typeface="Calibri" panose="020F0502020204030204" pitchFamily="34" charset="0"/>
-              </a:rPr>
-              <a:t>OECD-Berechnungen.</a:t>
-            </a:r>
-            <a:endParaRPr lang="en-US" sz="1200" dirty="0" smtClean="0">
-              <a:solidFill>
-                <a:schemeClr val="bg2">
-                  <a:lumMod val="10000"/>
-                </a:schemeClr>
-              </a:solidFill>
-              <a:latin typeface="Calibri" panose="020F0502020204030204" pitchFamily="34" charset="0"/>
-            </a:endParaRPr>
           </a:p>
         </p:txBody>
       </p:sp>
@@ -15085,7 +14726,6 @@
           </a:bodyPr>
           <a:lstStyle/>
           <a:p>
-            <a:pPr algn="ctr"/>
             <a:r>
               <a:rPr lang="en-GB" sz="2000" b="1" dirty="0" smtClean="0">
                 <a:solidFill>
@@ -15095,19 +14735,21 @@
                 </a:solidFill>
                 <a:latin typeface="Calibri" pitchFamily="34" charset="0"/>
               </a:rPr>
-              <a:t>Kredit an den privaten Nichtfinanzsektor</a:t>
+              <a:t>Kredite an den privaten nichtfinanziellen Sektor</a:t>
             </a:r>
           </a:p>
           <a:p>
-            <a:pPr algn="ctr"/>
-            <a:endParaRPr lang="en-GB" sz="1400" i="1" dirty="0" smtClean="0">
-              <a:solidFill>
-                <a:schemeClr val="bg2">
-                  <a:lumMod val="10000"/>
-                </a:schemeClr>
-              </a:solidFill>
-              <a:latin typeface="Calibri" pitchFamily="34" charset="0"/>
-            </a:endParaRPr>
+            <a:r>
+              <a:rPr lang="en-GB" sz="2000" b="1" dirty="0" smtClean="0">
+                <a:solidFill>
+                  <a:schemeClr val="bg2">
+                    <a:lumMod val="10000"/>
+                  </a:schemeClr>
+                </a:solidFill>
+                <a:latin typeface="Calibri" pitchFamily="34" charset="0"/>
+              </a:rPr>
+              <a:t/>
+            </a:r>
           </a:p>
         </p:txBody>
       </p:sp>
@@ -15132,7 +14774,6 @@
           </a:bodyPr>
           <a:lstStyle/>
           <a:p>
-            <a:pPr algn="ctr"/>
             <a:r>
               <a:rPr lang="en-GB" sz="2000" b="1" dirty="0" smtClean="0">
                 <a:solidFill>
@@ -15142,30 +14783,21 @@
                 </a:solidFill>
                 <a:latin typeface="Calibri" pitchFamily="34" charset="0"/>
               </a:rPr>
-              <a:t>Verhältnis von Hauspreisen zu Mieten</a:t>
+              <a:t>Verhältnis von Immobilienpreis zu Miete</a:t>
             </a:r>
           </a:p>
           <a:p>
-            <a:pPr lvl="0" algn="ctr"/>
             <a:r>
-              <a:rPr lang="en-US" sz="1200" i="1" dirty="0" smtClean="0">
+              <a:rPr lang="en-GB" sz="2000" b="1" dirty="0" smtClean="0">
                 <a:solidFill>
-                  <a:srgbClr val="E6E6E6">
+                  <a:schemeClr val="bg2">
                     <a:lumMod val="10000"/>
-                  </a:srgbClr>
+                  </a:schemeClr>
                 </a:solidFill>
                 <a:latin typeface="Calibri" pitchFamily="34" charset="0"/>
               </a:rPr>
               <a:t>Durchschnitt seit 1980 = 100</a:t>
             </a:r>
-            <a:endParaRPr lang="en-US" sz="1200" i="1" dirty="0">
-              <a:solidFill>
-                <a:srgbClr val="E6E6E6">
-                  <a:lumMod val="10000"/>
-                </a:srgbClr>
-              </a:solidFill>
-              <a:latin typeface="Calibri" pitchFamily="34" charset="0"/>
-            </a:endParaRPr>
           </a:p>
         </p:txBody>
       </p:sp>
@@ -15291,9 +14923,6 @@
           </a:bodyPr>
           <a:lstStyle/>
           <a:p>
-            <a:pPr algn="ctr">
-              <a:defRPr/>
-            </a:pPr>
             <a:r>
               <a:rPr lang="en-US" sz="2800" b="1" dirty="0" smtClean="0">
                 <a:solidFill>
@@ -15301,32 +14930,8 @@
                 </a:solidFill>
                 <a:latin typeface="+mj-lt"/>
               </a:rPr>
-              <a:t>Inflation generell unter den Zielvorgaben; potenzielle Zinsdivergenz erzeugt </a:t>
+              <a:t>Die Inflation liegt im Allgemeinen unter den Zielwerten; eine mögliche Zinsdivergenz schafft finanzielle Risiken</a:t>
             </a:r>
-            <a:r>
-              <a:rPr lang="en-US" sz="2800" b="1" dirty="0">
-                <a:solidFill>
-                  <a:schemeClr val="tx2"/>
-                </a:solidFill>
-                <a:latin typeface="+mj-lt"/>
-              </a:rPr>
-              <a:t>finanzielle </a:t>
-            </a:r>
-            <a:r>
-              <a:rPr lang="en-US" sz="2800" b="1" dirty="0" smtClean="0">
-                <a:solidFill>
-                  <a:schemeClr val="tx2"/>
-                </a:solidFill>
-                <a:latin typeface="+mj-lt"/>
-              </a:rPr>
-              <a:t>Risiken</a:t>
-            </a:r>
-            <a:endParaRPr lang="en-GB" sz="2800" b="1" dirty="0">
-              <a:solidFill>
-                <a:schemeClr val="tx2"/>
-              </a:solidFill>
-              <a:latin typeface="+mj-lt"/>
-            </a:endParaRPr>
           </a:p>
         </p:txBody>
       </p:sp>
@@ -15352,7 +14957,6 @@
           </a:bodyPr>
           <a:lstStyle/>
           <a:p>
-            <a:pPr algn="ctr"/>
             <a:r>
               <a:rPr lang="en-US" sz="2000" b="1" dirty="0" smtClean="0">
                 <a:solidFill>
@@ -15364,24 +14968,6 @@
               </a:rPr>
               <a:t>Kerninflation</a:t>
             </a:r>
-            <a:br>
-              <a:rPr lang="en-US" sz="2000" b="1" dirty="0" smtClean="0">
-                <a:solidFill>
-                  <a:schemeClr val="bg2">
-                    <a:lumMod val="10000"/>
-                  </a:schemeClr>
-                </a:solidFill>
-                <a:latin typeface="Calibri" pitchFamily="34" charset="0"/>
-              </a:rPr>
-            </a:br>
-            <a:endParaRPr lang="en-GB" sz="1200" i="1" baseline="30000" dirty="0">
-              <a:solidFill>
-                <a:schemeClr val="bg2">
-                  <a:lumMod val="10000"/>
-                </a:schemeClr>
-              </a:solidFill>
-              <a:latin typeface="Calibri" pitchFamily="34" charset="0"/>
-            </a:endParaRPr>
           </a:p>
         </p:txBody>
       </p:sp>
@@ -15416,90 +15002,8 @@
                 </a:solidFill>
                 <a:latin typeface="Calibri" panose="020F0502020204030204" pitchFamily="34" charset="0"/>
               </a:rPr>
-              <a:t/>
+              <a:t>Anmerkung: Die Kerninflation für Japan ist um die Auswirkungen der Erhöhungen der Verbrauchsteuer bereinigt.Quelle: OECD Economic Outlook-Datenbank, Juni 2017; Bloomberg; und OECD-Berechnungen.</a:t>
             </a:r>
-            <a:br>
-              <a:rPr lang="en-GB" sz="1200" dirty="0" smtClean="0">
-                <a:solidFill>
-                  <a:schemeClr val="bg2">
-                    <a:lumMod val="10000"/>
-                  </a:schemeClr>
-                </a:solidFill>
-                <a:latin typeface="Calibri" panose="020F0502020204030204" pitchFamily="34" charset="0"/>
-              </a:rPr>
-            </a:br>
-            <a:r>
-              <a:rPr lang="en-GB" sz="1200" dirty="0" smtClean="0">
-                <a:solidFill>
-                  <a:schemeClr val="bg2">
-                    <a:lumMod val="10000"/>
-                  </a:schemeClr>
-                </a:solidFill>
-                <a:latin typeface="Calibri" panose="020F0502020204030204" pitchFamily="34" charset="0"/>
-              </a:rPr>
-              <a:t/>
-            </a:r>
-            <a:br>
-              <a:rPr lang="en-GB" sz="1200" dirty="0" smtClean="0">
-                <a:solidFill>
-                  <a:schemeClr val="bg2">
-                    <a:lumMod val="10000"/>
-                  </a:schemeClr>
-                </a:solidFill>
-                <a:latin typeface="Calibri" panose="020F0502020204030204" pitchFamily="34" charset="0"/>
-              </a:rPr>
-            </a:br>
-            <a:r>
-              <a:rPr lang="en-GB" sz="1200" dirty="0" smtClean="0">
-                <a:solidFill>
-                  <a:schemeClr val="bg2">
-                    <a:lumMod val="10000"/>
-                  </a:schemeClr>
-                </a:solidFill>
-                <a:latin typeface="Calibri" panose="020F0502020204030204" pitchFamily="34" charset="0"/>
-              </a:rPr>
-              <a:t>Anmerkung: Kerninflation für Japan bereinigt um die Auswirkungen der Erhöhungen der Verbrauchsteuer.</a:t>
-            </a:r>
-            <a:br>
-              <a:rPr lang="en-GB" sz="1200" dirty="0" smtClean="0">
-                <a:solidFill>
-                  <a:schemeClr val="bg2">
-                    <a:lumMod val="10000"/>
-                  </a:schemeClr>
-                </a:solidFill>
-                <a:latin typeface="Calibri" panose="020F0502020204030204" pitchFamily="34" charset="0"/>
-              </a:rPr>
-            </a:br>
-            <a:r>
-              <a:rPr lang="en-GB" sz="1200" dirty="0" smtClean="0">
-                <a:solidFill>
-                  <a:schemeClr val="bg2">
-                    <a:lumMod val="10000"/>
-                  </a:schemeClr>
-                </a:solidFill>
-                <a:latin typeface="Calibri" panose="020F0502020204030204" pitchFamily="34" charset="0"/>
-              </a:rPr>
-              <a:t>Quelle: </a:t>
-            </a:r>
-            <a:r>
-              <a:rPr lang="en-US" sz="1200" dirty="0" smtClean="0">
-                <a:solidFill>
-                  <a:schemeClr val="bg2">
-                    <a:lumMod val="10000"/>
-                  </a:schemeClr>
-                </a:solidFill>
-                <a:latin typeface="Calibri" panose="020F0502020204030204" pitchFamily="34" charset="0"/>
-              </a:rPr>
-              <a:t>OECD Wirtschaftsausblick Juni 2017 Datenbank; Bloomberg; und OECD-Berechnungen.</a:t>
-            </a:r>
-            <a:endParaRPr lang="en-GB" sz="1200" dirty="0">
-              <a:solidFill>
-                <a:schemeClr val="bg2">
-                  <a:lumMod val="10000"/>
-                </a:schemeClr>
-              </a:solidFill>
-              <a:latin typeface="Calibri" panose="020F0502020204030204" pitchFamily="34" charset="0"/>
-            </a:endParaRPr>
           </a:p>
         </p:txBody>
       </p:sp>
@@ -15566,7 +15070,6 @@
           </a:bodyPr>
           <a:lstStyle/>
           <a:p>
-            <a:pPr algn="ctr"/>
             <a:r>
               <a:rPr lang="en-US" sz="2000" b="1" dirty="0" smtClean="0">
                 <a:solidFill>
@@ -15576,18 +15079,10 @@
                 </a:solidFill>
                 <a:latin typeface="Calibri" pitchFamily="34" charset="0"/>
               </a:rPr>
-              <a:t>Marktbasierte Erwartungen für</a:t>
+              <a:t>Marktbasierte Erwartungen für die Tagesgeldzinsen</a:t>
             </a:r>
-            <a:br>
-              <a:rPr lang="en-US" sz="2000" b="1" dirty="0" smtClean="0">
-                <a:solidFill>
-                  <a:schemeClr val="bg2">
-                    <a:lumMod val="10000"/>
-                  </a:schemeClr>
-                </a:solidFill>
-                <a:latin typeface="Calibri" pitchFamily="34" charset="0"/>
-              </a:rPr>
-            </a:br>
+          </a:p>
+          <a:p>
             <a:r>
               <a:rPr lang="en-US" sz="2000" b="1" dirty="0" smtClean="0">
                 <a:solidFill>
@@ -15597,51 +15092,8 @@
                 </a:solidFill>
                 <a:latin typeface="Calibri" pitchFamily="34" charset="0"/>
               </a:rPr>
-              <a:t>Tagesgeldzinssätze</a:t>
+              <a:t>15-Tage-Durchschnitt</a:t>
             </a:r>
-          </a:p>
-          <a:p>
-            <a:pPr algn="ctr"/>
-            <a:r>
-              <a:rPr lang="en-US" sz="1200" i="1" dirty="0" smtClean="0">
-                <a:solidFill>
-                  <a:schemeClr val="bg2">
-                    <a:lumMod val="10000"/>
-                  </a:schemeClr>
-                </a:solidFill>
-                <a:latin typeface="Calibri" pitchFamily="34" charset="0"/>
-              </a:rPr>
-              <a:t>15-Tage gleitender Durchschnitt</a:t>
-            </a:r>
-            <a:r>
-              <a:rPr lang="en-US" sz="1200" i="1" dirty="0">
-                <a:solidFill>
-                  <a:schemeClr val="bg2">
-                    <a:lumMod val="10000"/>
-                  </a:schemeClr>
-                </a:solidFill>
-                <a:latin typeface="Calibri" pitchFamily="34" charset="0"/>
-              </a:rPr>
-              <a:t/>
-            </a:r>
-            <a:br>
-              <a:rPr lang="en-US" sz="1200" i="1" dirty="0">
-                <a:solidFill>
-                  <a:schemeClr val="bg2">
-                    <a:lumMod val="10000"/>
-                  </a:schemeClr>
-                </a:solidFill>
-                <a:latin typeface="Calibri" pitchFamily="34" charset="0"/>
-              </a:rPr>
-            </a:br>
-            <a:endParaRPr lang="en-GB" sz="1200" i="1" baseline="30000" dirty="0">
-              <a:solidFill>
-                <a:schemeClr val="bg2">
-                  <a:lumMod val="10000"/>
-                </a:schemeClr>
-              </a:solidFill>
-              <a:latin typeface="Calibri" pitchFamily="34" charset="0"/>
-            </a:endParaRPr>
           </a:p>
         </p:txBody>
       </p:sp>
@@ -15765,9 +15217,6 @@
           </a:bodyPr>
           <a:lstStyle/>
           <a:p>
-            <a:pPr algn="ctr">
-              <a:defRPr/>
-            </a:pPr>
             <a:r>
               <a:rPr lang="en-US" sz="4000" b="1" dirty="0" smtClean="0">
                 <a:solidFill>
@@ -15779,9 +15228,6 @@
             </a:r>
           </a:p>
           <a:p>
-            <a:pPr algn="ctr">
-              <a:defRPr/>
-            </a:pPr>
             <a:r>
               <a:rPr lang="en-US" sz="4000" b="1" dirty="0" smtClean="0">
                 <a:solidFill>
@@ -15916,9 +15362,6 @@
           </a:bodyPr>
           <a:lstStyle/>
           <a:p>
-            <a:pPr algn="ctr">
-              <a:defRPr/>
-            </a:pPr>
             <a:r>
               <a:rPr lang="en-US" sz="2800" b="1" dirty="0" smtClean="0">
                 <a:solidFill>
@@ -15953,7 +15396,6 @@
           </a:bodyPr>
           <a:lstStyle/>
           <a:p>
-            <a:pPr lvl="0" algn="ctr"/>
             <a:r>
               <a:rPr lang="en-US" sz="2000" b="1" dirty="0">
                 <a:solidFill>
@@ -15963,10 +15405,12 @@
                 </a:solidFill>
                 <a:latin typeface="Calibri" pitchFamily="34" charset="0"/>
               </a:rPr>
-              <a:t>W</a:t>
+              <a:t>Welthandel mit Gütern</a:t>
             </a:r>
+          </a:p>
+          <a:p>
             <a:r>
-              <a:rPr lang="en-US" sz="2000" b="1" dirty="0" smtClean="0">
+              <a:rPr lang="en-US" sz="2000" b="1" dirty="0">
                 <a:solidFill>
                   <a:schemeClr val="bg2">
                     <a:lumMod val="10000"/>
@@ -15974,71 +15418,8 @@
                 </a:solidFill>
                 <a:latin typeface="Calibri" pitchFamily="34" charset="0"/>
               </a:rPr>
-              <a:t>eltgüterhandel</a:t>
+              <a:t>Anteil an den weltweiten Güterexporten, Mengen</a:t>
             </a:r>
-            <a:endParaRPr lang="en-US" sz="2000" b="1" dirty="0">
-              <a:solidFill>
-                <a:schemeClr val="bg2">
-                  <a:lumMod val="10000"/>
-                </a:schemeClr>
-              </a:solidFill>
-              <a:latin typeface="Calibri" pitchFamily="34" charset="0"/>
-            </a:endParaRPr>
-          </a:p>
-          <a:p>
-            <a:pPr lvl="0" algn="ctr"/>
-            <a:r>
-              <a:rPr lang="en-US" sz="1200" i="1" dirty="0">
-                <a:solidFill>
-                  <a:schemeClr val="bg2">
-                    <a:lumMod val="10000"/>
-                  </a:schemeClr>
-                </a:solidFill>
-                <a:latin typeface="Calibri" pitchFamily="34" charset="0"/>
-              </a:rPr>
-              <a:t>Anteil am </a:t>
-            </a:r>
-            <a:r>
-              <a:rPr lang="en-US" sz="1200" i="1">
-                <a:solidFill>
-                  <a:schemeClr val="bg2">
-                    <a:lumMod val="10000"/>
-                  </a:schemeClr>
-                </a:solidFill>
-                <a:latin typeface="Calibri" pitchFamily="34" charset="0"/>
-              </a:rPr>
-              <a:t>Welt</a:t>
-            </a:r>
-            <a:r>
-              <a:rPr lang="en-US" sz="1200" i="1" smtClean="0">
-                <a:solidFill>
-                  <a:schemeClr val="bg2">
-                    <a:lumMod val="10000"/>
-                  </a:schemeClr>
-                </a:solidFill>
-                <a:latin typeface="Calibri" pitchFamily="34" charset="0"/>
-              </a:rPr>
-              <a:t>güterexport, </a:t>
-            </a:r>
-            <a:r>
-              <a:rPr lang="en-US" sz="1200" i="1" dirty="0" smtClean="0">
-                <a:solidFill>
-                  <a:schemeClr val="bg2">
-                    <a:lumMod val="10000"/>
-                  </a:schemeClr>
-                </a:solidFill>
-                <a:latin typeface="Calibri" pitchFamily="34" charset="0"/>
-              </a:rPr>
-              <a:t>Volumina</a:t>
-            </a:r>
-            <a:endParaRPr lang="en-US" sz="1200" i="1" dirty="0">
-              <a:solidFill>
-                <a:schemeClr val="bg2">
-                  <a:lumMod val="10000"/>
-                </a:schemeClr>
-              </a:solidFill>
-              <a:latin typeface="Calibri" pitchFamily="34" charset="0"/>
-            </a:endParaRPr>
           </a:p>
         </p:txBody>
       </p:sp>
@@ -16064,7 +15445,6 @@
           </a:bodyPr>
           <a:lstStyle/>
           <a:p>
-            <a:pPr lvl="0" algn="ctr"/>
             <a:r>
               <a:rPr lang="en-US" sz="2000" b="1" dirty="0" smtClean="0">
                 <a:solidFill>
@@ -16078,37 +15458,30 @@
             </a:r>
           </a:p>
           <a:p>
-            <a:pPr lvl="0" algn="ctr"/>
             <a:r>
-              <a:rPr lang="en-US" sz="1200" i="1" dirty="0" smtClean="0">
+              <a:rPr lang="en-US" sz="2000" b="1" dirty="0" smtClean="0">
                 <a:solidFill>
-                  <a:srgbClr val="E6E6E6">
+                  <a:schemeClr val="bg2">
                     <a:lumMod val="10000"/>
-                  </a:srgbClr>
+                  </a:schemeClr>
                 </a:solidFill>
                 <a:latin typeface="Calibri" pitchFamily="34" charset="0"/>
               </a:rPr>
               <a:t>Exporte, Werte</a:t>
             </a:r>
-            <a:endParaRPr lang="en-US" sz="1200" i="1" dirty="0">
-              <a:solidFill>
-                <a:srgbClr val="E6E6E6">
-                  <a:lumMod val="10000"/>
-                </a:srgbClr>
-              </a:solidFill>
-              <a:latin typeface="Calibri" pitchFamily="34" charset="0"/>
-            </a:endParaRPr>
           </a:p>
           <a:p>
-            <a:pPr lvl="0" algn="ctr"/>
-            <a:endParaRPr lang="en-US" sz="2000" b="1" dirty="0" smtClean="0">
-              <a:solidFill>
-                <a:schemeClr val="bg2">
-                  <a:lumMod val="10000"/>
-                </a:schemeClr>
-              </a:solidFill>
-              <a:latin typeface="Calibri" pitchFamily="34" charset="0"/>
-            </a:endParaRPr>
+            <a:r>
+              <a:rPr lang="en-US" sz="2000" b="1" dirty="0" smtClean="0">
+                <a:solidFill>
+                  <a:schemeClr val="bg2">
+                    <a:lumMod val="10000"/>
+                  </a:schemeClr>
+                </a:solidFill>
+                <a:latin typeface="Calibri" pitchFamily="34" charset="0"/>
+              </a:rPr>
+              <a:t/>
+            </a:r>
           </a:p>
         </p:txBody>
       </p:sp>
@@ -16165,94 +15538,8 @@
                 </a:solidFill>
                 <a:latin typeface="Calibri" panose="020F0502020204030204" pitchFamily="34" charset="0"/>
               </a:rPr>
-              <a:t>Anmerkung:</a:t>
+              <a:t>Anmerkung: Linke Achse – Zu den dynamischen asiatischen Volkswirtschaften zählen Malaysia, die Philippinen, Singapur, Thailand, Vietnam, Chinesisch-Taipeh und Hongkong.Rechte Achse – Unternehmensdienstleistungen umfassen FuE, IKT, Immobilien und sonstige unternehmensbezogene Tätigkeiten. Finanzdienstleistungen umfassen Finanzintermediation, Versicherungen, Altersvorsorge und sonstige Finanztätigkeiten. </a:t>
             </a:r>
-            <a:r>
-              <a:rPr lang="en-GB" sz="1100" i="1" dirty="0" smtClean="0">
-                <a:solidFill>
-                  <a:srgbClr val="171717"/>
-                </a:solidFill>
-                <a:latin typeface="Calibri" panose="020F0502020204030204" pitchFamily="34" charset="0"/>
-              </a:rPr>
-              <a:t> </a:t>
-            </a:r>
-            <a:r>
-              <a:rPr lang="en-GB" sz="1100" dirty="0" smtClean="0">
-                <a:solidFill>
-                  <a:srgbClr val="171717"/>
-                </a:solidFill>
-                <a:latin typeface="Calibri" panose="020F0502020204030204" pitchFamily="34" charset="0"/>
-              </a:rPr>
-              <a:t>Linke Achse – </a:t>
-            </a:r>
-            <a:r>
-              <a:rPr lang="en-GB" sz="1100" dirty="0">
-                <a:solidFill>
-                  <a:srgbClr val="171717"/>
-                </a:solidFill>
-                <a:latin typeface="Calibri" panose="020F0502020204030204" pitchFamily="34" charset="0"/>
-              </a:rPr>
-              <a:t>Dynamische asiatische Volkswirtschaften umfasst Malaysia, die Philippinen, Singapur, Thailand, Vietnam, Chinesisch Taipeh und Hongkong</a:t>
-            </a:r>
-            <a:r>
-              <a:rPr lang="en-GB" sz="1100" dirty="0" smtClean="0">
-                <a:solidFill>
-                  <a:srgbClr val="171717"/>
-                </a:solidFill>
-                <a:latin typeface="Calibri" panose="020F0502020204030204" pitchFamily="34" charset="0"/>
-              </a:rPr>
-              <a:t>.</a:t>
-            </a:r>
-            <a:r>
-              <a:rPr lang="en-US" sz="1100" dirty="0" smtClean="0">
-                <a:solidFill>
-                  <a:srgbClr val="171717"/>
-                </a:solidFill>
-                <a:latin typeface="Calibri" panose="020F0502020204030204" pitchFamily="34" charset="0"/>
-              </a:rPr>
-              <a:t/>
-            </a:r>
-            <a:br>
-              <a:rPr lang="en-US" sz="1100" dirty="0" smtClean="0">
-                <a:solidFill>
-                  <a:srgbClr val="171717"/>
-                </a:solidFill>
-                <a:latin typeface="Calibri" panose="020F0502020204030204" pitchFamily="34" charset="0"/>
-              </a:rPr>
-            </a:br>
-            <a:r>
-              <a:rPr lang="en-US" sz="1100" dirty="0" smtClean="0">
-                <a:solidFill>
-                  <a:srgbClr val="171717"/>
-                </a:solidFill>
-                <a:latin typeface="Calibri" panose="020F0502020204030204" pitchFamily="34" charset="0"/>
-              </a:rPr>
-              <a:t>Rechte Achse – Unternehmens</a:t>
-            </a:r>
-            <a:r>
-              <a:rPr lang="en-US" sz="1100" dirty="0">
-                <a:solidFill>
-                  <a:srgbClr val="171717"/>
-                </a:solidFill>
-                <a:latin typeface="Calibri" panose="020F0502020204030204" pitchFamily="34" charset="0"/>
-              </a:rPr>
-              <a:t>dienstleistungen </a:t>
-            </a:r>
-            <a:r>
-              <a:rPr lang="en-US" sz="1100" dirty="0" smtClean="0">
-                <a:solidFill>
-                  <a:srgbClr val="171717"/>
-                </a:solidFill>
-                <a:latin typeface="Calibri" panose="020F0502020204030204" pitchFamily="34" charset="0"/>
-              </a:rPr>
-              <a:t>umfasst F&amp;E, IKT, Immobilien und sonstige Geschäftsaktivitäten. Finanzdienstleistungen umfassen Finanzintermediation, Versicherungen, Pensionsfinanzierung und sonstige Finanzaktivitäten. </a:t>
-            </a:r>
-            <a:endParaRPr lang="en-GB" sz="1100" dirty="0" smtClean="0">
-              <a:solidFill>
-                <a:srgbClr val="171717"/>
-              </a:solidFill>
-              <a:latin typeface="Calibri" panose="020F0502020204030204" pitchFamily="34" charset="0"/>
-            </a:endParaRPr>
           </a:p>
           <a:p>
             <a:r>
@@ -16262,68 +15549,8 @@
                 </a:solidFill>
                 <a:latin typeface="Calibri" panose="020F0502020204030204" pitchFamily="34" charset="0"/>
               </a:rPr>
-              <a:t>Quelle</a:t>
+              <a:t>Quelle: OECD-WTO Trade in Value Added (TiVA)-Datenbank; UN Comtrade-Datenbank; und OECD-Berechnungen.</a:t>
             </a:r>
-            <a:r>
-              <a:rPr lang="en-GB" sz="1100" dirty="0">
-                <a:solidFill>
-                  <a:srgbClr val="171717"/>
-                </a:solidFill>
-                <a:latin typeface="Calibri" panose="020F0502020204030204" pitchFamily="34" charset="0"/>
-              </a:rPr>
-              <a:t>:</a:t>
-            </a:r>
-            <a:r>
-              <a:rPr lang="en-US" sz="1100" i="1" dirty="0">
-                <a:solidFill>
-                  <a:srgbClr val="171717"/>
-                </a:solidFill>
-                <a:latin typeface="Calibri" panose="020F0502020204030204" pitchFamily="34" charset="0"/>
-              </a:rPr>
-              <a:t> </a:t>
-            </a:r>
-            <a:r>
-              <a:rPr lang="en-US" sz="1100" dirty="0" smtClean="0">
-                <a:solidFill>
-                  <a:srgbClr val="171717"/>
-                </a:solidFill>
-                <a:latin typeface="Calibri" panose="020F0502020204030204" pitchFamily="34" charset="0"/>
-              </a:rPr>
-              <a:t>OECD-WTO-Datenbank Handel nach Wertschöpfung (TiVA)</a:t>
-            </a:r>
-            <a:r>
-              <a:rPr lang="en-US" sz="1100" dirty="0">
-                <a:solidFill>
-                  <a:srgbClr val="171717"/>
-                </a:solidFill>
-                <a:latin typeface="Calibri" panose="020F0502020204030204" pitchFamily="34" charset="0"/>
-              </a:rPr>
-              <a:t>; UN </a:t>
-            </a:r>
-            <a:r>
-              <a:rPr lang="en-US" sz="1100" dirty="0" smtClean="0">
-                <a:solidFill>
-                  <a:srgbClr val="171717"/>
-                </a:solidFill>
-                <a:latin typeface="Calibri" panose="020F0502020204030204" pitchFamily="34" charset="0"/>
-              </a:rPr>
-              <a:t>Comtrade-Datenbank; und </a:t>
-            </a:r>
-            <a:r>
-              <a:rPr lang="en-US" sz="1100" dirty="0">
-                <a:solidFill>
-                  <a:srgbClr val="171717"/>
-                </a:solidFill>
-                <a:latin typeface="Calibri" panose="020F0502020204030204" pitchFamily="34" charset="0"/>
-              </a:rPr>
-              <a:t>OECD-Berechnungen.</a:t>
-            </a:r>
-            <a:endParaRPr lang="en-GB" sz="1100" dirty="0">
-              <a:solidFill>
-                <a:srgbClr val="171717"/>
-              </a:solidFill>
-              <a:latin typeface="Calibri" panose="020F0502020204030204" pitchFamily="34" charset="0"/>
-            </a:endParaRPr>
           </a:p>
         </p:txBody>
       </p:sp>
@@ -16448,37 +15675,14 @@
           <a:bodyPr/>
           <a:lstStyle/>
           <a:p>
-            <a:pPr algn="ctr">
-              <a:defRPr/>
-            </a:pPr>
             <a:r>
               <a:rPr lang="en-US" sz="2800" b="1" dirty="0" smtClean="0">
                 <a:solidFill>
                   <a:schemeClr val="tx2"/>
                 </a:solidFill>
               </a:rPr>
-              <a:t>Arbeitsplatzverluste konzentrierten sich auf </a:t>
+              <a:t>Arbeitsplatzverluste konzentrierten sich auf Menschen mit mittleren Qualifikationen</a:t>
             </a:r>
-            <a:br>
-              <a:rPr lang="en-US" sz="2800" b="1" dirty="0" smtClean="0">
-                <a:solidFill>
-                  <a:schemeClr val="tx2"/>
-                </a:solidFill>
-              </a:rPr>
-            </a:br>
-            <a:r>
-              <a:rPr lang="en-US" sz="2800" b="1" dirty="0" smtClean="0">
-                <a:solidFill>
-                  <a:schemeClr val="tx2"/>
-                </a:solidFill>
-              </a:rPr>
-              <a:t>Beschäftigte mit mittleren Qualifikationen</a:t>
-            </a:r>
-            <a:endParaRPr lang="en-GB" sz="2800" b="1" dirty="0">
-              <a:solidFill>
-                <a:schemeClr val="tx2"/>
-              </a:solidFill>
-            </a:endParaRPr>
           </a:p>
         </p:txBody>
       </p:sp>
@@ -16511,7 +15715,7 @@
                 </a:solidFill>
                 <a:latin typeface="Calibri" panose="020F0502020204030204" pitchFamily="34" charset="0"/>
               </a:rPr>
-              <a:t>Anmerkung: OECD ist der ungewichtete Durchschnitt von 24 Ländern. Für Japan 1995–2010.</a:t>
+              <a:t>Anmerkung: OECD ist der ungewichtete Durchschnitt von 24 Ländern. Für Japan 1995-2010.</a:t>
             </a:r>
           </a:p>
           <a:p>
@@ -16522,139 +15726,8 @@
                 </a:solidFill>
                 <a:latin typeface="Calibri" panose="020F0502020204030204" pitchFamily="34" charset="0"/>
               </a:rPr>
-              <a:t>Quelle</a:t>
+              <a:t>Quelle: OECD Employment Outlook 2017; Arbeitskräfteerhebung der Europäischen Union; Arbeitskräfteerhebungen für Kanada, Japan und die Vereinigten Staaten; und OECD-Berechnungen.</a:t>
             </a:r>
-            <a:r>
-              <a:rPr lang="en-GB" sz="1200" dirty="0">
-                <a:solidFill>
-                  <a:srgbClr val="171717"/>
-                </a:solidFill>
-                <a:latin typeface="Calibri" panose="020F0502020204030204" pitchFamily="34" charset="0"/>
-              </a:rPr>
-              <a:t>:</a:t>
-            </a:r>
-            <a:r>
-              <a:rPr lang="en-US" sz="1200" dirty="0">
-                <a:solidFill>
-                  <a:srgbClr val="171717"/>
-                </a:solidFill>
-                <a:latin typeface="Calibri" panose="020F0502020204030204" pitchFamily="34" charset="0"/>
-              </a:rPr>
-              <a:t> </a:t>
-            </a:r>
-            <a:r>
-              <a:rPr lang="en-US" sz="1200" dirty="0" smtClean="0">
-                <a:solidFill>
-                  <a:srgbClr val="171717"/>
-                </a:solidFill>
-                <a:latin typeface="Calibri" panose="020F0502020204030204" pitchFamily="34" charset="0"/>
-              </a:rPr>
-              <a:t>OECD Beschäftigungsausblick 2017; Arbeitskräfteerhebung der Europäischen Union; Arbeitskräfte</a:t>
-            </a:r>
-            <a:r>
-              <a:rPr lang="en-US" sz="1200" dirty="0">
-                <a:solidFill>
-                  <a:srgbClr val="171717"/>
-                </a:solidFill>
-                <a:latin typeface="Calibri" panose="020F0502020204030204" pitchFamily="34" charset="0"/>
-              </a:rPr>
-              <a:t>erhebung; </a:t>
-            </a:r>
-            <a:r>
-              <a:rPr lang="en-US" sz="1200" dirty="0" smtClean="0">
-                <a:solidFill>
-                  <a:srgbClr val="171717"/>
-                </a:solidFill>
-                <a:latin typeface="Calibri" panose="020F0502020204030204" pitchFamily="34" charset="0"/>
-              </a:rPr>
-              <a:t>Arbeitskräfteerhebungen; </a:t>
-            </a:r>
-            <a:r>
-              <a:rPr lang="en-US" sz="1200" dirty="0">
-                <a:solidFill>
-                  <a:srgbClr val="171717"/>
-                </a:solidFill>
-                <a:latin typeface="Calibri" panose="020F0502020204030204" pitchFamily="34" charset="0"/>
-              </a:rPr>
-              <a:t>Arbeitskräfteerhebungen für </a:t>
-            </a:r>
-            <a:r>
-              <a:rPr lang="en-US" sz="1200" dirty="0" smtClean="0">
-                <a:solidFill>
-                  <a:srgbClr val="171717"/>
-                </a:solidFill>
-                <a:latin typeface="Calibri" panose="020F0502020204030204" pitchFamily="34" charset="0"/>
-              </a:rPr>
-              <a:t>Kanada, </a:t>
-            </a:r>
-            <a:r>
-              <a:rPr lang="en-US" sz="1200" dirty="0">
-                <a:solidFill>
-                  <a:srgbClr val="171717"/>
-                </a:solidFill>
-                <a:latin typeface="Calibri" panose="020F0502020204030204" pitchFamily="34" charset="0"/>
-              </a:rPr>
-              <a:t>Japan </a:t>
-            </a:r>
-            <a:r>
-              <a:rPr lang="en-US" sz="1200" dirty="0" smtClean="0">
-                <a:solidFill>
-                  <a:srgbClr val="171717"/>
-                </a:solidFill>
-                <a:latin typeface="Calibri" panose="020F0502020204030204" pitchFamily="34" charset="0"/>
-              </a:rPr>
-              <a:t/>
-            </a:r>
-            <a:br>
-              <a:rPr lang="en-US" sz="1200" dirty="0" smtClean="0">
-                <a:solidFill>
-                  <a:srgbClr val="171717"/>
-                </a:solidFill>
-                <a:latin typeface="Calibri" panose="020F0502020204030204" pitchFamily="34" charset="0"/>
-              </a:rPr>
-            </a:br>
-            <a:r>
-              <a:rPr lang="en-US" sz="1200" dirty="0" smtClean="0">
-                <a:solidFill>
-                  <a:srgbClr val="171717"/>
-                </a:solidFill>
-                <a:latin typeface="Calibri" panose="020F0502020204030204" pitchFamily="34" charset="0"/>
-              </a:rPr>
-              <a:t>und </a:t>
-            </a:r>
-            <a:r>
-              <a:rPr lang="en-US" sz="1200" dirty="0">
-                <a:solidFill>
-                  <a:srgbClr val="171717"/>
-                </a:solidFill>
-                <a:latin typeface="Calibri" panose="020F0502020204030204" pitchFamily="34" charset="0"/>
-              </a:rPr>
-              <a:t>die Vereinigten </a:t>
-            </a:r>
-            <a:r>
-              <a:rPr lang="en-US" sz="1200" dirty="0" smtClean="0">
-                <a:solidFill>
-                  <a:srgbClr val="171717"/>
-                </a:solidFill>
-                <a:latin typeface="Calibri" panose="020F0502020204030204" pitchFamily="34" charset="0"/>
-              </a:rPr>
-              <a:t>Staaten</a:t>
-            </a:r>
-            <a:r>
-              <a:rPr lang="en-US" sz="1200" dirty="0">
-                <a:solidFill>
-                  <a:srgbClr val="171717"/>
-                </a:solidFill>
-                <a:latin typeface="Calibri" panose="020F0502020204030204" pitchFamily="34" charset="0"/>
-              </a:rPr>
-              <a:t>; und OECD-Berechnungen.</a:t>
-            </a:r>
-            <a:endParaRPr lang="en-GB" sz="1200" dirty="0">
-              <a:solidFill>
-                <a:srgbClr val="171717"/>
-              </a:solidFill>
-              <a:latin typeface="Calibri" panose="020F0502020204030204" pitchFamily="34" charset="0"/>
-            </a:endParaRPr>
           </a:p>
         </p:txBody>
       </p:sp>
@@ -16680,7 +15753,6 @@
           </a:bodyPr>
           <a:lstStyle/>
           <a:p>
-            <a:pPr lvl="0" algn="ctr"/>
             <a:r>
               <a:rPr lang="en-US" sz="2000" b="1" dirty="0" smtClean="0">
                 <a:solidFill>
@@ -16690,73 +15762,21 @@
                 </a:solidFill>
                 <a:latin typeface="Calibri" pitchFamily="34" charset="0"/>
               </a:rPr>
-              <a:t>Jobpolarisierung nach Land</a:t>
+              <a:t>Beschäftigungspolarisierung nach Ländern</a:t>
             </a:r>
           </a:p>
           <a:p>
-            <a:pPr algn="ctr"/>
             <a:r>
-              <a:rPr lang="en-US" sz="1200" i="1" dirty="0">
+              <a:rPr lang="en-US" sz="2000" b="1" dirty="0" smtClean="0">
                 <a:solidFill>
-                  <a:srgbClr val="000000"/>
+                  <a:schemeClr val="bg2">
+                    <a:lumMod val="10000"/>
+                  </a:schemeClr>
                 </a:solidFill>
-                <a:latin typeface="Calibri" panose="020F0502020204030204" pitchFamily="34" charset="0"/>
+                <a:latin typeface="Calibri" pitchFamily="34" charset="0"/>
               </a:rPr>
-              <a:t>Veränderung </a:t>
+              <a:t>Veränderung des Anteils an der Gesamtbeschäftigung nach Qualifikationsniveau, 1995-2015</a:t>
             </a:r>
-            <a:r>
-              <a:rPr lang="en-US" sz="1200" i="1" dirty="0" smtClean="0">
-                <a:solidFill>
-                  <a:srgbClr val="000000"/>
-                </a:solidFill>
-                <a:latin typeface="Calibri" panose="020F0502020204030204" pitchFamily="34" charset="0"/>
-              </a:rPr>
-              <a:t>des Anteils an der </a:t>
-            </a:r>
-            <a:r>
-              <a:rPr lang="en-US" sz="1200" i="1" dirty="0">
-                <a:solidFill>
-                  <a:srgbClr val="000000"/>
-                </a:solidFill>
-                <a:latin typeface="Calibri" panose="020F0502020204030204" pitchFamily="34" charset="0"/>
-              </a:rPr>
-              <a:t>Gesamtbeschäftigung nach </a:t>
-            </a:r>
-            <a:r>
-              <a:rPr lang="en-US" sz="1200" i="1" dirty="0" smtClean="0">
-                <a:solidFill>
-                  <a:srgbClr val="000000"/>
-                </a:solidFill>
-                <a:latin typeface="Calibri" panose="020F0502020204030204" pitchFamily="34" charset="0"/>
-              </a:rPr>
-              <a:t>Qualifikations</a:t>
-            </a:r>
-            <a:r>
-              <a:rPr lang="en-US" sz="1200" i="1" dirty="0">
-                <a:solidFill>
-                  <a:srgbClr val="000000"/>
-                </a:solidFill>
-                <a:latin typeface="Calibri" panose="020F0502020204030204" pitchFamily="34" charset="0"/>
-              </a:rPr>
-              <a:t>niveau, </a:t>
-            </a:r>
-            <a:r>
-              <a:rPr lang="en-US" sz="1200" i="1" dirty="0" smtClean="0">
-                <a:solidFill>
-                  <a:srgbClr val="000000"/>
-                </a:solidFill>
-                <a:latin typeface="Calibri" panose="020F0502020204030204" pitchFamily="34" charset="0"/>
-              </a:rPr>
-              <a:t>1995-2015</a:t>
-            </a:r>
-            <a:endParaRPr lang="en-US" sz="1200" i="1" dirty="0">
-              <a:solidFill>
-                <a:schemeClr val="bg2">
-                  <a:lumMod val="10000"/>
-                </a:schemeClr>
-              </a:solidFill>
-              <a:latin typeface="Calibri" pitchFamily="34" charset="0"/>
-            </a:endParaRPr>
           </a:p>
         </p:txBody>
       </p:sp>
@@ -16930,9 +15950,6 @@
           </a:bodyPr>
           <a:lstStyle/>
           <a:p>
-            <a:pPr algn="ctr">
-              <a:defRPr/>
-            </a:pPr>
             <a:r>
               <a:rPr lang="en-US" sz="2800" b="1" dirty="0">
                 <a:solidFill>
@@ -16940,49 +15957,8 @@
                 </a:solidFill>
                 <a:latin typeface="+mj-lt"/>
               </a:rPr>
-              <a:t>Fortgeschrittene Volkswirtschaften haben sich in der </a:t>
+              <a:t>Die fortgeschrittenen Volkswirtschaften sind in der Wertschöpfungskette aufgestiegen, doch auch die Schwellenländer holen auf</a:t>
             </a:r>
-            <a:r>
-              <a:rPr lang="en-US" sz="2800" b="1" dirty="0" smtClean="0">
-                <a:solidFill>
-                  <a:schemeClr val="tx2"/>
-                </a:solidFill>
-                <a:latin typeface="+mj-lt"/>
-              </a:rPr>
-              <a:t/>
-            </a:r>
-            <a:br>
-              <a:rPr lang="en-US" sz="2800" b="1" dirty="0" smtClean="0">
-                <a:solidFill>
-                  <a:schemeClr val="tx2"/>
-                </a:solidFill>
-                <a:latin typeface="+mj-lt"/>
-              </a:rPr>
-            </a:br>
-            <a:r>
-              <a:rPr lang="en-US" sz="2800" b="1" dirty="0" smtClean="0">
-                <a:solidFill>
-                  <a:schemeClr val="tx2"/>
-                </a:solidFill>
-                <a:latin typeface="+mj-lt"/>
-              </a:rPr>
-              <a:t>Wert</a:t>
-            </a:r>
-            <a:r>
-              <a:rPr lang="en-US" sz="2800" b="1" dirty="0">
-                <a:solidFill>
-                  <a:schemeClr val="tx2"/>
-                </a:solidFill>
-                <a:latin typeface="+mj-lt"/>
-              </a:rPr>
-              <a:t>schöpfungskette nach oben bewegt, aber auch die Schwellenländer holen auf</a:t>
-            </a:r>
-            <a:endParaRPr lang="en-GB" sz="2800" b="1" dirty="0">
-              <a:solidFill>
-                <a:schemeClr val="tx2"/>
-              </a:solidFill>
-              <a:latin typeface="+mj-lt"/>
-            </a:endParaRPr>
           </a:p>
         </p:txBody>
       </p:sp>
@@ -17015,149 +15991,8 @@
                 </a:solidFill>
                 <a:latin typeface="Calibri" panose="020F0502020204030204" pitchFamily="34" charset="0"/>
               </a:rPr>
-              <a:t>Anmerkung: In nominalen Begriffen. Am wenigsten komplex ist das 1.</a:t>
+              <a:t>Anmerkung: In nominalen Werten. Am wenigsten komplex ist das 1. Quartil der Produkte nach Komplexität (z. B. Buntstifte), am komplexesten das 4. Quartil (z. B. medizinische Geräte), ohne wichtige Rohstoffe. Zu den dynamischen asiatischen Volkswirtschaften zählen Malaysia, die Philippinen, Singapur, Thailand, Vietnam, Chinesisch-Taipeh und Hongkong. Europa ist der ungewichtete Durchschnitt von Tschechien, Frankreich, Deutschland, Irland, Italien, Polen, Portugal und dem Vereinigten Königreich.</a:t>
             </a:r>
-            <a:r>
-              <a:rPr lang="en-GB" sz="1100" baseline="30000" dirty="0" smtClean="0">
-                <a:solidFill>
-                  <a:srgbClr val="171717"/>
-                </a:solidFill>
-                <a:latin typeface="Calibri" panose="020F0502020204030204" pitchFamily="34" charset="0"/>
-              </a:rPr>
-              <a:t>st</a:t>
-            </a:r>
-            <a:r>
-              <a:rPr lang="en-GB" sz="1100" dirty="0" smtClean="0">
-                <a:solidFill>
-                  <a:srgbClr val="171717"/>
-                </a:solidFill>
-                <a:latin typeface="Calibri" panose="020F0502020204030204" pitchFamily="34" charset="0"/>
-              </a:rPr>
-              <a:t> </a:t>
-            </a:r>
-            <a:r>
-              <a:rPr lang="en-GB" sz="1100" dirty="0">
-                <a:solidFill>
-                  <a:srgbClr val="171717"/>
-                </a:solidFill>
-                <a:latin typeface="Calibri" panose="020F0502020204030204" pitchFamily="34" charset="0"/>
-              </a:rPr>
-              <a:t>Q</a:t>
-            </a:r>
-            <a:r>
-              <a:rPr lang="en-GB" sz="1100" dirty="0" smtClean="0">
-                <a:solidFill>
-                  <a:srgbClr val="171717"/>
-                </a:solidFill>
-                <a:latin typeface="Calibri" panose="020F0502020204030204" pitchFamily="34" charset="0"/>
-              </a:rPr>
-              <a:t>uartil der Produkte nach Komplexität (z. B. Wachsmalstifte), am komplexesten </a:t>
-            </a:r>
-            <a:r>
-              <a:rPr lang="en-GB" sz="1100" dirty="0">
-                <a:solidFill>
-                  <a:srgbClr val="171717"/>
-                </a:solidFill>
-                <a:latin typeface="Calibri" panose="020F0502020204030204" pitchFamily="34" charset="0"/>
-              </a:rPr>
-              <a:t>ist das 4.</a:t>
-            </a:r>
-            <a:r>
-              <a:rPr lang="en-GB" sz="1100" dirty="0" smtClean="0">
-                <a:solidFill>
-                  <a:srgbClr val="171717"/>
-                </a:solidFill>
-                <a:latin typeface="Calibri" panose="020F0502020204030204" pitchFamily="34" charset="0"/>
-              </a:rPr>
-              <a:t>th</a:t>
-            </a:r>
-            <a:r>
-              <a:rPr lang="en-GB" sz="1100" baseline="30000" dirty="0" smtClean="0">
-                <a:solidFill>
-                  <a:srgbClr val="171717"/>
-                </a:solidFill>
-                <a:latin typeface="Calibri" panose="020F0502020204030204" pitchFamily="34" charset="0"/>
-              </a:rPr>
-              <a:t> Quartil (z. B. medizinische Geräte), ohne wichtige Rohstoffe. Dynamische asiatische Volkswirtschaften umfasst </a:t>
-            </a:r>
-            <a:r>
-              <a:rPr lang="en-GB" sz="1100" dirty="0" smtClean="0">
-                <a:solidFill>
-                  <a:srgbClr val="171717"/>
-                </a:solidFill>
-                <a:latin typeface="Calibri" panose="020F0502020204030204" pitchFamily="34" charset="0"/>
-              </a:rPr>
-              <a:t>Malaysia</a:t>
-            </a:r>
-            <a:r>
-              <a:rPr lang="en-US" sz="1100" dirty="0" smtClean="0">
-                <a:solidFill>
-                  <a:srgbClr val="171717"/>
-                </a:solidFill>
-                <a:latin typeface="Calibri" panose="020F0502020204030204" pitchFamily="34" charset="0"/>
-              </a:rPr>
-              <a:t>, die Philippinen, Singapur, </a:t>
-            </a:r>
-            <a:r>
-              <a:rPr lang="en-US" sz="1100" dirty="0">
-                <a:solidFill>
-                  <a:srgbClr val="171717"/>
-                </a:solidFill>
-                <a:latin typeface="Calibri" panose="020F0502020204030204" pitchFamily="34" charset="0"/>
-              </a:rPr>
-              <a:t>Thailand, Vietnam</a:t>
-            </a:r>
-            <a:r>
-              <a:rPr lang="en-US" sz="1100" dirty="0" smtClean="0">
-                <a:solidFill>
-                  <a:srgbClr val="171717"/>
-                </a:solidFill>
-                <a:latin typeface="Calibri" panose="020F0502020204030204" pitchFamily="34" charset="0"/>
-              </a:rPr>
-              <a:t>, Chinesisch </a:t>
-            </a:r>
-            <a:r>
-              <a:rPr lang="en-US" sz="1100" dirty="0">
-                <a:solidFill>
-                  <a:srgbClr val="171717"/>
-                </a:solidFill>
-                <a:latin typeface="Calibri" panose="020F0502020204030204" pitchFamily="34" charset="0"/>
-              </a:rPr>
-              <a:t>Taipeh und </a:t>
-            </a:r>
-            <a:r>
-              <a:rPr lang="en-US" sz="1100" dirty="0" smtClean="0">
-                <a:solidFill>
-                  <a:srgbClr val="171717"/>
-                </a:solidFill>
-                <a:latin typeface="Calibri" panose="020F0502020204030204" pitchFamily="34" charset="0"/>
-              </a:rPr>
-              <a:t>Hong</a:t>
-            </a:r>
-            <a:r>
-              <a:rPr lang="en-US" sz="1100" dirty="0">
-                <a:solidFill>
-                  <a:srgbClr val="171717"/>
-                </a:solidFill>
-                <a:latin typeface="Calibri" panose="020F0502020204030204" pitchFamily="34" charset="0"/>
-              </a:rPr>
-              <a:t>kong. </a:t>
-            </a:r>
-            <a:r>
-              <a:rPr lang="en-US" sz="1100" dirty="0" smtClean="0">
-                <a:solidFill>
-                  <a:srgbClr val="171717"/>
-                </a:solidFill>
-                <a:latin typeface="Calibri" panose="020F0502020204030204" pitchFamily="34" charset="0"/>
-              </a:rPr>
-              <a:t>Europa ist der ungewichtete Durchschnitt der Tschechischen Republik, Frankreich, Deutschland, Irland, Italien, Polen, Portugal und des Vereinigten Königreichs.</a:t>
-            </a:r>
-            <a:endParaRPr lang="en-GB" sz="1100" dirty="0" smtClean="0">
-              <a:solidFill>
-                <a:srgbClr val="171717"/>
-              </a:solidFill>
-              <a:latin typeface="Calibri" panose="020F0502020204030204" pitchFamily="34" charset="0"/>
-            </a:endParaRPr>
           </a:p>
           <a:p>
             <a:r>
@@ -17167,41 +16002,8 @@
                 </a:solidFill>
                 <a:latin typeface="Calibri" panose="020F0502020204030204" pitchFamily="34" charset="0"/>
               </a:rPr>
-              <a:t>Quelle</a:t>
+              <a:t>Quelle: UN Comtrade-Datenbank; und OECD-Berechnungen.</a:t>
             </a:r>
-            <a:r>
-              <a:rPr lang="en-GB" sz="1100" dirty="0">
-                <a:solidFill>
-                  <a:srgbClr val="171717"/>
-                </a:solidFill>
-                <a:latin typeface="Calibri" panose="020F0502020204030204" pitchFamily="34" charset="0"/>
-              </a:rPr>
-              <a:t>:</a:t>
-            </a:r>
-            <a:r>
-              <a:rPr lang="en-US" sz="1100" i="1" dirty="0">
-                <a:solidFill>
-                  <a:srgbClr val="171717"/>
-                </a:solidFill>
-                <a:latin typeface="Calibri" panose="020F0502020204030204" pitchFamily="34" charset="0"/>
-              </a:rPr>
-              <a:t> </a:t>
-            </a:r>
-            <a:r>
-              <a:rPr lang="en-US" sz="1100" dirty="0" smtClean="0">
-                <a:solidFill>
-                  <a:srgbClr val="171717"/>
-                </a:solidFill>
-                <a:latin typeface="Calibri" panose="020F0502020204030204" pitchFamily="34" charset="0"/>
-              </a:rPr>
-              <a:t>UN Comtrade-Datenbank; und OECD-Berechnungen.</a:t>
-            </a:r>
-            <a:endParaRPr lang="en-GB" sz="1100" dirty="0">
-              <a:solidFill>
-                <a:srgbClr val="171717"/>
-              </a:solidFill>
-              <a:latin typeface="Calibri" panose="020F0502020204030204" pitchFamily="34" charset="0"/>
-            </a:endParaRPr>
           </a:p>
         </p:txBody>
       </p:sp>
@@ -17262,7 +16064,6 @@
           </a:bodyPr>
           <a:lstStyle/>
           <a:p>
-            <a:pPr lvl="0" algn="ctr"/>
             <a:r>
               <a:rPr lang="en-US" sz="2000" b="1" dirty="0" smtClean="0">
                 <a:solidFill>
@@ -17272,29 +16073,7 @@
                 </a:solidFill>
                 <a:latin typeface="Calibri" pitchFamily="34" charset="0"/>
               </a:rPr>
-              <a:t>Anteil der exportierten </a:t>
-            </a:r>
-            <a:r>
-              <a:rPr lang="en-US" sz="2000" b="1" dirty="0">
-                <a:solidFill>
-                  <a:schemeClr val="bg2">
-                    <a:lumMod val="10000"/>
-                  </a:schemeClr>
-                </a:solidFill>
-                <a:latin typeface="Calibri" pitchFamily="34" charset="0"/>
-              </a:rPr>
-              <a:t>Güter nach </a:t>
-            </a:r>
-            <a:r>
-              <a:rPr lang="en-US" sz="2000" b="1" dirty="0" smtClean="0">
-                <a:solidFill>
-                  <a:schemeClr val="bg2">
-                    <a:lumMod val="10000"/>
-                  </a:schemeClr>
-                </a:solidFill>
-                <a:latin typeface="Calibri" pitchFamily="34" charset="0"/>
-              </a:rPr>
-              <a:t>Komplexität</a:t>
+              <a:t>Anteil der Exportgüter nach Komplexität</a:t>
             </a:r>
           </a:p>
         </p:txBody>
@@ -17420,7 +16199,6 @@
           <a:bodyPr/>
           <a:lstStyle/>
           <a:p>
-            <a:pPr algn="ctr"/>
             <a:r>
               <a:rPr lang="en-GB" sz="2800" b="1" dirty="0" smtClean="0">
                 <a:solidFill>
@@ -17429,34 +16207,8 @@
                 <a:ea typeface="+mn-ea"/>
                 <a:cs typeface="+mn-cs"/>
               </a:rPr>
-              <a:t>Arbeitsplatzverluste im verarbeitenden Gewerbe und die Rolle von </a:t>
+              <a:t>Arbeitsplatzverluste im verarbeitenden Gewerbe und die Rolle von Technologie und Verbraucherpräferenzen gegenüber dem Handel</a:t>
             </a:r>
-            <a:br>
-              <a:rPr lang="en-GB" sz="2800" b="1" dirty="0" smtClean="0">
-                <a:solidFill>
-                  <a:schemeClr val="tx2"/>
-                </a:solidFill>
-                <a:ea typeface="+mn-ea"/>
-                <a:cs typeface="+mn-cs"/>
-              </a:rPr>
-            </a:br>
-            <a:r>
-              <a:rPr lang="en-GB" sz="2800" b="1" dirty="0" smtClean="0">
-                <a:solidFill>
-                  <a:schemeClr val="tx2"/>
-                </a:solidFill>
-                <a:ea typeface="+mn-ea"/>
-                <a:cs typeface="+mn-cs"/>
-              </a:rPr>
-              <a:t>Technologie  Verbraucherpräferenzen vs. Handel</a:t>
-            </a:r>
-            <a:endParaRPr lang="en-GB" sz="2800" b="1" dirty="0">
-              <a:solidFill>
-                <a:schemeClr val="tx2"/>
-              </a:solidFill>
-              <a:ea typeface="+mn-ea"/>
-              <a:cs typeface="+mn-cs"/>
-            </a:endParaRPr>
           </a:p>
         </p:txBody>
       </p:sp>
@@ -17489,58 +16241,8 @@
                 </a:solidFill>
                 <a:latin typeface="Calibri" panose="020F0502020204030204" pitchFamily="34" charset="0"/>
               </a:rPr>
-              <a:t/>
+              <a:t>Anmerkung: Zerlegung auf Basis einer Regressionsschätzung. Jeder Faktor beruht auf der Veränderung über den Zeitraum. Technologie und Verbraucherpräferenzen umfassen Investitionen in IKT und Maschinen, Veränderungen des Anteils des verarbeitenden Gewerbes am Konsum sowie zeitspezifische Effekte.</a:t>
             </a:r>
-            <a:br>
-              <a:rPr lang="en-GB" sz="1100" dirty="0" smtClean="0">
-                <a:solidFill>
-                  <a:srgbClr val="171717"/>
-                </a:solidFill>
-                <a:latin typeface="Calibri" panose="020F0502020204030204" pitchFamily="34" charset="0"/>
-              </a:rPr>
-            </a:br>
-            <a:r>
-              <a:rPr lang="en-GB" sz="1100" dirty="0" smtClean="0">
-                <a:solidFill>
-                  <a:srgbClr val="171717"/>
-                </a:solidFill>
-                <a:latin typeface="Calibri" panose="020F0502020204030204" pitchFamily="34" charset="0"/>
-              </a:rPr>
-              <a:t>Anmerkung: </a:t>
-            </a:r>
-            <a:r>
-              <a:rPr lang="en-US" sz="1100" dirty="0" smtClean="0">
-                <a:solidFill>
-                  <a:srgbClr val="171717"/>
-                </a:solidFill>
-                <a:latin typeface="Calibri" panose="020F0502020204030204" pitchFamily="34" charset="0"/>
-              </a:rPr>
-              <a:t>Zerlegung </a:t>
-            </a:r>
-            <a:r>
-              <a:rPr lang="en-US" sz="1100" dirty="0">
-                <a:solidFill>
-                  <a:srgbClr val="171717"/>
-                </a:solidFill>
-                <a:latin typeface="Calibri" panose="020F0502020204030204" pitchFamily="34" charset="0"/>
-              </a:rPr>
-              <a:t>basierend auf </a:t>
-            </a:r>
-            <a:r>
-              <a:rPr lang="en-US" sz="1100" dirty="0" smtClean="0">
-                <a:solidFill>
-                  <a:srgbClr val="171717"/>
-                </a:solidFill>
-                <a:latin typeface="Calibri" panose="020F0502020204030204" pitchFamily="34" charset="0"/>
-              </a:rPr>
-              <a:t>Regressionsschätzung. Jeder Faktor basiert auf der Veränderung über den Zeitraum. Technologie und Verbraucherpräferenzen umfassen IKT- und Maschinerieinvestitionen, Veränderungen im Konsumanteil des verarbeitenden Gewerbes und zeitspezifische Effekte.</a:t>
-            </a:r>
-            <a:endParaRPr lang="en-GB" sz="1100" dirty="0" smtClean="0">
-              <a:solidFill>
-                <a:srgbClr val="171717"/>
-              </a:solidFill>
-              <a:latin typeface="Calibri" panose="020F0502020204030204" pitchFamily="34" charset="0"/>
-            </a:endParaRPr>
           </a:p>
           <a:p>
             <a:r>
@@ -17550,41 +16252,8 @@
                 </a:solidFill>
                 <a:latin typeface="Calibri" panose="020F0502020204030204" pitchFamily="34" charset="0"/>
               </a:rPr>
-              <a:t>Quelle</a:t>
+              <a:t>Quelle: OECD Economic Outlook-Datenbank; STAN-Datenbank; und OECD-Berechnungen.</a:t>
             </a:r>
-            <a:r>
-              <a:rPr lang="en-GB" sz="1100" dirty="0">
-                <a:solidFill>
-                  <a:srgbClr val="171717"/>
-                </a:solidFill>
-                <a:latin typeface="Calibri" panose="020F0502020204030204" pitchFamily="34" charset="0"/>
-              </a:rPr>
-              <a:t>:</a:t>
-            </a:r>
-            <a:r>
-              <a:rPr lang="en-US" sz="1100" dirty="0">
-                <a:solidFill>
-                  <a:srgbClr val="171717"/>
-                </a:solidFill>
-                <a:latin typeface="Calibri" panose="020F0502020204030204" pitchFamily="34" charset="0"/>
-              </a:rPr>
-              <a:t> </a:t>
-            </a:r>
-            <a:r>
-              <a:rPr lang="en-US" sz="1100" dirty="0" smtClean="0">
-                <a:solidFill>
-                  <a:srgbClr val="171717"/>
-                </a:solidFill>
-                <a:latin typeface="Calibri" panose="020F0502020204030204" pitchFamily="34" charset="0"/>
-              </a:rPr>
-              <a:t>OECD Wirtschaftsausblick-Datenbank; STAN-Datenbank; und OECD-Berechnungen.</a:t>
-            </a:r>
-            <a:endParaRPr lang="en-GB" sz="1100" dirty="0">
-              <a:solidFill>
-                <a:srgbClr val="171717"/>
-              </a:solidFill>
-              <a:latin typeface="Calibri" panose="020F0502020204030204" pitchFamily="34" charset="0"/>
-            </a:endParaRPr>
           </a:p>
         </p:txBody>
       </p:sp>
@@ -17610,7 +16279,6 @@
           </a:bodyPr>
           <a:lstStyle/>
           <a:p>
-            <a:pPr lvl="0" algn="ctr"/>
             <a:r>
               <a:rPr lang="en-US" sz="2000" b="1" dirty="0" smtClean="0">
                 <a:solidFill>
@@ -17620,82 +16288,21 @@
                 </a:solidFill>
                 <a:latin typeface="Calibri" pitchFamily="34" charset="0"/>
               </a:rPr>
-              <a:t>Faktoren, die den Rückgang der Industriebeschäftigung erklären</a:t>
+              <a:t>Faktoren zur Erklärung des Rückgangs der Arbeitsplätze im verarbeitenden Gewerbe</a:t>
             </a:r>
           </a:p>
           <a:p>
-            <a:pPr lvl="0" algn="ctr"/>
             <a:r>
-              <a:rPr lang="en-US" sz="1200" i="1" dirty="0" smtClean="0">
+              <a:rPr lang="en-US" sz="2000" b="1" dirty="0" smtClean="0">
                 <a:solidFill>
-                  <a:srgbClr val="000000"/>
+                  <a:schemeClr val="bg2">
+                    <a:lumMod val="10000"/>
+                  </a:schemeClr>
                 </a:solidFill>
-                <a:latin typeface="Calibri" panose="020F0502020204030204" pitchFamily="34" charset="0"/>
+                <a:latin typeface="Calibri" pitchFamily="34" charset="0"/>
               </a:rPr>
-              <a:t>Veränderung </a:t>
+              <a:t>Veränderung des Anteils an der Gesamtbeschäftigung, Jahresdurchschnitt 1990-2008</a:t>
             </a:r>
-            <a:r>
-              <a:rPr lang="en-US" sz="1200" i="1" dirty="0">
-                <a:solidFill>
-                  <a:srgbClr val="000000"/>
-                </a:solidFill>
-                <a:latin typeface="Calibri" panose="020F0502020204030204" pitchFamily="34" charset="0"/>
-              </a:rPr>
-              <a:t>des </a:t>
-            </a:r>
-            <a:r>
-              <a:rPr lang="en-US" sz="1200" i="1" dirty="0" smtClean="0">
-                <a:solidFill>
-                  <a:srgbClr val="000000"/>
-                </a:solidFill>
-                <a:latin typeface="Calibri" panose="020F0502020204030204" pitchFamily="34" charset="0"/>
-              </a:rPr>
-              <a:t>Anteils an der </a:t>
-            </a:r>
-            <a:r>
-              <a:rPr lang="en-US" sz="1200" i="1" dirty="0">
-                <a:solidFill>
-                  <a:srgbClr val="000000"/>
-                </a:solidFill>
-                <a:latin typeface="Calibri" panose="020F0502020204030204" pitchFamily="34" charset="0"/>
-              </a:rPr>
-              <a:t>Gesamt</a:t>
-            </a:r>
-            <a:r>
-              <a:rPr lang="en-US" sz="1200" i="1" dirty="0" smtClean="0">
-                <a:solidFill>
-                  <a:srgbClr val="000000"/>
-                </a:solidFill>
-                <a:latin typeface="Calibri" panose="020F0502020204030204" pitchFamily="34" charset="0"/>
-              </a:rPr>
-              <a:t>beschäftigung, </a:t>
-            </a:r>
-            <a:r>
-              <a:rPr lang="en-US" sz="1200" i="1" dirty="0">
-                <a:solidFill>
-                  <a:srgbClr val="000000"/>
-                </a:solidFill>
-                <a:latin typeface="Calibri" panose="020F0502020204030204" pitchFamily="34" charset="0"/>
-              </a:rPr>
-              <a:t>jährlicher </a:t>
-            </a:r>
-            <a:r>
-              <a:rPr lang="en-US" sz="1200" i="1" dirty="0" smtClean="0">
-                <a:solidFill>
-                  <a:srgbClr val="000000"/>
-                </a:solidFill>
-                <a:latin typeface="Calibri" panose="020F0502020204030204" pitchFamily="34" charset="0"/>
-              </a:rPr>
-              <a:t>Durchschnitt 1990-2008</a:t>
-            </a:r>
-            <a:endParaRPr lang="en-US" sz="1200" i="1" dirty="0">
-              <a:solidFill>
-                <a:schemeClr val="bg2">
-                  <a:lumMod val="10000"/>
-                </a:schemeClr>
-              </a:solidFill>
-              <a:latin typeface="Calibri" pitchFamily="34" charset="0"/>
-            </a:endParaRPr>
           </a:p>
         </p:txBody>
       </p:sp>
@@ -17828,38 +16435,14 @@
           <a:bodyPr/>
           <a:lstStyle/>
           <a:p>
-            <a:pPr algn="ctr">
-              <a:defRPr/>
-            </a:pPr>
             <a:r>
               <a:rPr lang="en-US" sz="2800" b="1" dirty="0" smtClean="0">
                 <a:solidFill>
                   <a:schemeClr val="tx2"/>
                 </a:solidFill>
               </a:rPr>
-              <a:t>Rückgang im verarbeitenden Gewerbe ist bedeutsam, weil die Aktivität </a:t>
+              <a:t>Der Rückgang des verarbeitenden Gewerbes ist von Bedeutung, weil die Aktivität regional konzentriert ist</a:t>
             </a:r>
-            <a:r>
-              <a:rPr lang="en-US" sz="2800" b="1" dirty="0">
-                <a:solidFill>
-                  <a:schemeClr val="tx2"/>
-                </a:solidFill>
-              </a:rPr>
-              <a:t>regional </a:t>
-            </a:r>
-            <a:r>
-              <a:rPr lang="en-US" sz="2800" b="1" dirty="0" smtClean="0">
-                <a:solidFill>
-                  <a:schemeClr val="tx2"/>
-                </a:solidFill>
-              </a:rPr>
-              <a:t>konzentriert ist</a:t>
-            </a:r>
-            <a:endParaRPr lang="en-GB" sz="2800" b="1" dirty="0">
-              <a:solidFill>
-                <a:schemeClr val="tx2"/>
-              </a:solidFill>
-            </a:endParaRPr>
           </a:p>
         </p:txBody>
       </p:sp>
@@ -17885,7 +16468,6 @@
           </a:bodyPr>
           <a:lstStyle/>
           <a:p>
-            <a:pPr lvl="0" algn="ctr"/>
             <a:r>
               <a:rPr lang="en-US" sz="2000" b="1" dirty="0" smtClean="0">
                 <a:solidFill>
@@ -17895,13 +16477,12 @@
                 </a:solidFill>
                 <a:latin typeface="Calibri" pitchFamily="34" charset="0"/>
               </a:rPr>
-              <a:t>Geografischer Konzentrationsindex nach Sektor</a:t>
+              <a:t>Geografischer Konzentrationsindex nach Sektoren</a:t>
             </a:r>
           </a:p>
           <a:p>
-            <a:pPr lvl="0" algn="ctr"/>
             <a:r>
-              <a:rPr lang="en-US" sz="1200" i="1" dirty="0">
+              <a:rPr lang="en-US" sz="2000" b="1" dirty="0" smtClean="0">
                 <a:solidFill>
                   <a:schemeClr val="bg2">
                     <a:lumMod val="10000"/>
@@ -17909,7 +16490,7 @@
                 </a:solidFill>
                 <a:latin typeface="Calibri" pitchFamily="34" charset="0"/>
               </a:rPr>
-              <a:t>Durchschnitt von 2000 bis 2015 oder aktuellster Wert</a:t>
+              <a:t>Durchschnitt von 2000 bis 2015 oder letzter Stand</a:t>
             </a:r>
           </a:p>
         </p:txBody>
@@ -17943,229 +16524,8 @@
                 </a:solidFill>
                 <a:latin typeface="Calibri" panose="020F0502020204030204" pitchFamily="34" charset="0"/>
               </a:rPr>
-              <a:t>Anmerkung: „Distributiver Handel“ umfasst Distributionshandel, Reparaturen, Transport und Lagerung, Beherbergungs- und Gastronomietätigkeiten. </a:t>
+              <a:t>Anmerkung: „Handel und Verteilung“ umfasst Handel und Reparaturen, Verkehr und Lagerei sowie Gastgewerbe. Der Index misst, in welchem Maße die Beschäftigung in bestimmten Regionen konzentriert ist, und reicht von 0 (keine Konzentration, wenn alle Regionen eines Landes dieselbe Beschäftigungsquote im verarbeitenden Gewerbe aufweisen) bis 100 (maximale Konzentration, wenn die gesamte Beschäftigung im verarbeitenden Gewerbe in der kleinsten Region konzentriert ist). Der Index berücksichtigt die Größe der Region und beruht auf OECD (2003) „Geographic Concentration and Territorial Disparity in OECD Countries“. Quelle: OECD Regional-Datenbank; und OECD-Berechnungen.</a:t>
             </a:r>
-            <a:r>
-              <a:rPr lang="en-US" sz="1050" dirty="0" smtClean="0">
-                <a:solidFill>
-                  <a:srgbClr val="171717"/>
-                </a:solidFill>
-                <a:latin typeface="Calibri" panose="020F0502020204030204" pitchFamily="34" charset="0"/>
-              </a:rPr>
-              <a:t>Der Index misst </a:t>
-            </a:r>
-            <a:r>
-              <a:rPr lang="en-US" sz="1050" dirty="0">
-                <a:solidFill>
-                  <a:srgbClr val="171717"/>
-                </a:solidFill>
-                <a:latin typeface="Calibri" panose="020F0502020204030204" pitchFamily="34" charset="0"/>
-              </a:rPr>
-              <a:t>das Ausmaß, in dem </a:t>
-            </a:r>
-            <a:r>
-              <a:rPr lang="en-US" sz="1050" dirty="0" smtClean="0">
-                <a:solidFill>
-                  <a:srgbClr val="171717"/>
-                </a:solidFill>
-                <a:latin typeface="Calibri" panose="020F0502020204030204" pitchFamily="34" charset="0"/>
-              </a:rPr>
-              <a:t>Beschäftigung in bestimmten Regionen konzentriert ist, variierend zwischen 0 (keine </a:t>
-            </a:r>
-            <a:r>
-              <a:rPr lang="en-US" sz="1050" dirty="0">
-                <a:solidFill>
-                  <a:srgbClr val="171717"/>
-                </a:solidFill>
-                <a:latin typeface="Calibri" panose="020F0502020204030204" pitchFamily="34" charset="0"/>
-              </a:rPr>
-              <a:t>Konzentration, wobei alle </a:t>
-            </a:r>
-            <a:r>
-              <a:rPr lang="en-US" sz="1050" dirty="0" smtClean="0">
-                <a:solidFill>
-                  <a:srgbClr val="171717"/>
-                </a:solidFill>
-                <a:latin typeface="Calibri" panose="020F0502020204030204" pitchFamily="34" charset="0"/>
-              </a:rPr>
-              <a:t>Regionen eines Landes die gleiche Beschäftigungsquote im verarbeitenden Gewerbe aufweisen </a:t>
-            </a:r>
-            <a:r>
-              <a:rPr lang="en-US" sz="1050" dirty="0">
-                <a:solidFill>
-                  <a:srgbClr val="171717"/>
-                </a:solidFill>
-                <a:latin typeface="Calibri" panose="020F0502020204030204" pitchFamily="34" charset="0"/>
-              </a:rPr>
-              <a:t>) </a:t>
-            </a:r>
-            <a:r>
-              <a:rPr lang="en-US" sz="1050" dirty="0" smtClean="0">
-                <a:solidFill>
-                  <a:srgbClr val="171717"/>
-                </a:solidFill>
-                <a:latin typeface="Calibri" panose="020F0502020204030204" pitchFamily="34" charset="0"/>
-              </a:rPr>
-              <a:t>und </a:t>
-            </a:r>
-            <a:r>
-              <a:rPr lang="en-US" sz="1050" dirty="0">
-                <a:solidFill>
-                  <a:srgbClr val="171717"/>
-                </a:solidFill>
-                <a:latin typeface="Calibri" panose="020F0502020204030204" pitchFamily="34" charset="0"/>
-              </a:rPr>
-              <a:t>100 </a:t>
-            </a:r>
-            <a:r>
-              <a:rPr lang="en-US" sz="1050" dirty="0" smtClean="0">
-                <a:solidFill>
-                  <a:srgbClr val="171717"/>
-                </a:solidFill>
-                <a:latin typeface="Calibri" panose="020F0502020204030204" pitchFamily="34" charset="0"/>
-              </a:rPr>
-              <a:t>(maximale </a:t>
-            </a:r>
-            <a:r>
-              <a:rPr lang="en-US" sz="1050" dirty="0">
-                <a:solidFill>
-                  <a:srgbClr val="171717"/>
-                </a:solidFill>
-                <a:latin typeface="Calibri" panose="020F0502020204030204" pitchFamily="34" charset="0"/>
-              </a:rPr>
-              <a:t>Konzentration, wobei die gesamte </a:t>
-            </a:r>
-            <a:r>
-              <a:rPr lang="en-US" sz="1050" dirty="0" smtClean="0">
-                <a:solidFill>
-                  <a:srgbClr val="171717"/>
-                </a:solidFill>
-                <a:latin typeface="Calibri" panose="020F0502020204030204" pitchFamily="34" charset="0"/>
-              </a:rPr>
-              <a:t>Beschäftigung im verarbeitenden Gewerbe in der kleinsten Region konzentriert ist</a:t>
-            </a:r>
-            <a:r>
-              <a:rPr lang="en-US" sz="1050" dirty="0">
-                <a:solidFill>
-                  <a:srgbClr val="171717"/>
-                </a:solidFill>
-                <a:latin typeface="Calibri" panose="020F0502020204030204" pitchFamily="34" charset="0"/>
-              </a:rPr>
-              <a:t>). Der Index berücksichtigt die Größe der Region und basiert auf OECD </a:t>
-            </a:r>
-            <a:r>
-              <a:rPr lang="en-US" sz="1050" dirty="0" smtClean="0">
-                <a:solidFill>
-                  <a:srgbClr val="171717"/>
-                </a:solidFill>
-                <a:latin typeface="Calibri" panose="020F0502020204030204" pitchFamily="34" charset="0"/>
-              </a:rPr>
-              <a:t>(2003</a:t>
-            </a:r>
-            <a:r>
-              <a:rPr lang="en-US" sz="1050" dirty="0">
-                <a:solidFill>
-                  <a:srgbClr val="171717"/>
-                </a:solidFill>
-                <a:latin typeface="Calibri" panose="020F0502020204030204" pitchFamily="34" charset="0"/>
-              </a:rPr>
-              <a:t>) </a:t>
-            </a:r>
-            <a:r>
-              <a:rPr lang="en-US" sz="1050" dirty="0" smtClean="0">
-                <a:solidFill>
-                  <a:srgbClr val="171717"/>
-                </a:solidFill>
-                <a:latin typeface="Calibri" panose="020F0502020204030204" pitchFamily="34" charset="0"/>
-              </a:rPr>
-              <a:t>„Geografische Konzentration und territoriale Disparität in OECD-Ländern</a:t>
-            </a:r>
-            <a:r>
-              <a:rPr lang="en-US" sz="1050" dirty="0">
-                <a:solidFill>
-                  <a:srgbClr val="171717"/>
-                </a:solidFill>
-                <a:latin typeface="Calibri" panose="020F0502020204030204" pitchFamily="34" charset="0"/>
-              </a:rPr>
-              <a:t>“. </a:t>
-            </a:r>
-            <a:r>
-              <a:rPr lang="en-US" sz="1050" dirty="0" smtClean="0">
-                <a:solidFill>
-                  <a:srgbClr val="171717"/>
-                </a:solidFill>
-                <a:latin typeface="Calibri" panose="020F0502020204030204" pitchFamily="34" charset="0"/>
-              </a:rPr>
-              <a:t>Quelle:</a:t>
-            </a:r>
-            <a:br>
-              <a:rPr lang="en-US" sz="1050" dirty="0" smtClean="0">
-                <a:solidFill>
-                  <a:srgbClr val="171717"/>
-                </a:solidFill>
-                <a:latin typeface="Calibri" panose="020F0502020204030204" pitchFamily="34" charset="0"/>
-              </a:rPr>
-            </a:br>
-            <a:r>
-              <a:rPr lang="en-GB" sz="1050" dirty="0" smtClean="0">
-                <a:solidFill>
-                  <a:srgbClr val="171717"/>
-                </a:solidFill>
-                <a:latin typeface="Calibri" panose="020F0502020204030204" pitchFamily="34" charset="0"/>
-              </a:rPr>
-              <a:t> </a:t>
-            </a:r>
-            <a:r>
-              <a:rPr lang="en-US" sz="1050" i="1" dirty="0" smtClean="0">
-                <a:solidFill>
-                  <a:srgbClr val="171717"/>
-                </a:solidFill>
-                <a:latin typeface="Calibri" panose="020F0502020204030204" pitchFamily="34" charset="0"/>
-              </a:rPr>
-              <a:t> </a:t>
-            </a:r>
-            <a:r>
-              <a:rPr lang="en-US" sz="1050" dirty="0">
-                <a:solidFill>
-                  <a:srgbClr val="171717"/>
-                </a:solidFill>
-                <a:latin typeface="Calibri" panose="020F0502020204030204" pitchFamily="34" charset="0"/>
-              </a:rPr>
-              <a:t>datenbank; </a:t>
-            </a:r>
-            <a:r>
-              <a:rPr lang="en-US" sz="1050" dirty="0" smtClean="0">
-                <a:solidFill>
-                  <a:srgbClr val="171717"/>
-                </a:solidFill>
-                <a:latin typeface="Calibri" panose="020F0502020204030204" pitchFamily="34" charset="0"/>
-              </a:rPr>
-              <a:t>und OECD-Berechnungen</a:t>
-            </a:r>
-            <a:r>
-              <a:rPr lang="en-US" sz="1050" dirty="0">
-                <a:solidFill>
-                  <a:srgbClr val="171717"/>
-                </a:solidFill>
-                <a:latin typeface="Calibri" panose="020F0502020204030204" pitchFamily="34" charset="0"/>
-              </a:rPr>
-              <a:t>.</a:t>
-            </a:r>
-            <a:r>
-              <a:rPr lang="en-US" sz="1050" dirty="0" smtClean="0">
-                <a:solidFill>
-                  <a:srgbClr val="171717"/>
-                </a:solidFill>
-                <a:latin typeface="Calibri" panose="020F0502020204030204" pitchFamily="34" charset="0"/>
-              </a:rPr>
-              <a:t/>
-            </a:r>
-            <a:endParaRPr lang="en-GB" sz="1050" dirty="0">
-              <a:solidFill>
-                <a:srgbClr val="171717"/>
-              </a:solidFill>
-              <a:latin typeface="Calibri" panose="020F0502020204030204" pitchFamily="34" charset="0"/>
-            </a:endParaRPr>
           </a:p>
         </p:txBody>
       </p:sp>
@@ -18229,7 +16589,6 @@
           </a:bodyPr>
           <a:lstStyle/>
           <a:p>
-            <a:pPr algn="ctr"/>
             <a:r>
               <a:rPr lang="en-GB" sz="1400" b="1" dirty="0" smtClean="0">
                 <a:solidFill>
@@ -18241,14 +16600,6 @@
               </a:rPr>
               <a:t>Stärker konzentriert</a:t>
             </a:r>
-            <a:endParaRPr lang="en-GB" sz="1400" b="1" dirty="0">
-              <a:solidFill>
-                <a:schemeClr val="bg2">
-                  <a:lumMod val="10000"/>
-                </a:schemeClr>
-              </a:solidFill>
-              <a:latin typeface="Calibri" panose="020F0502020204030204" pitchFamily="34" charset="0"/>
-            </a:endParaRPr>
           </a:p>
         </p:txBody>
       </p:sp>
@@ -18373,20 +16724,14 @@
           <a:bodyPr/>
           <a:lstStyle/>
           <a:p>
-            <a:pPr algn="ctr"/>
             <a:r>
               <a:rPr lang="en-US" sz="2800" b="1" dirty="0" smtClean="0">
                 <a:solidFill>
                   <a:schemeClr val="tx2"/>
                 </a:solidFill>
               </a:rPr>
-              <a:t>Länder mit stärkerem Rückgang der Industriebeschäftigung verzeichnen zunehmende regionale Ungleichheit</a:t>
+              <a:t>Länder mit stärkeren Rückgängen der Arbeitsplätze im verarbeitenden Gewerbe haben eine höhere regionale Ungleichheit</a:t>
             </a:r>
-            <a:endParaRPr lang="en-US" sz="2800" b="1" dirty="0">
-              <a:solidFill>
-                <a:schemeClr val="tx2"/>
-              </a:solidFill>
-            </a:endParaRPr>
           </a:p>
         </p:txBody>
       </p:sp>
@@ -18419,49 +16764,8 @@
                 </a:solidFill>
                 <a:latin typeface="Calibri" panose="020F0502020204030204" pitchFamily="34" charset="0"/>
               </a:rPr>
-              <a:t/>
+              <a:t>Quelle: OECD Regional-Datenbank; und OECD-Berechnungen.</a:t>
             </a:r>
-            <a:br>
-              <a:rPr lang="en-GB" sz="1200" dirty="0" smtClean="0">
-                <a:solidFill>
-                  <a:srgbClr val="171717"/>
-                </a:solidFill>
-                <a:latin typeface="Calibri" panose="020F0502020204030204" pitchFamily="34" charset="0"/>
-              </a:rPr>
-            </a:br>
-            <a:r>
-              <a:rPr lang="en-GB" sz="1200" dirty="0" smtClean="0">
-                <a:solidFill>
-                  <a:srgbClr val="171717"/>
-                </a:solidFill>
-                <a:latin typeface="Calibri" panose="020F0502020204030204" pitchFamily="34" charset="0"/>
-              </a:rPr>
-              <a:t>Quelle:</a:t>
-            </a:r>
-            <a:r>
-              <a:rPr lang="en-US" sz="1200" i="1" dirty="0" smtClean="0">
-                <a:solidFill>
-                  <a:srgbClr val="171717"/>
-                </a:solidFill>
-                <a:latin typeface="Calibri" panose="020F0502020204030204" pitchFamily="34" charset="0"/>
-              </a:rPr>
-              <a:t> </a:t>
-            </a:r>
-            <a:r>
-              <a:rPr lang="en-US" sz="1200" dirty="0" smtClean="0">
-                <a:solidFill>
-                  <a:srgbClr val="171717"/>
-                </a:solidFill>
-                <a:latin typeface="Calibri" panose="020F0502020204030204" pitchFamily="34" charset="0"/>
-              </a:rPr>
-              <a:t>OECD Regionaldatenbank; und OECD-Berechnungen.</a:t>
-            </a:r>
-            <a:endParaRPr lang="en-GB" sz="1200" dirty="0">
-              <a:solidFill>
-                <a:srgbClr val="171717"/>
-              </a:solidFill>
-              <a:latin typeface="Calibri" panose="020F0502020204030204" pitchFamily="34" charset="0"/>
-            </a:endParaRPr>
           </a:p>
         </p:txBody>
       </p:sp>
@@ -18487,7 +16791,6 @@
           </a:bodyPr>
           <a:lstStyle/>
           <a:p>
-            <a:pPr lvl="0" algn="ctr"/>
             <a:r>
               <a:rPr lang="en-US" sz="1400" b="1" dirty="0" smtClean="0">
                 <a:solidFill>
@@ -18497,92 +16800,8 @@
                 </a:solidFill>
                 <a:latin typeface="Calibri" pitchFamily="34" charset="0"/>
               </a:rPr>
-              <a:t>Veränderung der </a:t>
+              <a:t>Veränderung der durchschnittlichen Einkommensungleichheit zwischen Regionen 2000 bis 2015 oder letzter Stand, Verhältnis der 90:50-Perzentile, %-Punkte</a:t>
             </a:r>
-            <a:r>
-              <a:rPr lang="en-US" sz="1400" b="1" dirty="0">
-                <a:solidFill>
-                  <a:schemeClr val="bg2">
-                    <a:lumMod val="10000"/>
-                  </a:schemeClr>
-                </a:solidFill>
-                <a:latin typeface="Calibri" pitchFamily="34" charset="0"/>
-              </a:rPr>
-              <a:t>durchschnittlichen Einkommensungleichheit </a:t>
-            </a:r>
-            <a:r>
-              <a:rPr lang="en-US" sz="1400" b="1" dirty="0" smtClean="0">
-                <a:solidFill>
-                  <a:schemeClr val="bg2">
-                    <a:lumMod val="10000"/>
-                  </a:schemeClr>
-                </a:solidFill>
-                <a:latin typeface="Calibri" pitchFamily="34" charset="0"/>
-              </a:rPr>
-              <a:t>zwischen Regionen</a:t>
-            </a:r>
-            <a:r>
-              <a:rPr lang="en-US" sz="1400" dirty="0" smtClean="0">
-                <a:solidFill>
-                  <a:schemeClr val="bg2">
-                    <a:lumMod val="10000"/>
-                  </a:schemeClr>
-                </a:solidFill>
-                <a:latin typeface="Calibri" pitchFamily="34" charset="0"/>
-              </a:rPr>
-              <a:t/>
-            </a:r>
-            <a:br>
-              <a:rPr lang="en-US" sz="1400" dirty="0" smtClean="0">
-                <a:solidFill>
-                  <a:schemeClr val="bg2">
-                    <a:lumMod val="10000"/>
-                  </a:schemeClr>
-                </a:solidFill>
-                <a:latin typeface="Calibri" pitchFamily="34" charset="0"/>
-              </a:rPr>
-            </a:br>
-            <a:r>
-              <a:rPr lang="en-US" sz="1200" i="1" dirty="0" smtClean="0">
-                <a:solidFill>
-                  <a:schemeClr val="bg2">
-                    <a:lumMod val="10000"/>
-                  </a:schemeClr>
-                </a:solidFill>
-                <a:latin typeface="Calibri" pitchFamily="34" charset="0"/>
-              </a:rPr>
-              <a:t>2000 bis 2015 oder jüngster Wert, Verhältnis 90:50 Perzentile, </a:t>
-            </a:r>
-            <a:r>
-              <a:rPr lang="en-US" sz="1200" i="1" dirty="0">
-                <a:solidFill>
-                  <a:schemeClr val="bg2">
-                    <a:lumMod val="10000"/>
-                  </a:schemeClr>
-                </a:solidFill>
-                <a:latin typeface="Calibri" pitchFamily="34" charset="0"/>
-              </a:rPr>
-              <a:t>% </a:t>
-            </a:r>
-            <a:r>
-              <a:rPr lang="en-US" sz="1200" i="1" dirty="0" smtClean="0">
-                <a:solidFill>
-                  <a:schemeClr val="bg2">
-                    <a:lumMod val="10000"/>
-                  </a:schemeClr>
-                </a:solidFill>
-                <a:latin typeface="Calibri" pitchFamily="34" charset="0"/>
-              </a:rPr>
-              <a:t>Pkt.</a:t>
-            </a:r>
-            <a:endParaRPr lang="en-US" sz="1400" i="1" dirty="0" smtClean="0">
-              <a:solidFill>
-                <a:schemeClr val="bg2">
-                  <a:lumMod val="10000"/>
-                </a:schemeClr>
-              </a:solidFill>
-              <a:latin typeface="Calibri" pitchFamily="34" charset="0"/>
-            </a:endParaRPr>
           </a:p>
         </p:txBody>
       </p:sp>
@@ -18608,7 +16827,6 @@
           </a:bodyPr>
           <a:lstStyle/>
           <a:p>
-            <a:pPr lvl="0" algn="ctr"/>
             <a:r>
               <a:rPr lang="en-US" sz="1400" b="1" dirty="0" smtClean="0">
                 <a:solidFill>
@@ -18618,59 +16836,8 @@
                 </a:solidFill>
                 <a:latin typeface="Calibri" pitchFamily="34" charset="0"/>
               </a:rPr>
-              <a:t>Veränderung der nationalen Beschäftigungsquote im verarbeitenden Gewerbe</a:t>
+              <a:t>Veränderung der nationalen Beschäftigungsquote im verarbeitenden Gewerbe 2000 bis 2015 oder letzter Stand, %-Punkte</a:t>
             </a:r>
-            <a:r>
-              <a:rPr lang="en-US" sz="1400" dirty="0" smtClean="0">
-                <a:solidFill>
-                  <a:schemeClr val="bg2">
-                    <a:lumMod val="10000"/>
-                  </a:schemeClr>
-                </a:solidFill>
-                <a:latin typeface="Calibri" pitchFamily="34" charset="0"/>
-              </a:rPr>
-              <a:t/>
-            </a:r>
-            <a:br>
-              <a:rPr lang="en-US" sz="1400" dirty="0" smtClean="0">
-                <a:solidFill>
-                  <a:schemeClr val="bg2">
-                    <a:lumMod val="10000"/>
-                  </a:schemeClr>
-                </a:solidFill>
-                <a:latin typeface="Calibri" pitchFamily="34" charset="0"/>
-              </a:rPr>
-            </a:br>
-            <a:r>
-              <a:rPr lang="en-US" sz="1200" i="1" dirty="0">
-                <a:solidFill>
-                  <a:schemeClr val="bg2">
-                    <a:lumMod val="10000"/>
-                  </a:schemeClr>
-                </a:solidFill>
-                <a:latin typeface="Calibri" pitchFamily="34" charset="0"/>
-              </a:rPr>
-              <a:t>2000 bis 2015 oder </a:t>
-            </a:r>
-            <a:r>
-              <a:rPr lang="en-US" sz="1200" i="1" dirty="0" smtClean="0">
-                <a:solidFill>
-                  <a:schemeClr val="bg2">
-                    <a:lumMod val="10000"/>
-                  </a:schemeClr>
-                </a:solidFill>
-                <a:latin typeface="Calibri" pitchFamily="34" charset="0"/>
-              </a:rPr>
-              <a:t>jüngster Wert, % Pkt.</a:t>
-            </a:r>
-            <a:endParaRPr lang="en-US" sz="1400" i="1" dirty="0" smtClean="0">
-              <a:solidFill>
-                <a:schemeClr val="bg2">
-                  <a:lumMod val="10000"/>
-                </a:schemeClr>
-              </a:solidFill>
-              <a:latin typeface="Calibri" pitchFamily="34" charset="0"/>
-            </a:endParaRPr>
           </a:p>
         </p:txBody>
       </p:sp>
@@ -18734,7 +16901,6 @@
           </a:bodyPr>
           <a:lstStyle/>
           <a:p>
-            <a:pPr algn="ctr"/>
             <a:r>
               <a:rPr lang="en-US" sz="1400" b="1" dirty="0">
                 <a:solidFill>
@@ -18744,16 +16910,8 @@
                 </a:solidFill>
                 <a:latin typeface="Calibri" panose="020F0502020204030204" pitchFamily="34" charset="0"/>
               </a:rPr>
-              <a:t>Zunehmende Streuung der Regionaleinkommen</a:t>
+              <a:t>Zunehmende Streuung der regionalen Einkommen</a:t>
             </a:r>
-            <a:endParaRPr lang="en-GB" sz="1400" b="1" dirty="0">
-              <a:solidFill>
-                <a:schemeClr val="bg2">
-                  <a:lumMod val="10000"/>
-                </a:schemeClr>
-              </a:solidFill>
-              <a:latin typeface="Calibri" panose="020F0502020204030204" pitchFamily="34" charset="0"/>
-            </a:endParaRPr>
           </a:p>
         </p:txBody>
       </p:sp>
@@ -18779,7 +16937,6 @@
           </a:bodyPr>
           <a:lstStyle/>
           <a:p>
-            <a:pPr algn="ctr"/>
             <a:r>
               <a:rPr lang="en-GB" sz="1400" b="1" dirty="0" smtClean="0">
                 <a:solidFill>
@@ -18789,37 +16946,8 @@
                 </a:solidFill>
                 <a:latin typeface="Calibri" panose="020F0502020204030204" pitchFamily="34" charset="0"/>
               </a:rPr>
-              <a:t>Rückgang des Anteils der</a:t>
+              <a:t>Rückgang des Anteils der Arbeitsplätze im verarbeitenden Gewerbe</a:t>
             </a:r>
-            <a:br>
-              <a:rPr lang="en-GB" sz="1400" b="1" dirty="0" smtClean="0">
-                <a:solidFill>
-                  <a:schemeClr val="bg2">
-                    <a:lumMod val="10000"/>
-                  </a:schemeClr>
-                </a:solidFill>
-                <a:latin typeface="Calibri" panose="020F0502020204030204" pitchFamily="34" charset="0"/>
-              </a:rPr>
-            </a:br>
-            <a:r>
-              <a:rPr lang="en-GB" sz="1400" b="1" dirty="0" smtClean="0">
-                <a:solidFill>
-                  <a:schemeClr val="bg2">
-                    <a:lumMod val="10000"/>
-                  </a:schemeClr>
-                </a:solidFill>
-                <a:latin typeface="Calibri" panose="020F0502020204030204" pitchFamily="34" charset="0"/>
-              </a:rPr>
-              <a:t>Industriearbeitsplätze</a:t>
-            </a:r>
-            <a:endParaRPr lang="en-GB" sz="1400" b="1" dirty="0">
-              <a:solidFill>
-                <a:schemeClr val="bg2">
-                  <a:lumMod val="10000"/>
-                </a:schemeClr>
-              </a:solidFill>
-              <a:latin typeface="Calibri" panose="020F0502020204030204" pitchFamily="34" charset="0"/>
-            </a:endParaRPr>
           </a:p>
         </p:txBody>
       </p:sp>
@@ -18942,9 +17070,6 @@
           </a:bodyPr>
           <a:lstStyle/>
           <a:p>
-            <a:pPr lvl="0" algn="ctr">
-              <a:defRPr/>
-            </a:pPr>
             <a:r>
               <a:rPr lang="en-US" sz="4000" b="1" dirty="0" smtClean="0">
                 <a:solidFill>
@@ -18952,103 +17077,7 @@
                 </a:solidFill>
                 <a:latin typeface="Arial"/>
               </a:rPr>
-              <a:t>Ein </a:t>
-            </a:r>
-            <a:r>
-              <a:rPr lang="en-US" sz="4000" b="1" dirty="0">
-                <a:solidFill>
-                  <a:srgbClr val="006299"/>
-                </a:solidFill>
-                <a:latin typeface="Arial"/>
-              </a:rPr>
-              <a:t>integrierter </a:t>
-            </a:r>
-            <a:r>
-              <a:rPr lang="en-US" sz="4000" b="1" dirty="0" smtClean="0">
-                <a:solidFill>
-                  <a:srgbClr val="006299"/>
-                </a:solidFill>
-                <a:latin typeface="Arial"/>
-              </a:rPr>
-              <a:t>politischer Ansatz </a:t>
-            </a:r>
-            <a:br>
-              <a:rPr lang="en-US" sz="4000" b="1" dirty="0" smtClean="0">
-                <a:solidFill>
-                  <a:srgbClr val="006299"/>
-                </a:solidFill>
-                <a:latin typeface="Arial"/>
-              </a:rPr>
-            </a:br>
-            <a:r>
-              <a:rPr lang="en-US" sz="4000" b="1" dirty="0" smtClean="0">
-                <a:solidFill>
-                  <a:srgbClr val="006299"/>
-                </a:solidFill>
-                <a:latin typeface="Arial"/>
-              </a:rPr>
-              <a:t>ist </a:t>
-            </a:r>
-            <a:r>
-              <a:rPr lang="en-US" sz="4000" b="1" dirty="0">
-                <a:solidFill>
-                  <a:srgbClr val="006299"/>
-                </a:solidFill>
-                <a:latin typeface="Arial"/>
-              </a:rPr>
-              <a:t>erforderlich, </a:t>
-            </a:r>
-            <a:r>
-              <a:rPr lang="en-US" sz="4000" b="1" dirty="0" smtClean="0">
-                <a:solidFill>
-                  <a:srgbClr val="006299"/>
-                </a:solidFill>
-                <a:latin typeface="Arial"/>
-              </a:rPr>
-              <a:t>um auf </a:t>
-            </a:r>
-            <a:br>
-              <a:rPr lang="en-US" sz="4000" b="1" dirty="0" smtClean="0">
-                <a:solidFill>
-                  <a:srgbClr val="006299"/>
-                </a:solidFill>
-                <a:latin typeface="Arial"/>
-              </a:rPr>
-            </a:br>
-            <a:r>
-              <a:rPr lang="en-US" sz="4000" b="1" dirty="0" smtClean="0">
-                <a:solidFill>
-                  <a:srgbClr val="006299"/>
-                </a:solidFill>
-                <a:latin typeface="Arial"/>
-              </a:rPr>
-              <a:t>strukturelle Trends zu reagieren und die </a:t>
-            </a:r>
-            <a:br>
-              <a:rPr lang="en-US" sz="4000" b="1" dirty="0" smtClean="0">
-                <a:solidFill>
-                  <a:srgbClr val="006299"/>
-                </a:solidFill>
-                <a:latin typeface="Arial"/>
-              </a:rPr>
-            </a:br>
-            <a:r>
-              <a:rPr lang="en-US" sz="4000" b="1" dirty="0" smtClean="0">
-                <a:solidFill>
-                  <a:srgbClr val="006299"/>
-                </a:solidFill>
-                <a:latin typeface="Arial"/>
-              </a:rPr>
-              <a:t>Globalisierung </a:t>
-            </a:r>
-            <a:r>
-              <a:rPr lang="en-US" sz="4000" b="1" dirty="0">
-                <a:solidFill>
-                  <a:srgbClr val="006299"/>
-                </a:solidFill>
-                <a:latin typeface="Arial"/>
-              </a:rPr>
-              <a:t>für alle zu gestalten</a:t>
+              <a:t>Ein integrierter Politikansatz ist nötig, um auf Strukturtrends zu reagieren und die Globalisierung für alle nutzbar zu machen</a:t>
             </a:r>
           </a:p>
         </p:txBody>
@@ -19111,9 +17140,6 @@
           </a:bodyPr>
           <a:lstStyle/>
           <a:p>
-            <a:pPr algn="ctr">
-              <a:defRPr/>
-            </a:pPr>
             <a:r>
               <a:rPr lang="en-GB" sz="2800" b="1" dirty="0" smtClean="0">
                 <a:solidFill>
@@ -19121,14 +17147,8 @@
                 </a:solidFill>
                 <a:latin typeface="+mj-lt"/>
               </a:rPr>
-              <a:t>Kernaussagen</a:t>
+              <a:t>Kernbotschaften</a:t>
             </a:r>
-            <a:endParaRPr lang="en-GB" sz="2800" b="1" dirty="0">
-              <a:solidFill>
-                <a:schemeClr val="tx2"/>
-              </a:solidFill>
-              <a:latin typeface="+mj-lt"/>
-            </a:endParaRPr>
           </a:p>
         </p:txBody>
       </p:sp>
@@ -19299,7 +17319,6 @@
           </a:bodyPr>
           <a:lstStyle/>
           <a:p>
-            <a:pPr lvl="0" algn="ctr"/>
             <a:r>
               <a:rPr lang="en-GB" sz="2800" b="1" dirty="0">
                 <a:solidFill>
@@ -19307,42 +17326,7 @@
                 </a:solidFill>
                 <a:latin typeface="Arial"/>
               </a:rPr>
-              <a:t>Das internationale System verbessern </a:t>
-            </a:r>
-            <a:r>
-              <a:rPr lang="en-GB" sz="2800" b="1" dirty="0" smtClean="0">
-                <a:solidFill>
-                  <a:srgbClr val="006299"/>
-                </a:solidFill>
-                <a:latin typeface="Arial"/>
-              </a:rPr>
-              <a:t>und</a:t>
-            </a:r>
-            <a:br>
-              <a:rPr lang="en-GB" sz="2800" b="1" dirty="0" smtClean="0">
-                <a:solidFill>
-                  <a:srgbClr val="006299"/>
-                </a:solidFill>
-                <a:latin typeface="Arial"/>
-              </a:rPr>
-            </a:br>
-            <a:r>
-              <a:rPr lang="en-GB" sz="2800" b="1" dirty="0" smtClean="0">
-                <a:solidFill>
-                  <a:srgbClr val="006299"/>
-                </a:solidFill>
-                <a:latin typeface="Arial"/>
-              </a:rPr>
-              <a:t> </a:t>
-            </a:r>
-            <a:r>
-              <a:rPr lang="en-GB" sz="2800" b="1" dirty="0">
-                <a:solidFill>
-                  <a:srgbClr val="006299"/>
-                </a:solidFill>
-                <a:latin typeface="Arial"/>
-              </a:rPr>
-              <a:t>gleiche Wettbewerbsbedingungen schaffen</a:t>
+              <a:t>Das internationale System besser zum Funktionieren bringen und gleichere Wettbewerbsbedingungen schaffen</a:t>
             </a:r>
           </a:p>
         </p:txBody>
@@ -19400,7 +17384,7 @@
                 </a:solidFill>
                 <a:latin typeface="Calibri" panose="020F0502020204030204" pitchFamily="34" charset="0"/>
               </a:rPr>
-              <a:t>Anmerkung: Umfasst alle OECD- und BRIICS-Länder, die EU und Kolumbien.</a:t>
+              <a:t>Anmerkung: umfasst alle OECD- und BRIICS-Länder, die EU und Kolumbien.</a:t>
             </a:r>
           </a:p>
           <a:p>
@@ -19413,38 +17397,8 @@
                 </a:solidFill>
                 <a:latin typeface="Calibri" panose="020F0502020204030204" pitchFamily="34" charset="0"/>
               </a:rPr>
-              <a:t>Quelle: OECD </a:t>
+              <a:t>Quelle: OECD Going for Growth 2017</a:t>
             </a:r>
-            <a:r>
-              <a:rPr lang="en-GB" sz="1050" i="1" dirty="0" smtClean="0">
-                <a:solidFill>
-                  <a:schemeClr val="bg2">
-                    <a:lumMod val="10000"/>
-                  </a:schemeClr>
-                </a:solidFill>
-                <a:latin typeface="Calibri" panose="020F0502020204030204" pitchFamily="34" charset="0"/>
-              </a:rPr>
-              <a:t>Going for Growth </a:t>
-            </a:r>
-            <a:r>
-              <a:rPr lang="en-GB" sz="1050" dirty="0" smtClean="0">
-                <a:solidFill>
-                  <a:schemeClr val="bg2">
-                    <a:lumMod val="10000"/>
-                  </a:schemeClr>
-                </a:solidFill>
-                <a:latin typeface="Calibri" panose="020F0502020204030204" pitchFamily="34" charset="0"/>
-              </a:rPr>
-              <a:t>2017</a:t>
-            </a:r>
-            <a:endParaRPr lang="en-GB" sz="1050" dirty="0">
-              <a:solidFill>
-                <a:schemeClr val="bg2">
-                  <a:lumMod val="10000"/>
-                </a:schemeClr>
-              </a:solidFill>
-              <a:latin typeface="Calibri" panose="020F0502020204030204" pitchFamily="34" charset="0"/>
-            </a:endParaRPr>
           </a:p>
         </p:txBody>
       </p:sp>
@@ -19470,7 +17424,6 @@
           </a:bodyPr>
           <a:lstStyle/>
           <a:p>
-            <a:pPr lvl="0" algn="ctr"/>
             <a:r>
               <a:rPr lang="en-US" sz="1600" b="1" dirty="0">
                 <a:solidFill>
@@ -19480,59 +17433,8 @@
                 </a:solidFill>
                 <a:latin typeface="Calibri" pitchFamily="34" charset="0"/>
               </a:rPr>
-              <a:t>Maßnahmen als Reaktion auf OECD-</a:t>
+              <a:t>Maßnahmen als Reaktion auf die Empfehlungen des OECD Going for Growth Anzahl der Reformen, 2015-16</a:t>
             </a:r>
-            <a:r>
-              <a:rPr lang="en-US" sz="1600" b="1" i="1" dirty="0">
-                <a:solidFill>
-                  <a:schemeClr val="bg2">
-                    <a:lumMod val="10000"/>
-                  </a:schemeClr>
-                </a:solidFill>
-                <a:latin typeface="Calibri" pitchFamily="34" charset="0"/>
-              </a:rPr>
-              <a:t>Going for Growth-</a:t>
-            </a:r>
-            <a:r>
-              <a:rPr lang="en-US" sz="1600" b="1" dirty="0" smtClean="0">
-                <a:solidFill>
-                  <a:schemeClr val="bg2">
-                    <a:lumMod val="10000"/>
-                  </a:schemeClr>
-                </a:solidFill>
-                <a:latin typeface="Calibri" pitchFamily="34" charset="0"/>
-              </a:rPr>
-              <a:t>Empfehlungen</a:t>
-            </a:r>
-            <a:br>
-              <a:rPr lang="en-US" sz="1600" b="1" dirty="0" smtClean="0">
-                <a:solidFill>
-                  <a:schemeClr val="bg2">
-                    <a:lumMod val="10000"/>
-                  </a:schemeClr>
-                </a:solidFill>
-                <a:latin typeface="Calibri" pitchFamily="34" charset="0"/>
-              </a:rPr>
-            </a:br>
-            <a:r>
-              <a:rPr lang="en-US" sz="1200" i="1" dirty="0" smtClean="0">
-                <a:solidFill>
-                  <a:schemeClr val="bg2">
-                    <a:lumMod val="10000"/>
-                  </a:schemeClr>
-                </a:solidFill>
-                <a:latin typeface="Calibri" pitchFamily="34" charset="0"/>
-              </a:rPr>
-              <a:t>Anzahl der Reformen, 2015-16</a:t>
-            </a:r>
-            <a:endParaRPr lang="en-US" sz="1200" i="1" dirty="0">
-              <a:solidFill>
-                <a:schemeClr val="bg2">
-                  <a:lumMod val="10000"/>
-                </a:schemeClr>
-              </a:solidFill>
-              <a:latin typeface="Calibri" pitchFamily="34" charset="0"/>
-            </a:endParaRPr>
           </a:p>
         </p:txBody>
       </p:sp>
@@ -19658,9 +17560,6 @@
           </a:bodyPr>
           <a:lstStyle/>
           <a:p>
-            <a:pPr algn="ctr">
-              <a:defRPr/>
-            </a:pPr>
             <a:r>
               <a:rPr lang="en-US" sz="2800" b="1" dirty="0" smtClean="0">
                 <a:solidFill>
@@ -19668,31 +17567,8 @@
                 </a:solidFill>
                 <a:latin typeface="+mj-lt"/>
               </a:rPr>
-              <a:t>Inländische Reformpakete umsetzen,</a:t>
+              <a:t>Inländische Reformpakete umsetzen, um inklusives Wachstum zu stärken</a:t>
             </a:r>
-            <a:br>
-              <a:rPr lang="en-US" sz="2800" b="1" dirty="0" smtClean="0">
-                <a:solidFill>
-                  <a:schemeClr val="tx2"/>
-                </a:solidFill>
-                <a:latin typeface="+mj-lt"/>
-              </a:rPr>
-            </a:br>
-            <a:r>
-              <a:rPr lang="en-US" sz="2800" b="1" dirty="0" smtClean="0">
-                <a:solidFill>
-                  <a:schemeClr val="tx2"/>
-                </a:solidFill>
-                <a:latin typeface="+mj-lt"/>
-              </a:rPr>
-              <a:t>um inklusives Wachstum zu stärken</a:t>
-            </a:r>
-            <a:endParaRPr lang="en-GB" sz="2800" b="1" dirty="0">
-              <a:solidFill>
-                <a:schemeClr val="tx2"/>
-              </a:solidFill>
-              <a:latin typeface="+mj-lt"/>
-            </a:endParaRPr>
           </a:p>
         </p:txBody>
       </p:sp>
@@ -19718,7 +17594,6 @@
           </a:bodyPr>
           <a:lstStyle/>
           <a:p>
-            <a:pPr lvl="0" algn="ctr"/>
             <a:r>
               <a:rPr lang="en-US" sz="1600" b="1" dirty="0">
                 <a:solidFill>
@@ -19728,38 +17603,8 @@
                 </a:solidFill>
                 <a:latin typeface="Calibri" pitchFamily="34" charset="0"/>
               </a:rPr>
-              <a:t>Maßnahmen als Reaktion auf OECD-</a:t>
+              <a:t>Maßnahmen als Reaktion auf die Empfehlungen des OECD Going for Growth</a:t>
             </a:r>
-            <a:r>
-              <a:rPr lang="en-US" sz="1600" b="1" i="1" dirty="0">
-                <a:solidFill>
-                  <a:schemeClr val="bg2">
-                    <a:lumMod val="10000"/>
-                  </a:schemeClr>
-                </a:solidFill>
-                <a:latin typeface="Calibri" pitchFamily="34" charset="0"/>
-              </a:rPr>
-              <a:t>Going for Growth-</a:t>
-            </a:r>
-            <a:r>
-              <a:rPr lang="en-US" sz="1600" b="1" dirty="0" smtClean="0">
-                <a:solidFill>
-                  <a:schemeClr val="bg2">
-                    <a:lumMod val="10000"/>
-                  </a:schemeClr>
-                </a:solidFill>
-                <a:latin typeface="Calibri" pitchFamily="34" charset="0"/>
-              </a:rPr>
-              <a:t>Empfehlungen</a:t>
-            </a:r>
-            <a:endParaRPr lang="en-US" sz="1600" b="1" dirty="0">
-              <a:solidFill>
-                <a:schemeClr val="bg2">
-                  <a:lumMod val="10000"/>
-                </a:schemeClr>
-              </a:solidFill>
-              <a:latin typeface="Calibri" pitchFamily="34" charset="0"/>
-            </a:endParaRPr>
           </a:p>
         </p:txBody>
       </p:sp>
@@ -19794,7 +17639,7 @@
                 </a:solidFill>
                 <a:latin typeface="Calibri" panose="020F0502020204030204" pitchFamily="34" charset="0"/>
               </a:rPr>
-              <a:t>Anmerkung: Umfasst alle OECD- und BRIICS-Länder, die EU und Kolumbien.</a:t>
+              <a:t>Anmerkung: umfasst alle OECD- und BRIICS-Länder, die EU und Kolumbien.</a:t>
             </a:r>
           </a:p>
           <a:p>
@@ -19807,38 +17652,8 @@
                 </a:solidFill>
                 <a:latin typeface="Calibri" panose="020F0502020204030204" pitchFamily="34" charset="0"/>
               </a:rPr>
-              <a:t>Quelle: OECD </a:t>
+              <a:t>Quelle: OECD Going for Growth 2017</a:t>
             </a:r>
-            <a:r>
-              <a:rPr lang="en-GB" sz="1050" i="1" dirty="0" smtClean="0">
-                <a:solidFill>
-                  <a:schemeClr val="bg2">
-                    <a:lumMod val="10000"/>
-                  </a:schemeClr>
-                </a:solidFill>
-                <a:latin typeface="Calibri" panose="020F0502020204030204" pitchFamily="34" charset="0"/>
-              </a:rPr>
-              <a:t>Going for Growth </a:t>
-            </a:r>
-            <a:r>
-              <a:rPr lang="en-GB" sz="1050" dirty="0" smtClean="0">
-                <a:solidFill>
-                  <a:schemeClr val="bg2">
-                    <a:lumMod val="10000"/>
-                  </a:schemeClr>
-                </a:solidFill>
-                <a:latin typeface="Calibri" panose="020F0502020204030204" pitchFamily="34" charset="0"/>
-              </a:rPr>
-              <a:t>2017</a:t>
-            </a:r>
-            <a:endParaRPr lang="en-GB" sz="1050" dirty="0">
-              <a:solidFill>
-                <a:schemeClr val="bg2">
-                  <a:lumMod val="10000"/>
-                </a:schemeClr>
-              </a:solidFill>
-              <a:latin typeface="Calibri" panose="020F0502020204030204" pitchFamily="34" charset="0"/>
-            </a:endParaRPr>
           </a:p>
         </p:txBody>
       </p:sp>
@@ -19900,9 +17715,6 @@
           </a:bodyPr>
           <a:lstStyle/>
           <a:p>
-            <a:pPr algn="ctr">
-              <a:defRPr/>
-            </a:pPr>
             <a:r>
               <a:rPr lang="en-US" sz="2800" b="1" dirty="0" smtClean="0">
                 <a:solidFill>
@@ -19910,24 +17722,7 @@
                 </a:solidFill>
                 <a:latin typeface="+mj-lt"/>
               </a:rPr>
-              <a:t> Menschen und verdrängte Arbeitnehmer dabei unterstützen, </a:t>
-            </a:r>
-            <a:br>
-              <a:rPr lang="en-US" sz="2800" b="1" dirty="0" smtClean="0">
-                <a:solidFill>
-                  <a:schemeClr val="tx2"/>
-                </a:solidFill>
-                <a:latin typeface="+mj-lt"/>
-              </a:rPr>
-            </a:br>
-            <a:r>
-              <a:rPr lang="en-US" sz="2800" b="1" dirty="0" smtClean="0">
-                <a:solidFill>
-                  <a:schemeClr val="tx2"/>
-                </a:solidFill>
-                <a:latin typeface="+mj-lt"/>
-              </a:rPr>
-              <a:t>sich anzupassen und neue Chancen zu nutzen</a:t>
+              <a:t> Menschen und freigesetzten Arbeitskräften helfen, sich anzupassen und neue Chancen zu ergreifen</a:t>
             </a:r>
           </a:p>
         </p:txBody>
@@ -19977,14 +17772,17 @@
           </a:bodyPr>
           <a:lstStyle/>
           <a:p>
-            <a:endParaRPr lang="en-US" sz="1200" dirty="0" smtClean="0">
-              <a:solidFill>
-                <a:schemeClr val="bg2">
-                  <a:lumMod val="10000"/>
-                </a:schemeClr>
-              </a:solidFill>
-              <a:latin typeface="Calibri" panose="020F0502020204030204" pitchFamily="34" charset="0"/>
-            </a:endParaRPr>
+            <a:r>
+              <a:rPr lang="en-GB" sz="1200" dirty="0" smtClean="0">
+                <a:solidFill>
+                  <a:schemeClr val="bg2">
+                    <a:lumMod val="10000"/>
+                  </a:schemeClr>
+                </a:solidFill>
+                <a:latin typeface="Calibri" panose="020F0502020204030204" pitchFamily="34" charset="0"/>
+              </a:rPr>
+              <a:t/>
+            </a:r>
           </a:p>
           <a:p>
             <a:r>
@@ -19996,49 +17794,8 @@
                 </a:solidFill>
                 <a:latin typeface="Calibri" panose="020F0502020204030204" pitchFamily="34" charset="0"/>
               </a:rPr>
-              <a:t>Quelle: </a:t>
+              <a:t>Quelle: OECD Going for Growth 2017.</a:t>
             </a:r>
-            <a:r>
-              <a:rPr lang="en-US" sz="1200" dirty="0" smtClean="0">
-                <a:solidFill>
-                  <a:schemeClr val="bg2">
-                    <a:lumMod val="10000"/>
-                  </a:schemeClr>
-                </a:solidFill>
-                <a:latin typeface="Calibri" panose="020F0502020204030204" pitchFamily="34" charset="0"/>
-              </a:rPr>
-              <a:t>OECD </a:t>
-            </a:r>
-            <a:r>
-              <a:rPr lang="en-US" sz="1200" i="1" dirty="0" smtClean="0">
-                <a:solidFill>
-                  <a:schemeClr val="bg2">
-                    <a:lumMod val="10000"/>
-                  </a:schemeClr>
-                </a:solidFill>
-                <a:latin typeface="Calibri" panose="020F0502020204030204" pitchFamily="34" charset="0"/>
-              </a:rPr>
-              <a:t>Going for Growth </a:t>
-            </a:r>
-            <a:r>
-              <a:rPr lang="en-US" sz="1200" dirty="0" smtClean="0">
-                <a:solidFill>
-                  <a:schemeClr val="bg2">
-                    <a:lumMod val="10000"/>
-                  </a:schemeClr>
-                </a:solidFill>
-                <a:latin typeface="Calibri" panose="020F0502020204030204" pitchFamily="34" charset="0"/>
-              </a:rPr>
-              <a:t>2017.</a:t>
-            </a:r>
-            <a:endParaRPr lang="en-GB" sz="1200" dirty="0">
-              <a:solidFill>
-                <a:schemeClr val="bg2">
-                  <a:lumMod val="10000"/>
-                </a:schemeClr>
-              </a:solidFill>
-              <a:latin typeface="Calibri" panose="020F0502020204030204" pitchFamily="34" charset="0"/>
-            </a:endParaRPr>
           </a:p>
         </p:txBody>
       </p:sp>
@@ -24108,9 +21865,6 @@
           </a:bodyPr>
           <a:lstStyle/>
           <a:p>
-            <a:pPr lvl="0" algn="ctr">
-              <a:defRPr/>
-            </a:pPr>
             <a:r>
               <a:rPr lang="en-US" sz="2800" b="1" dirty="0" smtClean="0">
                 <a:solidFill>
@@ -24118,31 +21872,8 @@
                 </a:solidFill>
                 <a:latin typeface="Arial"/>
               </a:rPr>
-              <a:t>Handeln, um inklusives Wachstum zu stärken und </a:t>
+              <a:t>Handeln, um inklusives Wachstum zu stärken und die Globalisierung für alle nutzbar zu machen</a:t>
             </a:r>
-            <a:br>
-              <a:rPr lang="en-US" sz="2800" b="1" dirty="0" smtClean="0">
-                <a:solidFill>
-                  <a:srgbClr val="006299"/>
-                </a:solidFill>
-                <a:latin typeface="Arial"/>
-              </a:rPr>
-            </a:br>
-            <a:r>
-              <a:rPr lang="en-US" sz="2800" b="1" dirty="0" smtClean="0">
-                <a:solidFill>
-                  <a:srgbClr val="006299"/>
-                </a:solidFill>
-                <a:latin typeface="Arial"/>
-              </a:rPr>
-              <a:t>die Globalisierung für alle zu gestalten</a:t>
-            </a:r>
-            <a:endParaRPr lang="en-US" sz="2800" b="1" dirty="0">
-              <a:solidFill>
-                <a:srgbClr val="006299"/>
-              </a:solidFill>
-              <a:latin typeface="Arial"/>
-            </a:endParaRPr>
           </a:p>
         </p:txBody>
       </p:sp>
@@ -24213,7 +21944,6 @@
           </a:bodyPr>
           <a:lstStyle/>
           <a:p>
-            <a:pPr lvl="0"/>
             <a:r>
               <a:rPr lang="en-US" sz="2000" b="1" dirty="0" smtClean="0">
                 <a:solidFill>
@@ -24223,7 +21953,7 @@
                 </a:solidFill>
                 <a:latin typeface="Calibri" pitchFamily="34" charset="0"/>
               </a:rPr>
-              <a:t>Internationale Maßnahmen</a:t>
+              <a:t>Internationale Politik</a:t>
             </a:r>
           </a:p>
         </p:txBody>
@@ -24250,7 +21980,6 @@
           </a:bodyPr>
           <a:lstStyle/>
           <a:p>
-            <a:pPr lvl="0"/>
             <a:r>
               <a:rPr lang="en-US" sz="2000" b="1" dirty="0" smtClean="0">
                 <a:solidFill>
@@ -24260,7 +21989,7 @@
                 </a:solidFill>
                 <a:latin typeface="Calibri" pitchFamily="34" charset="0"/>
               </a:rPr>
-              <a:t>Inländische Maßnahmen</a:t>
+              <a:t>Inländische Politik</a:t>
             </a:r>
           </a:p>
         </p:txBody>
@@ -24364,9 +22093,6 @@
           </a:bodyPr>
           <a:lstStyle/>
           <a:p>
-            <a:pPr algn="ctr">
-              <a:defRPr/>
-            </a:pPr>
             <a:r>
               <a:rPr lang="en-GB" sz="2800" b="1" dirty="0" smtClean="0">
                 <a:solidFill>
@@ -24378,9 +22104,6 @@
             </a:r>
           </a:p>
           <a:p>
-            <a:pPr algn="ctr">
-              <a:defRPr/>
-            </a:pPr>
             <a:r>
               <a:rPr lang="en-GB" sz="2800" b="1" dirty="0" smtClean="0">
                 <a:solidFill>
@@ -24388,14 +22111,8 @@
                 </a:solidFill>
                 <a:latin typeface="+mj-lt"/>
               </a:rPr>
-              <a:t>bleibt jedoch unter dem historischen Durchschnitt</a:t>
+              <a:t>bleibt aber unter den historischen Normwerten</a:t>
             </a:r>
-            <a:endParaRPr lang="en-GB" sz="2800" b="1" dirty="0">
-              <a:solidFill>
-                <a:schemeClr val="tx2"/>
-              </a:solidFill>
-              <a:latin typeface="+mj-lt"/>
-            </a:endParaRPr>
           </a:p>
         </p:txBody>
       </p:sp>
@@ -24453,102 +22170,8 @@
                 </a:solidFill>
                 <a:latin typeface="Calibri" panose="020F0502020204030204" pitchFamily="34" charset="0"/>
               </a:rPr>
-              <a:t/>
+              <a:t>Quelle: OECD Economic Outlook-Datenbank, Juni 2017.</a:t>
             </a:r>
-            <a:br>
-              <a:rPr lang="en-US" sz="1200" dirty="0" smtClean="0">
-                <a:solidFill>
-                  <a:schemeClr val="bg2">
-                    <a:lumMod val="10000"/>
-                  </a:schemeClr>
-                </a:solidFill>
-                <a:latin typeface="Calibri" panose="020F0502020204030204" pitchFamily="34" charset="0"/>
-              </a:rPr>
-            </a:br>
-            <a:r>
-              <a:rPr lang="en-US" sz="1200" dirty="0" smtClean="0">
-                <a:solidFill>
-                  <a:schemeClr val="bg2">
-                    <a:lumMod val="10000"/>
-                  </a:schemeClr>
-                </a:solidFill>
-                <a:latin typeface="Calibri" panose="020F0502020204030204" pitchFamily="34" charset="0"/>
-              </a:rPr>
-              <a:t/>
-            </a:r>
-            <a:br>
-              <a:rPr lang="en-US" sz="1200" dirty="0" smtClean="0">
-                <a:solidFill>
-                  <a:schemeClr val="bg2">
-                    <a:lumMod val="10000"/>
-                  </a:schemeClr>
-                </a:solidFill>
-                <a:latin typeface="Calibri" panose="020F0502020204030204" pitchFamily="34" charset="0"/>
-              </a:rPr>
-            </a:br>
-            <a:r>
-              <a:rPr lang="en-US" sz="1200" dirty="0" smtClean="0">
-                <a:solidFill>
-                  <a:schemeClr val="bg2">
-                    <a:lumMod val="10000"/>
-                  </a:schemeClr>
-                </a:solidFill>
-                <a:latin typeface="Calibri" panose="020F0502020204030204" pitchFamily="34" charset="0"/>
-              </a:rPr>
-              <a:t>Quelle</a:t>
-            </a:r>
-            <a:r>
-              <a:rPr lang="en-US" sz="1200" dirty="0">
-                <a:solidFill>
-                  <a:schemeClr val="bg2">
-                    <a:lumMod val="10000"/>
-                  </a:schemeClr>
-                </a:solidFill>
-                <a:latin typeface="Calibri" panose="020F0502020204030204" pitchFamily="34" charset="0"/>
-              </a:rPr>
-              <a:t>: OECD </a:t>
-            </a:r>
-            <a:r>
-              <a:rPr lang="en-US" sz="1200" dirty="0" smtClean="0">
-                <a:solidFill>
-                  <a:schemeClr val="bg2">
-                    <a:lumMod val="10000"/>
-                  </a:schemeClr>
-                </a:solidFill>
-                <a:latin typeface="Calibri" panose="020F0502020204030204" pitchFamily="34" charset="0"/>
-              </a:rPr>
-              <a:t>Juni </a:t>
-            </a:r>
-            <a:r>
-              <a:rPr lang="en-US" sz="1200" dirty="0">
-                <a:solidFill>
-                  <a:schemeClr val="bg2">
-                    <a:lumMod val="10000"/>
-                  </a:schemeClr>
-                </a:solidFill>
-                <a:latin typeface="Calibri" panose="020F0502020204030204" pitchFamily="34" charset="0"/>
-              </a:rPr>
-              <a:t>2017 </a:t>
-            </a:r>
-            <a:r>
-              <a:rPr lang="en-US" sz="1200" dirty="0" smtClean="0">
-                <a:solidFill>
-                  <a:schemeClr val="bg2">
-                    <a:lumMod val="10000"/>
-                  </a:schemeClr>
-                </a:solidFill>
-                <a:latin typeface="Calibri" panose="020F0502020204030204" pitchFamily="34" charset="0"/>
-              </a:rPr>
-              <a:t>Wirtschaftsausblick-Datenbank.</a:t>
-            </a:r>
-            <a:endParaRPr lang="en-GB" sz="1200" dirty="0">
-              <a:solidFill>
-                <a:schemeClr val="bg2">
-                  <a:lumMod val="10000"/>
-                </a:schemeClr>
-              </a:solidFill>
-              <a:latin typeface="Calibri" panose="020F0502020204030204" pitchFamily="34" charset="0"/>
-            </a:endParaRPr>
           </a:p>
         </p:txBody>
       </p:sp>
@@ -24574,7 +22197,6 @@
           </a:bodyPr>
           <a:lstStyle/>
           <a:p>
-            <a:pPr algn="ctr"/>
             <a:r>
               <a:rPr lang="en-US" sz="2000" b="1" dirty="0" smtClean="0">
                 <a:solidFill>
@@ -24688,9 +22310,6 @@
           </a:bodyPr>
           <a:lstStyle/>
           <a:p>
-            <a:pPr algn="ctr">
-              <a:defRPr/>
-            </a:pPr>
             <a:r>
               <a:rPr lang="en-GB" sz="2800" b="1" dirty="0" smtClean="0">
                 <a:solidFill>
@@ -24698,13 +22317,10 @@
                 </a:solidFill>
                 <a:latin typeface="+mj-lt"/>
               </a:rPr>
-              <a:t>Das BIP-Wachstum je Einwohner liegt unter dem historischen Niveau </a:t>
+              <a:t>Das BIP-Wachstum pro Kopf liegt unter dem historischen Schnitt, </a:t>
             </a:r>
           </a:p>
           <a:p>
-            <a:pPr algn="ctr">
-              <a:defRPr/>
-            </a:pPr>
             <a:r>
               <a:rPr lang="en-GB" sz="2800" b="1" dirty="0" smtClean="0">
                 <a:solidFill>
@@ -24714,12 +22330,6 @@
               </a:rPr>
               <a:t>und die Einkommensungleichheit steigt weiter</a:t>
             </a:r>
-            <a:endParaRPr lang="en-GB" sz="2800" b="1" dirty="0">
-              <a:solidFill>
-                <a:schemeClr val="tx2"/>
-              </a:solidFill>
-              <a:latin typeface="+mj-lt"/>
-            </a:endParaRPr>
           </a:p>
         </p:txBody>
       </p:sp>
@@ -24768,7 +22378,6 @@
           </a:bodyPr>
           <a:lstStyle/>
           <a:p>
-            <a:pPr algn="ctr"/>
             <a:r>
               <a:rPr lang="en-US" sz="2000" b="1" dirty="0" smtClean="0">
                 <a:solidFill>
@@ -24778,41 +22387,21 @@
                 </a:solidFill>
                 <a:latin typeface="Calibri" pitchFamily="34" charset="0"/>
               </a:rPr>
-              <a:t>BIP-Wachstum je Einwohner</a:t>
+              <a:t>BIP-Wachstum pro Kopf</a:t>
             </a:r>
           </a:p>
           <a:p>
-            <a:pPr lvl="0" algn="ctr"/>
             <a:r>
-              <a:rPr lang="en-US" sz="1200" i="1" dirty="0">
+              <a:rPr lang="en-US" sz="2000" b="1" dirty="0" smtClean="0">
                 <a:solidFill>
-                  <a:srgbClr val="E6E6E6">
+                  <a:schemeClr val="bg2">
                     <a:lumMod val="10000"/>
-                  </a:srgbClr>
+                  </a:schemeClr>
                 </a:solidFill>
                 <a:latin typeface="Calibri" pitchFamily="34" charset="0"/>
               </a:rPr>
-              <a:t>Horizontale Linien sind Durchschnittswerte für </a:t>
+              <a:t>Horizontale Linien sind Durchschnittswerte für 1987-2007</a:t>
             </a:r>
-            <a:r>
-              <a:rPr lang="en-US" sz="1200" i="1" dirty="0" smtClean="0">
-                <a:solidFill>
-                  <a:srgbClr val="E6E6E6">
-                    <a:lumMod val="10000"/>
-                  </a:srgbClr>
-                </a:solidFill>
-                <a:latin typeface="Calibri" pitchFamily="34" charset="0"/>
-              </a:rPr>
-              <a:t>1987-2007</a:t>
-            </a:r>
-            <a:endParaRPr lang="en-US" sz="1200" i="1" dirty="0">
-              <a:solidFill>
-                <a:srgbClr val="E6E6E6">
-                  <a:lumMod val="10000"/>
-                </a:srgbClr>
-              </a:solidFill>
-              <a:latin typeface="Calibri" pitchFamily="34" charset="0"/>
-            </a:endParaRPr>
           </a:p>
         </p:txBody>
       </p:sp>
@@ -24838,7 +22427,6 @@
           </a:bodyPr>
           <a:lstStyle/>
           <a:p>
-            <a:pPr lvl="0" algn="ctr"/>
             <a:r>
               <a:rPr lang="en-US" sz="2000" b="1" dirty="0" smtClean="0">
                 <a:solidFill>
@@ -24848,70 +22436,8 @@
                 </a:solidFill>
                 <a:latin typeface="Calibri" pitchFamily="34" charset="0"/>
               </a:rPr>
-              <a:t>Einkommensungleichheit nimmt in der OECD zu</a:t>
+              <a:t>Die Einkommensungleichheit steigt in der OECD Real verfügbares Haushaltseinkommen, Gesamtbevölkerung</a:t>
             </a:r>
-            <a:r>
-              <a:rPr lang="en-US" b="1" dirty="0" smtClean="0">
-                <a:solidFill>
-                  <a:schemeClr val="bg2">
-                    <a:lumMod val="10000"/>
-                  </a:schemeClr>
-                </a:solidFill>
-                <a:latin typeface="Calibri" pitchFamily="34" charset="0"/>
-              </a:rPr>
-              <a:t> </a:t>
-            </a:r>
-            <a:br>
-              <a:rPr lang="en-US" b="1" dirty="0" smtClean="0">
-                <a:solidFill>
-                  <a:schemeClr val="bg2">
-                    <a:lumMod val="10000"/>
-                  </a:schemeClr>
-                </a:solidFill>
-                <a:latin typeface="Calibri" pitchFamily="34" charset="0"/>
-              </a:rPr>
-            </a:br>
-            <a:r>
-              <a:rPr lang="en-US" sz="1200" i="1" dirty="0" smtClean="0">
-                <a:solidFill>
-                  <a:schemeClr val="bg2">
-                    <a:lumMod val="10000"/>
-                  </a:schemeClr>
-                </a:solidFill>
-                <a:latin typeface="Calibri" pitchFamily="34" charset="0"/>
-              </a:rPr>
-              <a:t>Reales verfügbares </a:t>
-            </a:r>
-            <a:r>
-              <a:rPr lang="en-US" sz="1200" i="1" dirty="0">
-                <a:solidFill>
-                  <a:schemeClr val="bg2">
-                    <a:lumMod val="10000"/>
-                  </a:schemeClr>
-                </a:solidFill>
-                <a:latin typeface="Calibri" pitchFamily="34" charset="0"/>
-              </a:rPr>
-              <a:t>Haushalts</a:t>
-            </a:r>
-            <a:r>
-              <a:rPr lang="en-US" sz="1200" i="1" dirty="0" smtClean="0">
-                <a:solidFill>
-                  <a:schemeClr val="bg2">
-                    <a:lumMod val="10000"/>
-                  </a:schemeClr>
-                </a:solidFill>
-                <a:latin typeface="Calibri" pitchFamily="34" charset="0"/>
-              </a:rPr>
-              <a:t>einkommen, Gesamtbevölkerung</a:t>
-            </a:r>
-            <a:endParaRPr lang="en-US" sz="1200" i="1" dirty="0">
-              <a:solidFill>
-                <a:schemeClr val="bg2">
-                  <a:lumMod val="10000"/>
-                </a:schemeClr>
-              </a:solidFill>
-              <a:latin typeface="Calibri" pitchFamily="34" charset="0"/>
-            </a:endParaRPr>
           </a:p>
         </p:txBody>
       </p:sp>
@@ -24987,40 +22513,7 @@
                 </a:solidFill>
                 <a:latin typeface="Calibri" panose="020F0502020204030204" pitchFamily="34" charset="0"/>
               </a:rPr>
-              <a:t>Anmerkung: </a:t>
-            </a:r>
-            <a:r>
-              <a:rPr lang="en-US" sz="1200" dirty="0" smtClean="0">
-                <a:solidFill>
-                  <a:schemeClr val="bg2">
-                    <a:lumMod val="10000"/>
-                  </a:schemeClr>
-                </a:solidFill>
-                <a:latin typeface="Calibri" panose="020F0502020204030204" pitchFamily="34" charset="0"/>
-              </a:rPr>
-              <a:t>Die rechte Achse ist der </a:t>
-            </a:r>
-            <a:r>
-              <a:rPr lang="en-US" sz="1200" dirty="0">
-                <a:solidFill>
-                  <a:schemeClr val="bg2">
-                    <a:lumMod val="10000"/>
-                  </a:schemeClr>
-                </a:solidFill>
-                <a:latin typeface="Calibri" panose="020F0502020204030204" pitchFamily="34" charset="0"/>
-              </a:rPr>
-              <a:t>ungewichtete Durchschnitt von </a:t>
-            </a:r>
-            <a:r>
-              <a:rPr lang="en-US" sz="1200" dirty="0" smtClean="0">
-                <a:solidFill>
-                  <a:schemeClr val="bg2">
-                    <a:lumMod val="10000"/>
-                  </a:schemeClr>
-                </a:solidFill>
-                <a:latin typeface="Calibri" panose="020F0502020204030204" pitchFamily="34" charset="0"/>
-              </a:rPr>
-              <a:t>17 OECD-Ländern.</a:t>
+              <a:t>Anmerkung: Die rechte Achse ist der ungewichtete Durchschnitt von 17 OECD-Ländern.</a:t>
             </a:r>
           </a:p>
           <a:p>
@@ -25033,51 +22526,7 @@
                 </a:solidFill>
                 <a:latin typeface="Calibri" panose="020F0502020204030204" pitchFamily="34" charset="0"/>
               </a:rPr>
-              <a:t>Quelle: OECD Wirtschaftsausblick Juni 2017 </a:t>
-            </a:r>
-            <a:r>
-              <a:rPr lang="en-US" sz="1200" dirty="0" smtClean="0">
-                <a:solidFill>
-                  <a:schemeClr val="bg2">
-                    <a:lumMod val="10000"/>
-                  </a:schemeClr>
-                </a:solidFill>
-                <a:latin typeface="Calibri" panose="020F0502020204030204" pitchFamily="34" charset="0"/>
-              </a:rPr>
-              <a:t>Datenbank; </a:t>
-            </a:r>
-            <a:r>
-              <a:rPr lang="en-US" sz="1200" dirty="0">
-                <a:solidFill>
-                  <a:schemeClr val="bg2">
-                    <a:lumMod val="10000"/>
-                  </a:schemeClr>
-                </a:solidFill>
-                <a:latin typeface="Calibri" panose="020F0502020204030204" pitchFamily="34" charset="0"/>
-              </a:rPr>
-              <a:t>und </a:t>
-            </a:r>
-            <a:r>
-              <a:rPr lang="en-US" sz="1200" dirty="0" smtClean="0">
-                <a:solidFill>
-                  <a:schemeClr val="bg2">
-                    <a:lumMod val="10000"/>
-                  </a:schemeClr>
-                </a:solidFill>
-                <a:latin typeface="Calibri" panose="020F0502020204030204" pitchFamily="34" charset="0"/>
-              </a:rPr>
-              <a:t>OECD </a:t>
-            </a:r>
-            <a:r>
-              <a:rPr lang="en-US" sz="1200" dirty="0">
-                <a:solidFill>
-                  <a:schemeClr val="bg2">
-                    <a:lumMod val="10000"/>
-                  </a:schemeClr>
-                </a:solidFill>
-                <a:latin typeface="Calibri" panose="020F0502020204030204" pitchFamily="34" charset="0"/>
-              </a:rPr>
-              <a:t>Einkommensverteilungsdatenbank.</a:t>
+              <a:t>Quelle: OECD Economic Outlook-Datenbank, Juni 2017; und OECD Income Distribution-Datenbank.</a:t>
             </a:r>
           </a:p>
         </p:txBody>
@@ -25140,9 +22589,6 @@
           </a:bodyPr>
           <a:lstStyle/>
           <a:p>
-            <a:pPr algn="ctr">
-              <a:defRPr/>
-            </a:pPr>
             <a:r>
               <a:rPr lang="en-GB" sz="2800" b="1" dirty="0" smtClean="0">
                 <a:solidFill>
@@ -25150,14 +22596,8 @@
                 </a:solidFill>
                 <a:latin typeface="+mj-lt"/>
               </a:rPr>
-              <a:t>Projektionen des OECD-Wirtschaftsausblicks</a:t>
+              <a:t>Projektionen des OECD Economic Outlook</a:t>
             </a:r>
-            <a:endParaRPr lang="en-GB" sz="2800" b="1" dirty="0">
-              <a:solidFill>
-                <a:schemeClr val="tx2"/>
-              </a:solidFill>
-              <a:latin typeface="+mj-lt"/>
-            </a:endParaRPr>
           </a:p>
         </p:txBody>
       </p:sp>
@@ -25206,7 +22646,6 @@
           </a:bodyPr>
           <a:lstStyle/>
           <a:p>
-            <a:pPr algn="ctr"/>
             <a:r>
               <a:rPr lang="en-GB" sz="2000" b="1" dirty="0" smtClean="0">
                 <a:solidFill>
@@ -25220,9 +22659,8 @@
             </a:r>
           </a:p>
           <a:p>
-            <a:pPr algn="ctr"/>
             <a:r>
-              <a:rPr lang="en-GB" sz="1200" i="1" dirty="0" smtClean="0">
+              <a:rPr lang="en-GB" sz="2000" b="1" dirty="0" smtClean="0">
                 <a:solidFill>
                   <a:schemeClr val="bg2">
                     <a:lumMod val="10000"/>
@@ -25230,7 +22668,7 @@
                 </a:solidFill>
                 <a:latin typeface="Calibri" pitchFamily="34" charset="0"/>
               </a:rPr>
-              <a:t>Veränderung gegenüber dem Vorjahr, %</a:t>
+              <a:t>Jahr für Jahr, %</a:t>
             </a:r>
           </a:p>
         </p:txBody>
@@ -25266,81 +22704,7 @@
                 </a:solidFill>
                 <a:latin typeface="Calibri" panose="020F0502020204030204" pitchFamily="34" charset="0"/>
               </a:rPr>
-              <a:t/>
-            </a:r>
-            <a:br>
-              <a:rPr lang="en-US" sz="1200" dirty="0" smtClean="0">
-                <a:solidFill>
-                  <a:schemeClr val="bg2">
-                    <a:lumMod val="10000"/>
-                  </a:schemeClr>
-                </a:solidFill>
-                <a:latin typeface="Calibri" panose="020F0502020204030204" pitchFamily="34" charset="0"/>
-              </a:rPr>
-            </a:br>
-            <a:r>
-              <a:rPr lang="en-US" sz="1200" dirty="0" smtClean="0">
-                <a:solidFill>
-                  <a:schemeClr val="bg2">
-                    <a:lumMod val="10000"/>
-                  </a:schemeClr>
-                </a:solidFill>
-                <a:latin typeface="Calibri" panose="020F0502020204030204" pitchFamily="34" charset="0"/>
-              </a:rPr>
-              <a:t>Anmerkung: Differenz </a:t>
-            </a:r>
-            <a:r>
-              <a:rPr lang="en-US" sz="1200" dirty="0">
-                <a:solidFill>
-                  <a:schemeClr val="bg2">
-                    <a:lumMod val="10000"/>
-                  </a:schemeClr>
-                </a:solidFill>
-                <a:latin typeface="Calibri" panose="020F0502020204030204" pitchFamily="34" charset="0"/>
-              </a:rPr>
-              <a:t>in Prozentpunkten basierend auf gerundeten Werten. </a:t>
-            </a:r>
-            <a:endParaRPr lang="en-US" sz="1200" dirty="0" smtClean="0">
-              <a:solidFill>
-                <a:schemeClr val="bg2">
-                  <a:lumMod val="10000"/>
-                </a:schemeClr>
-              </a:solidFill>
-              <a:latin typeface="Calibri" panose="020F0502020204030204" pitchFamily="34" charset="0"/>
-            </a:endParaRPr>
-          </a:p>
-          <a:p>
-            <a:r>
-              <a:rPr lang="en-US" sz="1200" dirty="0" smtClean="0">
-                <a:solidFill>
-                  <a:schemeClr val="bg2">
-                    <a:lumMod val="10000"/>
-                  </a:schemeClr>
-                </a:solidFill>
-                <a:latin typeface="Calibri" panose="020F0502020204030204" pitchFamily="34" charset="0"/>
-              </a:rPr>
-              <a:t>1. Wobei das Wachstum in Irland 2015 anhand der realen Bruttowertsschöpfung berechnet wurde, exklusive</a:t>
-            </a:r>
-            <a:br>
-              <a:rPr lang="en-US" sz="1200" dirty="0" smtClean="0">
-                <a:solidFill>
-                  <a:schemeClr val="bg2">
-                    <a:lumMod val="10000"/>
-                  </a:schemeClr>
-                </a:solidFill>
-                <a:latin typeface="Calibri" panose="020F0502020204030204" pitchFamily="34" charset="0"/>
-              </a:rPr>
-            </a:br>
-            <a:r>
-              <a:rPr lang="en-US" sz="1200" dirty="0" smtClean="0">
-                <a:solidFill>
-                  <a:schemeClr val="bg2">
-                    <a:lumMod val="10000"/>
-                  </a:schemeClr>
-                </a:solidFill>
-                <a:latin typeface="Calibri" panose="020F0502020204030204" pitchFamily="34" charset="0"/>
-              </a:rPr>
-              <a:t>der von ausländischen multinationalen Unternehmen dominierten Sektoren.</a:t>
+              <a:t>Anmerkung: Differenz in Prozentpunkten auf Basis gerundeter Werte. </a:t>
             </a:r>
           </a:p>
           <a:p>
@@ -25353,19 +22717,10 @@
                 </a:solidFill>
                 <a:latin typeface="Calibri" panose="020F0502020204030204" pitchFamily="34" charset="0"/>
               </a:rPr>
-              <a:t>2. Fiskaljahr </a:t>
+              <a:t>1. Das Wachstum Irlands 2015 wird anhand der Bruttowertschöpfung zu konstanten Preisen ohne die von ausländischen multinationalen Unternehmen dominierten Sektoren berechnet.</a:t>
             </a:r>
-            <a:r>
-              <a:rPr lang="en-US" sz="1200" dirty="0">
-                <a:solidFill>
-                  <a:schemeClr val="bg2">
-                    <a:lumMod val="10000"/>
-                  </a:schemeClr>
-                </a:solidFill>
-                <a:latin typeface="Calibri" panose="020F0502020204030204" pitchFamily="34" charset="0"/>
-              </a:rPr>
-              <a:t>beginnt im April</a:t>
-            </a:r>
+          </a:p>
+          <a:p>
             <a:r>
               <a:rPr lang="en-US" sz="1200" dirty="0" smtClean="0">
                 <a:solidFill>
@@ -25375,7 +22730,7 @@
                 </a:solidFill>
                 <a:latin typeface="Calibri" panose="020F0502020204030204" pitchFamily="34" charset="0"/>
               </a:rPr>
-              <a:t>.</a:t>
+              <a:t>2. Geschäftsjahre, die im April beginnen.</a:t>
             </a:r>
           </a:p>
         </p:txBody>
@@ -25553,9 +22908,6 @@
           </a:bodyPr>
           <a:lstStyle/>
           <a:p>
-            <a:pPr algn="ctr">
-              <a:defRPr/>
-            </a:pPr>
             <a:r>
               <a:rPr lang="en-US" sz="2800" b="1" dirty="0" smtClean="0">
                 <a:solidFill>
@@ -25563,24 +22915,7 @@
                 </a:solidFill>
                 <a:latin typeface="+mj-lt"/>
               </a:rPr>
-              <a:t>Konjunkturindikatoren deuten auf Erholung hin,</a:t>
-            </a:r>
-            <a:br>
-              <a:rPr lang="en-US" sz="2800" b="1" dirty="0" smtClean="0">
-                <a:solidFill>
-                  <a:schemeClr val="tx2"/>
-                </a:solidFill>
-                <a:latin typeface="+mj-lt"/>
-              </a:rPr>
-            </a:br>
-            <a:r>
-              <a:rPr lang="en-US" sz="2800" b="1" dirty="0" smtClean="0">
-                <a:solidFill>
-                  <a:schemeClr val="tx2"/>
-                </a:solidFill>
-                <a:latin typeface="+mj-lt"/>
-              </a:rPr>
-              <a:t>aber sie sind weniger zuverlässig geworden</a:t>
+              <a:t>Vertrauensindikatoren deuten auf eine Belebung hin, sind aber weniger verlässlich geworden</a:t>
             </a:r>
           </a:p>
         </p:txBody>
@@ -25630,7 +22965,6 @@
           </a:bodyPr>
           <a:lstStyle/>
           <a:p>
-            <a:pPr algn="ctr"/>
             <a:r>
               <a:rPr lang="en-GB" sz="2000" b="1" dirty="0" smtClean="0">
                 <a:solidFill>
@@ -25640,48 +22974,8 @@
                 </a:solidFill>
                 <a:latin typeface="Calibri" pitchFamily="34" charset="0"/>
               </a:rPr>
-              <a:t>Verbraucher- und Unternehmensvertrauen</a:t>
+              <a:t>Verbraucher- und Unternehmensvertrauen OECD und BRIICS, Index</a:t>
             </a:r>
-            <a:br>
-              <a:rPr lang="en-GB" sz="2000" b="1" dirty="0" smtClean="0">
-                <a:solidFill>
-                  <a:schemeClr val="bg2">
-                    <a:lumMod val="10000"/>
-                  </a:schemeClr>
-                </a:solidFill>
-                <a:latin typeface="Calibri" pitchFamily="34" charset="0"/>
-              </a:rPr>
-            </a:br>
-            <a:r>
-              <a:rPr lang="en-GB" sz="1200" i="1" dirty="0">
-                <a:solidFill>
-                  <a:srgbClr val="E6E6E6">
-                    <a:lumMod val="10000"/>
-                  </a:srgbClr>
-                </a:solidFill>
-                <a:latin typeface="Calibri" pitchFamily="34" charset="0"/>
-              </a:rPr>
-              <a:t>OECD und </a:t>
-            </a:r>
-            <a:r>
-              <a:rPr lang="en-GB" sz="1200" i="1" dirty="0" smtClean="0">
-                <a:solidFill>
-                  <a:srgbClr val="E6E6E6">
-                    <a:lumMod val="10000"/>
-                  </a:srgbClr>
-                </a:solidFill>
-                <a:latin typeface="Calibri" pitchFamily="34" charset="0"/>
-              </a:rPr>
-              <a:t>BRIICS, Index</a:t>
-            </a:r>
-            <a:endParaRPr lang="en-GB" sz="2000" baseline="30000" dirty="0">
-              <a:solidFill>
-                <a:schemeClr val="bg2">
-                  <a:lumMod val="10000"/>
-                </a:schemeClr>
-              </a:solidFill>
-              <a:latin typeface="Calibri" pitchFamily="34" charset="0"/>
-            </a:endParaRPr>
           </a:p>
         </p:txBody>
       </p:sp>
@@ -25716,40 +23010,10 @@
                 </a:solidFill>
                 <a:latin typeface="Calibri" panose="020F0502020204030204" pitchFamily="34" charset="0"/>
               </a:rPr>
-              <a:t>Anmerkung: Vertrauensindizes sind BIP-KKP-gewichtete Durchschnitte der </a:t>
+              <a:t>Anmerkung: Die Vertrauensindizes sind nach BIP-KKP gewichtete Durchschnitte standardisierter Länderreihen, deren langfristiger Durchschnitt = 100 ist. Das Verbrauchervertrauen korreliert mit dem globalen Einzelhandelsumsatzwachstum und das Unternehmensvertrauen mit dem globalen Wachstum der Industrieproduktion.</a:t>
             </a:r>
-            <a:r>
-              <a:rPr lang="en-US" sz="1200" dirty="0" smtClean="0">
-                <a:solidFill>
-                  <a:schemeClr val="bg2">
-                    <a:lumMod val="10000"/>
-                  </a:schemeClr>
-                </a:solidFill>
-                <a:latin typeface="Calibri" panose="020F0502020204030204" pitchFamily="34" charset="0"/>
-              </a:rPr>
-              <a:t>standardisierten Länderreihen, bei denen der langfristige Durchschnitt = 100. </a:t>
-            </a:r>
-            <a:br>
-              <a:rPr lang="en-US" sz="1200" dirty="0" smtClean="0">
-                <a:solidFill>
-                  <a:schemeClr val="bg2">
-                    <a:lumMod val="10000"/>
-                  </a:schemeClr>
-                </a:solidFill>
-                <a:latin typeface="Calibri" panose="020F0502020204030204" pitchFamily="34" charset="0"/>
-              </a:rPr>
-            </a:br>
-            <a:r>
-              <a:rPr lang="en-US" sz="1200" dirty="0" smtClean="0">
-                <a:solidFill>
-                  <a:schemeClr val="bg2">
-                    <a:lumMod val="10000"/>
-                  </a:schemeClr>
-                </a:solidFill>
-                <a:latin typeface="Calibri" panose="020F0502020204030204" pitchFamily="34" charset="0"/>
-              </a:rPr>
-              <a:t>Verbraucher</a:t>
-            </a:r>
+          </a:p>
+          <a:p>
             <a:r>
               <a:rPr lang="en-US" sz="1200" dirty="0">
                 <a:solidFill>
@@ -25759,161 +23023,8 @@
                 </a:solidFill>
                 <a:latin typeface="Calibri" panose="020F0502020204030204" pitchFamily="34" charset="0"/>
               </a:rPr>
-              <a:t>vertrauen </a:t>
+              <a:t>Quelle: OECD Main Economic Indicators-Datenbank; und OECD-Berechnungen.</a:t>
             </a:r>
-            <a:r>
-              <a:rPr lang="en-US" sz="1200" dirty="0" smtClean="0">
-                <a:solidFill>
-                  <a:schemeClr val="bg2">
-                    <a:lumMod val="10000"/>
-                  </a:schemeClr>
-                </a:solidFill>
-                <a:latin typeface="Calibri" panose="020F0502020204030204" pitchFamily="34" charset="0"/>
-              </a:rPr>
-              <a:t>Korrelation </a:t>
-            </a:r>
-            <a:r>
-              <a:rPr lang="en-US" sz="1200" dirty="0">
-                <a:solidFill>
-                  <a:schemeClr val="bg2">
-                    <a:lumMod val="10000"/>
-                  </a:schemeClr>
-                </a:solidFill>
-                <a:latin typeface="Calibri" panose="020F0502020204030204" pitchFamily="34" charset="0"/>
-              </a:rPr>
-              <a:t>mit globalem Einzelhandelsumsatz</a:t>
-            </a:r>
-            <a:r>
-              <a:rPr lang="en-US" sz="1200" dirty="0" smtClean="0">
-                <a:solidFill>
-                  <a:schemeClr val="bg2">
-                    <a:lumMod val="10000"/>
-                  </a:schemeClr>
-                </a:solidFill>
-                <a:latin typeface="Calibri" panose="020F0502020204030204" pitchFamily="34" charset="0"/>
-              </a:rPr>
-              <a:t>wachstum und </a:t>
-            </a:r>
-            <a:r>
-              <a:rPr lang="en-US" sz="1200" dirty="0">
-                <a:solidFill>
-                  <a:schemeClr val="bg2">
-                    <a:lumMod val="10000"/>
-                  </a:schemeClr>
-                </a:solidFill>
-                <a:latin typeface="Calibri" panose="020F0502020204030204" pitchFamily="34" charset="0"/>
-              </a:rPr>
-              <a:t>U</a:t>
-            </a:r>
-            <a:r>
-              <a:rPr lang="en-US" sz="1200" dirty="0" smtClean="0">
-                <a:solidFill>
-                  <a:schemeClr val="bg2">
-                    <a:lumMod val="10000"/>
-                  </a:schemeClr>
-                </a:solidFill>
-                <a:latin typeface="Calibri" panose="020F0502020204030204" pitchFamily="34" charset="0"/>
-              </a:rPr>
-              <a:t>nternehmens</a:t>
-            </a:r>
-            <a:r>
-              <a:rPr lang="en-US" sz="1200" dirty="0">
-                <a:solidFill>
-                  <a:schemeClr val="bg2">
-                    <a:lumMod val="10000"/>
-                  </a:schemeClr>
-                </a:solidFill>
-                <a:latin typeface="Calibri" panose="020F0502020204030204" pitchFamily="34" charset="0"/>
-              </a:rPr>
-              <a:t>vertrauen </a:t>
-            </a:r>
-            <a:r>
-              <a:rPr lang="en-US" sz="1200" dirty="0" smtClean="0">
-                <a:solidFill>
-                  <a:schemeClr val="bg2">
-                    <a:lumMod val="10000"/>
-                  </a:schemeClr>
-                </a:solidFill>
-                <a:latin typeface="Calibri" panose="020F0502020204030204" pitchFamily="34" charset="0"/>
-              </a:rPr>
-              <a:t>mit globalem </a:t>
-            </a:r>
-            <a:r>
-              <a:rPr lang="en-US" sz="1200" dirty="0">
-                <a:solidFill>
-                  <a:schemeClr val="bg2">
-                    <a:lumMod val="10000"/>
-                  </a:schemeClr>
-                </a:solidFill>
-                <a:latin typeface="Calibri" panose="020F0502020204030204" pitchFamily="34" charset="0"/>
-              </a:rPr>
-              <a:t>Industrieproduktions</a:t>
-            </a:r>
-            <a:r>
-              <a:rPr lang="en-US" sz="1200" dirty="0" smtClean="0">
-                <a:solidFill>
-                  <a:schemeClr val="bg2">
-                    <a:lumMod val="10000"/>
-                  </a:schemeClr>
-                </a:solidFill>
-                <a:latin typeface="Calibri" panose="020F0502020204030204" pitchFamily="34" charset="0"/>
-              </a:rPr>
-              <a:t>wachstum.</a:t>
-            </a:r>
-          </a:p>
-          <a:p>
-            <a:r>
-              <a:rPr lang="en-US" sz="1200" dirty="0" smtClean="0">
-                <a:solidFill>
-                  <a:schemeClr val="bg2">
-                    <a:lumMod val="10000"/>
-                  </a:schemeClr>
-                </a:solidFill>
-                <a:latin typeface="Calibri" panose="020F0502020204030204" pitchFamily="34" charset="0"/>
-              </a:rPr>
-              <a:t>Quelle: OECD </a:t>
-            </a:r>
-            <a:r>
-              <a:rPr lang="en-US" sz="1200" dirty="0">
-                <a:solidFill>
-                  <a:schemeClr val="bg2">
-                    <a:lumMod val="10000"/>
-                  </a:schemeClr>
-                </a:solidFill>
-                <a:latin typeface="Calibri" panose="020F0502020204030204" pitchFamily="34" charset="0"/>
-              </a:rPr>
-              <a:t>Hauptwirtschaftsindikatoren-Datenbank; </a:t>
-            </a:r>
-            <a:r>
-              <a:rPr lang="en-US" sz="1200" dirty="0" smtClean="0">
-                <a:solidFill>
-                  <a:schemeClr val="bg2">
-                    <a:lumMod val="10000"/>
-                  </a:schemeClr>
-                </a:solidFill>
-                <a:latin typeface="Calibri" panose="020F0502020204030204" pitchFamily="34" charset="0"/>
-              </a:rPr>
-              <a:t>und </a:t>
-            </a:r>
-            <a:r>
-              <a:rPr lang="en-US" sz="1200" dirty="0">
-                <a:solidFill>
-                  <a:schemeClr val="bg2">
-                    <a:lumMod val="10000"/>
-                  </a:schemeClr>
-                </a:solidFill>
-                <a:latin typeface="Calibri" panose="020F0502020204030204" pitchFamily="34" charset="0"/>
-              </a:rPr>
-              <a:t>OECD-Berechnungen.</a:t>
-            </a:r>
-            <a:endParaRPr lang="en-US" sz="1200" dirty="0" smtClean="0">
-              <a:solidFill>
-                <a:schemeClr val="bg2">
-                  <a:lumMod val="10000"/>
-                </a:schemeClr>
-              </a:solidFill>
-              <a:latin typeface="Calibri" panose="020F0502020204030204" pitchFamily="34" charset="0"/>
-            </a:endParaRPr>
           </a:p>
         </p:txBody>
       </p:sp>
@@ -25939,7 +23050,6 @@
           </a:bodyPr>
           <a:lstStyle/>
           <a:p>
-            <a:pPr algn="ctr"/>
             <a:r>
               <a:rPr lang="en-GB" sz="2000" b="1" dirty="0" smtClean="0">
                 <a:solidFill>
@@ -25949,41 +23059,21 @@
                 </a:solidFill>
                 <a:latin typeface="Calibri" pitchFamily="34" charset="0"/>
               </a:rPr>
-              <a:t>Aussagekraft der Stimmungsindikatoren</a:t>
+              <a:t>Aussagekraft der Vertrauensindikatoren</a:t>
             </a:r>
           </a:p>
           <a:p>
-            <a:pPr algn="ctr"/>
             <a:r>
-              <a:rPr lang="en-GB" sz="1200" i="1" dirty="0">
+              <a:rPr lang="en-GB" sz="2000" b="1" dirty="0" smtClean="0">
                 <a:solidFill>
-                  <a:srgbClr val="E6E6E6">
+                  <a:schemeClr val="bg2">
                     <a:lumMod val="10000"/>
-                  </a:srgbClr>
+                  </a:schemeClr>
                 </a:solidFill>
                 <a:latin typeface="Calibri" pitchFamily="34" charset="0"/>
               </a:rPr>
-              <a:t>OECD und </a:t>
+              <a:t>OECD und BRIICS, 5-Jahres-Korrelation mit der Aktivität</a:t>
             </a:r>
-            <a:r>
-              <a:rPr lang="en-GB" sz="1200" i="1" dirty="0" smtClean="0">
-                <a:solidFill>
-                  <a:srgbClr val="E6E6E6">
-                    <a:lumMod val="10000"/>
-                  </a:srgbClr>
-                </a:solidFill>
-                <a:latin typeface="Calibri" pitchFamily="34" charset="0"/>
-              </a:rPr>
-              <a:t>BRIICS, 5-Jahres-Korrelation mit Wirtschaftsaktivität</a:t>
-            </a:r>
-            <a:endParaRPr lang="en-GB" sz="2000" baseline="30000" dirty="0">
-              <a:solidFill>
-                <a:schemeClr val="bg2">
-                  <a:lumMod val="10000"/>
-                </a:schemeClr>
-              </a:solidFill>
-              <a:latin typeface="Calibri" pitchFamily="34" charset="0"/>
-            </a:endParaRPr>
           </a:p>
         </p:txBody>
       </p:sp>
@@ -26127,9 +23217,6 @@
           </a:bodyPr>
           <a:lstStyle/>
           <a:p>
-            <a:pPr algn="ctr">
-              <a:defRPr/>
-            </a:pPr>
             <a:r>
               <a:rPr lang="en-US" sz="2700" b="1" dirty="0" smtClean="0">
                 <a:solidFill>
@@ -26137,25 +23224,7 @@
                 </a:solidFill>
                 <a:latin typeface="+mj-lt"/>
               </a:rPr>
-              <a:t>Investitionen steigen, aber der Kapitalstock ist veraltet </a:t>
-            </a:r>
-            <a:r>
-              <a:rPr lang="en-US" sz="2700" b="1" dirty="0">
-                <a:solidFill>
-                  <a:schemeClr val="tx2"/>
-                </a:solidFill>
-                <a:latin typeface="+mj-lt"/>
-              </a:rPr>
-              <a:t>P</a:t>
-            </a:r>
-            <a:r>
-              <a:rPr lang="en-US" sz="2700" b="1" dirty="0" smtClean="0">
-                <a:solidFill>
-                  <a:schemeClr val="tx2"/>
-                </a:solidFill>
-                <a:latin typeface="+mj-lt"/>
-              </a:rPr>
-              <a:t>otenzial durch Technologie-Upgrades</a:t>
+              <a:t>Die Investitionen steigen, doch der Kapitalstock ist alt Aufwärtspotenzial durch technologische Modernisierung</a:t>
             </a:r>
           </a:p>
         </p:txBody>
@@ -26214,226 +23283,7 @@
                 </a:solidFill>
                 <a:latin typeface="Calibri" panose="020F0502020204030204" pitchFamily="34" charset="0"/>
               </a:rPr>
-              <a:t>Anmerkung</a:t>
-            </a:r>
-            <a:r>
-              <a:rPr lang="en-US" sz="1050" dirty="0">
-                <a:solidFill>
-                  <a:schemeClr val="bg2">
-                    <a:lumMod val="10000"/>
-                  </a:schemeClr>
-                </a:solidFill>
-                <a:latin typeface="Calibri" panose="020F0502020204030204" pitchFamily="34" charset="0"/>
-              </a:rPr>
-              <a:t>: </a:t>
-            </a:r>
-            <a:r>
-              <a:rPr lang="en-US" sz="1050" dirty="0" smtClean="0">
-                <a:solidFill>
-                  <a:schemeClr val="bg2">
-                    <a:lumMod val="10000"/>
-                  </a:schemeClr>
-                </a:solidFill>
-                <a:latin typeface="Calibri" panose="020F0502020204030204" pitchFamily="34" charset="0"/>
-              </a:rPr>
-              <a:t>Globale </a:t>
-            </a:r>
-            <a:r>
-              <a:rPr lang="en-US" sz="1050" dirty="0">
-                <a:solidFill>
-                  <a:schemeClr val="bg2">
-                    <a:lumMod val="10000"/>
-                  </a:schemeClr>
-                </a:solidFill>
-                <a:latin typeface="Calibri" panose="020F0502020204030204" pitchFamily="34" charset="0"/>
-              </a:rPr>
-              <a:t>Halbleiterumsätze in nominalen US-Dollar. </a:t>
-            </a:r>
-            <a:r>
-              <a:rPr lang="en-US" sz="1050" dirty="0" smtClean="0">
-                <a:solidFill>
-                  <a:schemeClr val="bg2">
-                    <a:lumMod val="10000"/>
-                  </a:schemeClr>
-                </a:solidFill>
-                <a:latin typeface="Calibri" panose="020F0502020204030204" pitchFamily="34" charset="0"/>
-              </a:rPr>
-              <a:t>Die wichtigsten fortgeschrittenen Computer- </a:t>
-            </a:r>
-            <a:r>
-              <a:rPr lang="en-US" sz="1050" dirty="0">
-                <a:solidFill>
-                  <a:schemeClr val="bg2">
-                    <a:lumMod val="10000"/>
-                  </a:schemeClr>
-                </a:solidFill>
-                <a:latin typeface="Calibri" panose="020F0502020204030204" pitchFamily="34" charset="0"/>
-              </a:rPr>
-              <a:t>und Elektronikproduktionsleistungen sind ein gewichteter Durchschnitt der Produktion von Computer- und Elektronikprodukten </a:t>
-            </a:r>
-            <a:r>
-              <a:rPr lang="en-US" sz="1050" dirty="0" smtClean="0">
-                <a:solidFill>
-                  <a:schemeClr val="bg2">
-                    <a:lumMod val="10000"/>
-                  </a:schemeClr>
-                </a:solidFill>
-                <a:latin typeface="Calibri" panose="020F0502020204030204" pitchFamily="34" charset="0"/>
-              </a:rPr>
-              <a:t>für die Vereinigten Staaten, </a:t>
-            </a:r>
-            <a:r>
-              <a:rPr lang="en-US" sz="1050" dirty="0">
-                <a:solidFill>
-                  <a:schemeClr val="bg2">
-                    <a:lumMod val="10000"/>
-                  </a:schemeClr>
-                </a:solidFill>
-                <a:latin typeface="Calibri" panose="020F0502020204030204" pitchFamily="34" charset="0"/>
-              </a:rPr>
-              <a:t>Produktion von Computern, </a:t>
-            </a:r>
-            <a:r>
-              <a:rPr lang="en-US" sz="1050" dirty="0" smtClean="0">
-                <a:solidFill>
-                  <a:schemeClr val="bg2">
-                    <a:lumMod val="10000"/>
-                  </a:schemeClr>
-                </a:solidFill>
-                <a:latin typeface="Calibri" panose="020F0502020204030204" pitchFamily="34" charset="0"/>
-              </a:rPr>
-              <a:t>elektronischen </a:t>
-            </a:r>
-            <a:r>
-              <a:rPr lang="en-US" sz="1050" dirty="0">
-                <a:solidFill>
-                  <a:schemeClr val="bg2">
-                    <a:lumMod val="10000"/>
-                  </a:schemeClr>
-                </a:solidFill>
-                <a:latin typeface="Calibri" panose="020F0502020204030204" pitchFamily="34" charset="0"/>
-              </a:rPr>
-              <a:t>und optischen </a:t>
-            </a:r>
-            <a:r>
-              <a:rPr lang="en-US" sz="1050" dirty="0" smtClean="0">
-                <a:solidFill>
-                  <a:schemeClr val="bg2">
-                    <a:lumMod val="10000"/>
-                  </a:schemeClr>
-                </a:solidFill>
-                <a:latin typeface="Calibri" panose="020F0502020204030204" pitchFamily="34" charset="0"/>
-              </a:rPr>
-              <a:t>Produkten für Deutschland, </a:t>
-            </a:r>
-            <a:r>
-              <a:rPr lang="en-US" sz="1050" dirty="0">
-                <a:solidFill>
-                  <a:schemeClr val="bg2">
-                    <a:lumMod val="10000"/>
-                  </a:schemeClr>
-                </a:solidFill>
-                <a:latin typeface="Calibri" panose="020F0502020204030204" pitchFamily="34" charset="0"/>
-              </a:rPr>
-              <a:t>sowie die Produktion von Informations- und Kommunikationselektronikgeräten sowie elektronischen Teilen und Bauelementen </a:t>
-            </a:r>
-            <a:r>
-              <a:rPr lang="en-US" sz="1050" dirty="0" smtClean="0">
-                <a:solidFill>
-                  <a:schemeClr val="bg2">
-                    <a:lumMod val="10000"/>
-                  </a:schemeClr>
-                </a:solidFill>
-                <a:latin typeface="Calibri" panose="020F0502020204030204" pitchFamily="34" charset="0"/>
-              </a:rPr>
-              <a:t>für Japan.</a:t>
-            </a:r>
-            <a:br>
-              <a:rPr lang="en-US" sz="1050" dirty="0" smtClean="0">
-                <a:solidFill>
-                  <a:schemeClr val="bg2">
-                    <a:lumMod val="10000"/>
-                  </a:schemeClr>
-                </a:solidFill>
-                <a:latin typeface="Calibri" panose="020F0502020204030204" pitchFamily="34" charset="0"/>
-              </a:rPr>
-            </a:br>
-            <a:r>
-              <a:rPr lang="en-US" sz="1050" dirty="0" smtClean="0">
-                <a:solidFill>
-                  <a:schemeClr val="bg2">
-                    <a:lumMod val="10000"/>
-                  </a:schemeClr>
-                </a:solidFill>
-                <a:latin typeface="Calibri" panose="020F0502020204030204" pitchFamily="34" charset="0"/>
-              </a:rPr>
-              <a:t>Quelle: OECD Wirtschaftsausblick Juni 2017 Datenbank</a:t>
-            </a:r>
-            <a:r>
-              <a:rPr lang="en-US" sz="1050" dirty="0">
-                <a:solidFill>
-                  <a:schemeClr val="bg2">
-                    <a:lumMod val="10000"/>
-                  </a:schemeClr>
-                </a:solidFill>
-                <a:latin typeface="Calibri" panose="020F0502020204030204" pitchFamily="34" charset="0"/>
-              </a:rPr>
-              <a:t>; World Semi-Conductor Statistics; Eurostat; Board of Governors of the Federal Reserve System; </a:t>
-            </a:r>
-            <a:r>
-              <a:rPr lang="en-US" sz="1050" dirty="0" smtClean="0">
-                <a:solidFill>
-                  <a:schemeClr val="bg2">
-                    <a:lumMod val="10000"/>
-                  </a:schemeClr>
-                </a:solidFill>
-                <a:latin typeface="Calibri" panose="020F0502020204030204" pitchFamily="34" charset="0"/>
-              </a:rPr>
-              <a:t>Japanisches Ministerium </a:t>
-            </a:r>
-            <a:r>
-              <a:rPr lang="en-US" sz="1050" dirty="0">
-                <a:solidFill>
-                  <a:schemeClr val="bg2">
-                    <a:lumMod val="10000"/>
-                  </a:schemeClr>
-                </a:solidFill>
-                <a:latin typeface="Calibri" panose="020F0502020204030204" pitchFamily="34" charset="0"/>
-              </a:rPr>
-              <a:t>für Wirtschaft, Handel und </a:t>
-            </a:r>
-            <a:r>
-              <a:rPr lang="en-US" sz="1050" dirty="0" smtClean="0">
-                <a:solidFill>
-                  <a:schemeClr val="bg2">
-                    <a:lumMod val="10000"/>
-                  </a:schemeClr>
-                </a:solidFill>
-                <a:latin typeface="Calibri" panose="020F0502020204030204" pitchFamily="34" charset="0"/>
-              </a:rPr>
-              <a:t>Industrie; </a:t>
-            </a:r>
-            <a:r>
-              <a:rPr lang="en-US" sz="1050" dirty="0">
-                <a:solidFill>
-                  <a:schemeClr val="bg2">
-                    <a:lumMod val="10000"/>
-                  </a:schemeClr>
-                </a:solidFill>
-                <a:latin typeface="Calibri" panose="020F0502020204030204" pitchFamily="34" charset="0"/>
-              </a:rPr>
-              <a:t>und OECD-Berechnungen</a:t>
-            </a:r>
-            <a:r>
-              <a:rPr lang="en-US" sz="1050" dirty="0" smtClean="0">
-                <a:solidFill>
-                  <a:schemeClr val="bg2">
-                    <a:lumMod val="10000"/>
-                  </a:schemeClr>
-                </a:solidFill>
-                <a:latin typeface="Calibri" panose="020F0502020204030204" pitchFamily="34" charset="0"/>
-              </a:rPr>
-              <a:t>.</a:t>
+              <a:t>Anmerkung: Globale Halbleiterumsätze in nominalen US-Dollar. Die Produktion der wichtigsten fortgeschrittenen Computer- und Elektronikgüter ist ein gewichteter Durchschnitt aus der Produktion von Computer- und Elektronikerzeugnissen für die Vereinigten Staaten, der Produktion von Computer-, Elektronik- und optischen Erzeugnissen für Deutschland sowie der Produktion von Informations- und Kommunikationselektronik samt elektronischen Bauteilen und Geräten für Japan.Quelle: OECD Economic Outlook-Datenbank, Juni 2017; World Semi-Conductor Statistics; Eurostat; Board of Governors of the Federal Reserve System; Japan Ministry of Economy, Trade and Industry; und OECD-Berechnungen.</a:t>
             </a:r>
           </a:p>
         </p:txBody>
@@ -26460,7 +23310,6 @@
           </a:bodyPr>
           <a:lstStyle/>
           <a:p>
-            <a:pPr algn="ctr"/>
             <a:r>
               <a:rPr lang="en-GB" sz="2000" b="1" dirty="0" smtClean="0">
                 <a:solidFill>
@@ -26470,26 +23319,8 @@
                 </a:solidFill>
                 <a:latin typeface="Calibri" pitchFamily="34" charset="0"/>
               </a:rPr>
-              <a:t>Hochtechnologieprodukte</a:t>
+              <a:t>Hightech-Produkte</a:t>
             </a:r>
-            <a:br>
-              <a:rPr lang="en-GB" sz="2000" b="1" dirty="0" smtClean="0">
-                <a:solidFill>
-                  <a:schemeClr val="bg2">
-                    <a:lumMod val="10000"/>
-                  </a:schemeClr>
-                </a:solidFill>
-                <a:latin typeface="Calibri" pitchFamily="34" charset="0"/>
-              </a:rPr>
-            </a:br>
-            <a:endParaRPr lang="en-GB" sz="2000" baseline="30000" dirty="0">
-              <a:solidFill>
-                <a:schemeClr val="bg2">
-                  <a:lumMod val="10000"/>
-                </a:schemeClr>
-              </a:solidFill>
-              <a:latin typeface="Calibri" pitchFamily="34" charset="0"/>
-            </a:endParaRPr>
           </a:p>
         </p:txBody>
       </p:sp>
@@ -26515,7 +23346,6 @@
           </a:bodyPr>
           <a:lstStyle/>
           <a:p>
-            <a:pPr algn="ctr"/>
             <a:r>
               <a:rPr lang="en-US" sz="2000" b="1" dirty="0" smtClean="0">
                 <a:solidFill>
@@ -26670,9 +23500,6 @@
           </a:bodyPr>
           <a:lstStyle/>
           <a:p>
-            <a:pPr algn="ctr">
-              <a:defRPr/>
-            </a:pPr>
             <a:r>
               <a:rPr lang="en-US" sz="2800" b="1" dirty="0">
                 <a:solidFill>
@@ -26680,16 +23507,7 @@
                 </a:solidFill>
                 <a:latin typeface="+mj-lt"/>
               </a:rPr>
-              <a:t>Der Welthandel hat sich zuletzt erholt, mit wichtiger Unterstützung durch </a:t>
-            </a:r>
-            <a:r>
-              <a:rPr lang="en-US" sz="2800" b="1" dirty="0" smtClean="0">
-                <a:solidFill>
-                  <a:schemeClr val="tx2"/>
-                </a:solidFill>
-                <a:latin typeface="+mj-lt"/>
-              </a:rPr>
-              <a:t>Konjunkturmaßnahmen in China</a:t>
+              <a:t>Der Welthandel hat sich zuletzt erholt, mit wichtiger Unterstützung durch die Konjunkturmaßnahmen in China</a:t>
             </a:r>
           </a:p>
         </p:txBody>
@@ -26739,7 +23557,6 @@
           </a:bodyPr>
           <a:lstStyle/>
           <a:p>
-            <a:pPr algn="ctr"/>
             <a:r>
               <a:rPr lang="en-GB" sz="2000" b="1" dirty="0" smtClean="0">
                 <a:solidFill>
@@ -26749,26 +23566,8 @@
                 </a:solidFill>
                 <a:latin typeface="Calibri" pitchFamily="34" charset="0"/>
               </a:rPr>
-              <a:t>Beiträge zum Welthandelswachstum</a:t>
+              <a:t>Beiträge zum Wachstum des Welthandels</a:t>
             </a:r>
-            <a:br>
-              <a:rPr lang="en-GB" sz="2000" b="1" dirty="0" smtClean="0">
-                <a:solidFill>
-                  <a:schemeClr val="bg2">
-                    <a:lumMod val="10000"/>
-                  </a:schemeClr>
-                </a:solidFill>
-                <a:latin typeface="Calibri" pitchFamily="34" charset="0"/>
-              </a:rPr>
-            </a:br>
-            <a:endParaRPr lang="en-GB" sz="2000" baseline="30000" dirty="0">
-              <a:solidFill>
-                <a:schemeClr val="bg2">
-                  <a:lumMod val="10000"/>
-                </a:schemeClr>
-              </a:solidFill>
-              <a:latin typeface="Calibri" pitchFamily="34" charset="0"/>
-            </a:endParaRPr>
           </a:p>
         </p:txBody>
       </p:sp>
@@ -26803,93 +23602,7 @@
                 </a:solidFill>
                 <a:latin typeface="Calibri" panose="020F0502020204030204" pitchFamily="34" charset="0"/>
               </a:rPr>
-              <a:t/>
-            </a:r>
-            <a:br>
-              <a:rPr lang="en-US" sz="1200" dirty="0" smtClean="0">
-                <a:solidFill>
-                  <a:schemeClr val="bg2">
-                    <a:lumMod val="10000"/>
-                  </a:schemeClr>
-                </a:solidFill>
-                <a:latin typeface="Calibri" panose="020F0502020204030204" pitchFamily="34" charset="0"/>
-              </a:rPr>
-            </a:br>
-            <a:r>
-              <a:rPr lang="en-US" sz="1200" dirty="0" smtClean="0">
-                <a:solidFill>
-                  <a:schemeClr val="bg2">
-                    <a:lumMod val="10000"/>
-                  </a:schemeClr>
-                </a:solidFill>
-                <a:latin typeface="Calibri" panose="020F0502020204030204" pitchFamily="34" charset="0"/>
-              </a:rPr>
-              <a:t>Anmerkung: Rohstoffproduzenten umfassen Argentinien, Australien, Brasilien, Chile, Kolumbien, Norwegen, Neuseeland, Russland, Saudi-Arabien, Südafrika und andere ölproduzierende Länder.</a:t>
-            </a:r>
-            <a:br>
-              <a:rPr lang="en-US" sz="1200" dirty="0" smtClean="0">
-                <a:solidFill>
-                  <a:schemeClr val="bg2">
-                    <a:lumMod val="10000"/>
-                  </a:schemeClr>
-                </a:solidFill>
-                <a:latin typeface="Calibri" panose="020F0502020204030204" pitchFamily="34" charset="0"/>
-              </a:rPr>
-            </a:br>
-            <a:r>
-              <a:rPr lang="en-US" sz="1200" dirty="0" smtClean="0">
-                <a:solidFill>
-                  <a:schemeClr val="bg2">
-                    <a:lumMod val="10000"/>
-                  </a:schemeClr>
-                </a:solidFill>
-                <a:latin typeface="Calibri" panose="020F0502020204030204" pitchFamily="34" charset="0"/>
-              </a:rPr>
-              <a:t>Quelle: OECD Wirtschaftsausblick Juni 2017 Datenbank</a:t>
-            </a:r>
-            <a:r>
-              <a:rPr lang="en-US" sz="1200" dirty="0">
-                <a:solidFill>
-                  <a:schemeClr val="bg2">
-                    <a:lumMod val="10000"/>
-                  </a:schemeClr>
-                </a:solidFill>
-                <a:latin typeface="Calibri" panose="020F0502020204030204" pitchFamily="34" charset="0"/>
-              </a:rPr>
-              <a:t>; </a:t>
-            </a:r>
-            <a:r>
-              <a:rPr lang="en-US" sz="1200" dirty="0" smtClean="0">
-                <a:solidFill>
-                  <a:schemeClr val="bg2">
-                    <a:lumMod val="10000"/>
-                  </a:schemeClr>
-                </a:solidFill>
-                <a:latin typeface="Calibri" panose="020F0502020204030204" pitchFamily="34" charset="0"/>
-              </a:rPr>
-              <a:t>und Nationales </a:t>
-            </a:r>
-            <a:r>
-              <a:rPr lang="en-US" sz="1200" dirty="0">
-                <a:solidFill>
-                  <a:schemeClr val="bg2">
-                    <a:lumMod val="10000"/>
-                  </a:schemeClr>
-                </a:solidFill>
-                <a:latin typeface="Calibri" panose="020F0502020204030204" pitchFamily="34" charset="0"/>
-              </a:rPr>
-              <a:t>Statistikbüro von </a:t>
-            </a:r>
-            <a:r>
-              <a:rPr lang="en-US" sz="1200" dirty="0" smtClean="0">
-                <a:solidFill>
-                  <a:schemeClr val="bg2">
-                    <a:lumMod val="10000"/>
-                  </a:schemeClr>
-                </a:solidFill>
-                <a:latin typeface="Calibri" panose="020F0502020204030204" pitchFamily="34" charset="0"/>
-              </a:rPr>
-              <a:t>China.</a:t>
+              <a:t>Anmerkung: Zu den Rohstoffproduzenten zählen Argentinien, Australien, Brasilien, Chile, Kolumbien, Norwegen, Neuseeland, Russland, Saudi-Arabien, Südafrika und weitere erdölfördernde Länder.Quelle: OECD Economic Outlook-Datenbank, Juni 2017; und National Bureau of Statistics of China.</a:t>
             </a:r>
           </a:p>
         </p:txBody>
@@ -26916,7 +23629,6 @@
           </a:bodyPr>
           <a:lstStyle/>
           <a:p>
-            <a:pPr algn="ctr"/>
             <a:r>
               <a:rPr lang="en-US" sz="2000" b="1" dirty="0" smtClean="0">
                 <a:solidFill>
@@ -26926,28 +23638,7 @@
                 </a:solidFill>
                 <a:latin typeface="Calibri" pitchFamily="34" charset="0"/>
               </a:rPr>
-              <a:t>Chinas nominale Anlagen</a:t>
-            </a:r>
-            <a:br>
-              <a:rPr lang="en-US" sz="2000" b="1" dirty="0" smtClean="0">
-                <a:solidFill>
-                  <a:schemeClr val="bg2">
-                    <a:lumMod val="10000"/>
-                  </a:schemeClr>
-                </a:solidFill>
-                <a:latin typeface="Calibri" pitchFamily="34" charset="0"/>
-              </a:rPr>
-            </a:br>
-            <a:r>
-              <a:rPr lang="en-US" sz="2000" b="1" dirty="0" smtClean="0">
-                <a:solidFill>
-                  <a:schemeClr val="bg2">
-                    <a:lumMod val="10000"/>
-                  </a:schemeClr>
-                </a:solidFill>
-                <a:latin typeface="Calibri" pitchFamily="34" charset="0"/>
-              </a:rPr>
-              <a:t>investitionen</a:t>
+              <a:t>Nominale Anlageinvestitionen Chinas</a:t>
             </a:r>
           </a:p>
         </p:txBody>
@@ -27115,9 +23806,6 @@
           </a:bodyPr>
           <a:lstStyle/>
           <a:p>
-            <a:pPr algn="ctr">
-              <a:defRPr/>
-            </a:pPr>
             <a:r>
               <a:rPr lang="en-US" sz="2800" b="1" dirty="0" smtClean="0">
                 <a:solidFill>
@@ -27125,31 +23813,8 @@
                 </a:solidFill>
                 <a:latin typeface="+mj-lt"/>
               </a:rPr>
-              <a:t>Die Arbeitsmarkterholung ist unvollständig </a:t>
+              <a:t>Die Erholung am Arbeitsmarkt ist unvollständig, und das Reallohnwachstum bleibt schwach</a:t>
             </a:r>
-            <a:br>
-              <a:rPr lang="en-US" sz="2800" b="1" dirty="0" smtClean="0">
-                <a:solidFill>
-                  <a:schemeClr val="tx2"/>
-                </a:solidFill>
-                <a:latin typeface="+mj-lt"/>
-              </a:rPr>
-            </a:br>
-            <a:r>
-              <a:rPr lang="en-US" sz="2800" b="1" dirty="0" smtClean="0">
-                <a:solidFill>
-                  <a:schemeClr val="tx2"/>
-                </a:solidFill>
-                <a:latin typeface="+mj-lt"/>
-              </a:rPr>
-              <a:t>und das reale Lohnwachstum bleibt schleppend</a:t>
-            </a:r>
-            <a:endParaRPr lang="en-GB" sz="2800" b="1" dirty="0">
-              <a:solidFill>
-                <a:schemeClr val="tx2"/>
-              </a:solidFill>
-              <a:latin typeface="+mj-lt"/>
-            </a:endParaRPr>
           </a:p>
         </p:txBody>
       </p:sp>
@@ -27175,7 +23840,6 @@
           </a:bodyPr>
           <a:lstStyle/>
           <a:p>
-            <a:pPr lvl="0" algn="ctr"/>
             <a:r>
               <a:rPr lang="en-US" sz="2000" b="1" dirty="0" smtClean="0">
                 <a:solidFill>
@@ -27185,37 +23849,8 @@
                 </a:solidFill>
                 <a:latin typeface="Calibri" pitchFamily="34" charset="0"/>
               </a:rPr>
-              <a:t>Arbeitslosigkeit und Unterbeschäftigung</a:t>
+              <a:t>Arbeitslosigkeit und Unterbeschäftigung OECD, Anteil an den Erwerbspersonen</a:t>
             </a:r>
-            <a:br>
-              <a:rPr lang="en-US" sz="2000" b="1" dirty="0" smtClean="0">
-                <a:solidFill>
-                  <a:schemeClr val="bg2">
-                    <a:lumMod val="10000"/>
-                  </a:schemeClr>
-                </a:solidFill>
-                <a:latin typeface="Calibri" pitchFamily="34" charset="0"/>
-              </a:rPr>
-            </a:br>
-            <a:r>
-              <a:rPr lang="en-US" sz="1200" i="1" dirty="0" smtClean="0">
-                <a:solidFill>
-                  <a:schemeClr val="bg2">
-                    <a:lumMod val="10000"/>
-                  </a:schemeClr>
-                </a:solidFill>
-                <a:latin typeface="Calibri" pitchFamily="34" charset="0"/>
-              </a:rPr>
-              <a:t>OECD, Anteil der Erwerbspersonen</a:t>
-            </a:r>
-            <a:endParaRPr lang="en-US" sz="1200" i="1" dirty="0">
-              <a:solidFill>
-                <a:schemeClr val="bg2">
-                  <a:lumMod val="10000"/>
-                </a:schemeClr>
-              </a:solidFill>
-              <a:latin typeface="Calibri" pitchFamily="34" charset="0"/>
-            </a:endParaRPr>
           </a:p>
         </p:txBody>
       </p:sp>
@@ -27250,103 +23885,8 @@
                 </a:solidFill>
                 <a:latin typeface="Calibri" panose="020F0502020204030204" pitchFamily="34" charset="0"/>
               </a:rPr>
-              <a:t>Anmerkung: </a:t>
+              <a:t>Anmerkung: Reallöhne gemessen als Arbeitnehmerentgelt je Beschäftigten, bereinigt um den BIP-Deflator.Quelle: OECD Economic Outlook-Datenbank, Juni 2017; OECD Employment-Datenbank; US Bureau of Labor Statistics; Eurostat; und Japan Statistics Bureau.</a:t>
             </a:r>
-            <a:r>
-              <a:rPr lang="en-US" sz="1200" dirty="0" smtClean="0">
-                <a:solidFill>
-                  <a:schemeClr val="bg2">
-                    <a:lumMod val="10000"/>
-                  </a:schemeClr>
-                </a:solidFill>
-                <a:latin typeface="Calibri" panose="020F0502020204030204" pitchFamily="34" charset="0"/>
-              </a:rPr>
-              <a:t>Reallöhne gemessen als </a:t>
-            </a:r>
-            <a:r>
-              <a:rPr lang="en-US" sz="1200" dirty="0">
-                <a:solidFill>
-                  <a:schemeClr val="bg2">
-                    <a:lumMod val="10000"/>
-                  </a:schemeClr>
-                </a:solidFill>
-                <a:latin typeface="Calibri" panose="020F0502020204030204" pitchFamily="34" charset="0"/>
-              </a:rPr>
-              <a:t>Arbeitnehmerentgelt je Beschäftigten </a:t>
-            </a:r>
-            <a:r>
-              <a:rPr lang="en-US" sz="1200" dirty="0" smtClean="0">
-                <a:solidFill>
-                  <a:schemeClr val="bg2">
-                    <a:lumMod val="10000"/>
-                  </a:schemeClr>
-                </a:solidFill>
-                <a:latin typeface="Calibri" panose="020F0502020204030204" pitchFamily="34" charset="0"/>
-              </a:rPr>
-              <a:t>bereinigt </a:t>
-            </a:r>
-            <a:r>
-              <a:rPr lang="en-US" sz="1200" dirty="0">
-                <a:solidFill>
-                  <a:schemeClr val="bg2">
-                    <a:lumMod val="10000"/>
-                  </a:schemeClr>
-                </a:solidFill>
-                <a:latin typeface="Calibri" panose="020F0502020204030204" pitchFamily="34" charset="0"/>
-              </a:rPr>
-              <a:t>um </a:t>
-            </a:r>
-            <a:r>
-              <a:rPr lang="en-US" sz="1200" dirty="0" smtClean="0">
-                <a:solidFill>
-                  <a:schemeClr val="bg2">
-                    <a:lumMod val="10000"/>
-                  </a:schemeClr>
-                </a:solidFill>
-                <a:latin typeface="Calibri" panose="020F0502020204030204" pitchFamily="34" charset="0"/>
-              </a:rPr>
-              <a:t>den BIP-</a:t>
-            </a:r>
-            <a:r>
-              <a:rPr lang="en-US" sz="1200" dirty="0">
-                <a:solidFill>
-                  <a:schemeClr val="bg2">
-                    <a:lumMod val="10000"/>
-                  </a:schemeClr>
-                </a:solidFill>
-                <a:latin typeface="Calibri" panose="020F0502020204030204" pitchFamily="34" charset="0"/>
-              </a:rPr>
-              <a:t>Deflator.</a:t>
-            </a:r>
-            <a:br>
-              <a:rPr lang="en-US" sz="1200" dirty="0">
-                <a:solidFill>
-                  <a:schemeClr val="bg2">
-                    <a:lumMod val="10000"/>
-                  </a:schemeClr>
-                </a:solidFill>
-                <a:latin typeface="Calibri" panose="020F0502020204030204" pitchFamily="34" charset="0"/>
-              </a:rPr>
-            </a:br>
-            <a:r>
-              <a:rPr lang="en-US" sz="1200" dirty="0">
-                <a:solidFill>
-                  <a:schemeClr val="bg2">
-                    <a:lumMod val="10000"/>
-                  </a:schemeClr>
-                </a:solidFill>
-                <a:latin typeface="Calibri" panose="020F0502020204030204" pitchFamily="34" charset="0"/>
-              </a:rPr>
-              <a:t>Quelle: OECD Wirtschaftsausblick Juni 2017 Datenbank; OECD Beschäftigungsdatenbank; US Bureau of Labor Statistics; Eurostat; und Japan Statistics Bureau.</a:t>
-            </a:r>
-            <a:endParaRPr lang="en-US" sz="1200" dirty="0" smtClean="0">
-              <a:solidFill>
-                <a:schemeClr val="bg2">
-                  <a:lumMod val="10000"/>
-                </a:schemeClr>
-              </a:solidFill>
-              <a:latin typeface="Calibri" panose="020F0502020204030204" pitchFamily="34" charset="0"/>
-            </a:endParaRPr>
           </a:p>
         </p:txBody>
       </p:sp>
@@ -27372,7 +23912,6 @@
           </a:bodyPr>
           <a:lstStyle/>
           <a:p>
-            <a:pPr lvl="0" algn="ctr"/>
             <a:r>
               <a:rPr lang="en-US" sz="2000" b="1" dirty="0" smtClean="0">
                 <a:solidFill>
@@ -27386,26 +23925,17 @@
             </a:r>
           </a:p>
           <a:p>
-            <a:pPr lvl="0" algn="ctr"/>
             <a:r>
-              <a:rPr lang="en-US" sz="1200" i="1" dirty="0" smtClean="0">
+              <a:rPr lang="en-US" sz="2000" b="1" dirty="0" smtClean="0">
                 <a:solidFill>
-                  <a:srgbClr val="E6E6E6">
+                  <a:schemeClr val="bg2">
                     <a:lumMod val="10000"/>
-                  </a:srgbClr>
+                  </a:schemeClr>
                 </a:solidFill>
                 <a:latin typeface="Calibri" pitchFamily="34" charset="0"/>
               </a:rPr>
-              <a:t>Horizontale Linien sind Durchschnittswerte für 1987–2007</a:t>
+              <a:t>Horizontale Linien sind Durchschnittswerte für 1987-2007</a:t>
             </a:r>
-            <a:endParaRPr lang="en-US" sz="1200" i="1" dirty="0">
-              <a:solidFill>
-                <a:schemeClr val="bg2">
-                  <a:lumMod val="10000"/>
-                </a:schemeClr>
-              </a:solidFill>
-              <a:latin typeface="Calibri" pitchFamily="34" charset="0"/>
-            </a:endParaRPr>
           </a:p>
         </p:txBody>
       </p:sp>

--- a/fixtures/real-world/oecd-economic-outlook-2017-de.pptx
+++ b/fixtures/real-world/oecd-economic-outlook-2017-de.pptx
@@ -2767,19 +2767,19 @@
             <a:rPr lang="en-GB" dirty="0" smtClean="0">
               <a:latin typeface="Calibri" panose="020F0502020204030204" pitchFamily="34" charset="0"/>
             </a:rPr>
-            <a:t>Globales Wachstum dürfte moderat anziehen </a:t>
+            <a:t>Global growth expected to pick-up modestly </a:t>
           </a:r>
           <a:r>
             <a:rPr lang="en-GB" smtClean="0">
               <a:latin typeface="Calibri" panose="020F0502020204030204" pitchFamily="34" charset="0"/>
             </a:rPr>
-            <a:t>mit Aufwärts</a:t>
+            <a:t>with upside </a:t>
           </a:r>
           <a:r>
             <a:rPr lang="en-GB" dirty="0" smtClean="0">
               <a:latin typeface="Calibri" panose="020F0502020204030204" pitchFamily="34" charset="0"/>
             </a:rPr>
-            <a:t>risiken</a:t>
+            <a:t>risks</a:t>
           </a:r>
         </a:p>
       </dgm:t>
@@ -2821,7 +2821,7 @@
             <a:rPr lang="en-GB" dirty="0" smtClean="0">
               <a:latin typeface="Calibri" panose="020F0502020204030204" pitchFamily="34" charset="0"/>
             </a:rPr>
-            <a:t>Es bleibt mehr zu tun, um die Gewinne aus Strukturtrends und Handel breiter zu teilen</a:t>
+            <a:t>More needs to be done to share the gains from structural trends and trade</a:t>
           </a:r>
         </a:p>
       </dgm:t>
@@ -2863,7 +2863,7 @@
             <a:rPr lang="en-GB" dirty="0" smtClean="0">
               <a:latin typeface="Calibri" panose="020F0502020204030204" pitchFamily="34" charset="0"/>
             </a:rPr>
-            <a:t>Ein integrierter Politikansatz ist nötig, damit die Globalisierung allen zugutekommt</a:t>
+            <a:t>An integrated policy approach is needed to make globalisation work for all</a:t>
           </a:r>
         </a:p>
       </dgm:t>
@@ -2910,7 +2910,7 @@
               </a:solidFill>
               <a:latin typeface="Calibri" panose="020F0502020204030204" pitchFamily="34" charset="0"/>
             </a:rPr>
-            <a:t>Veränderungen bei Technologie, Verbraucherpräferenzen und Handel vollziehen sich gleichzeitig</a:t>
+            <a:t>Changes to technology, consumer preferences and trade are occurring simultaneously</a:t>
           </a:r>
         </a:p>
       </dgm:t>
@@ -2958,7 +2958,7 @@
               </a:solidFill>
               <a:latin typeface="Calibri" panose="020F0502020204030204" pitchFamily="34" charset="0"/>
             </a:rPr>
-            <a:t>Gleichere Wettbewerbsbedingungen für das internationale System</a:t>
+            <a:t>A more level playing field for the international system</a:t>
           </a:r>
         </a:p>
       </dgm:t>
@@ -3005,7 +3005,7 @@
               </a:solidFill>
               <a:latin typeface="Calibri" panose="020F0502020204030204" pitchFamily="34" charset="0"/>
             </a:rPr>
-            <a:t>Das Vertrauen steigt, und Investitionen und Handel ziehen von niedrigem Niveau aus an</a:t>
+            <a:t>Confidence is increasing and investment and trade are picking up from low levels</a:t>
           </a:r>
         </a:p>
       </dgm:t>
@@ -3052,7 +3052,7 @@
               </a:solidFill>
               <a:latin typeface="Calibri" panose="020F0502020204030204" pitchFamily="34" charset="0"/>
             </a:rPr>
-            <a:t>Anzeichen für steigende Nachfrage nach Hightech-Gütern und Investitionen zur Modernisierung des Kapitals</a:t>
+            <a:t>Signs of rising demand for high-tech goods and investment to upgrade capital</a:t>
           </a:r>
         </a:p>
       </dgm:t>
@@ -3100,7 +3100,7 @@
               </a:solidFill>
               <a:latin typeface="Calibri" panose="020F0502020204030204" pitchFamily="34" charset="0"/>
             </a:rPr>
-            <a:t>Inländische Reformen zur Stärkung von Wettbewerb, Beschäftigung, Qualifikationen und Innovation</a:t>
+            <a:t>Domestic reforms to boost competition, job creation, skills and innovation</a:t>
           </a:r>
         </a:p>
       </dgm:t>
@@ -3142,7 +3142,7 @@
             <a:rPr lang="en-GB" dirty="0" smtClean="0">
               <a:latin typeface="Calibri" panose="020F0502020204030204" pitchFamily="34" charset="0"/>
             </a:rPr>
-            <a:t>Produktivitäts- und Lohnwachstum bleiben gedämpft; Risiken für die Finanzstabilität bestehen fort</a:t>
+            <a:t>Productivity and wage growth remain subdued; financial stability risks persist</a:t>
           </a:r>
         </a:p>
       </dgm:t>
@@ -3189,7 +3189,7 @@
               </a:solidFill>
               <a:latin typeface="Calibri" panose="020F0502020204030204" pitchFamily="34" charset="0"/>
             </a:rPr>
-            <a:t>Arbeitsplatzverluste durch Aktivitätsverlagerungen konzentrieren sich auf das verarbeitende Gewerbe und bestimmte Regionen</a:t>
+            <a:t>Job losses from shifts in activity are concentrated in manufacturing and specific regions</a:t>
           </a:r>
         </a:p>
       </dgm:t>
@@ -3236,7 +3236,7 @@
               </a:solidFill>
               <a:latin typeface="Calibri" panose="020F0502020204030204" pitchFamily="34" charset="0"/>
             </a:rPr>
-            <a:t>Das Wachstum ist breit angelegt; die Erholung bei Rohstoffproduzenten stützt den moderaten globalen Aufschwung</a:t>
+            <a:t>Growth is broad based; recovery in commodity producers helps the modest global upturn</a:t>
           </a:r>
           <a:endParaRPr lang="en-GB" dirty="0" smtClean="0">
             <a:solidFill>
@@ -3291,7 +3291,7 @@
               </a:solidFill>
               <a:latin typeface="Calibri" panose="020F0502020204030204" pitchFamily="34" charset="0"/>
             </a:rPr>
-            <a:t>Die wichtigsten Beschäftigungsindikatoren verbessern sich, doch die Arbeitsmärkte haben sich noch nicht erholt</a:t>
+            <a:t>Headline employment indicators are improving but labour markets have not recovered</a:t>
           </a:r>
         </a:p>
       </dgm:t>
@@ -3338,7 +3338,7 @@
               </a:solidFill>
               <a:latin typeface="Calibri" panose="020F0502020204030204" pitchFamily="34" charset="0"/>
             </a:rPr>
-            <a:t>Finanzielle Risiken durch hohes und steigendes Kreditwachstum, steigende Immobilienpreise und Zinsdivergenzen</a:t>
+            <a:t>Financial risks from high and rising credit growth, house price increases, interest rate gaps</a:t>
           </a:r>
           <a:endParaRPr lang="en-GB" dirty="0" smtClean="0">
             <a:solidFill>
@@ -3394,7 +3394,7 @@
               </a:solidFill>
               <a:latin typeface="Calibri" panose="020F0502020204030204" pitchFamily="34" charset="0"/>
             </a:rPr>
-            <a:t>Gezielte Maßnahmen, um Menschen, die zurückbleiben, neue Chancen zu eröffnen</a:t>
+            <a:t>Targeted policies to help people who are left behind seize new opportunities</a:t>
           </a:r>
         </a:p>
       </dgm:t>
@@ -3636,7 +3636,7 @@
             <a:rPr lang="en-GB" sz="2000" dirty="0" smtClean="0">
               <a:latin typeface="Calibri" panose="020F0502020204030204" pitchFamily="34" charset="0"/>
             </a:rPr>
-            <a:t>Maßnahmen zur Verbesserung des internationalen Umfelds:</a:t>
+            <a:t>Actions to improve the international environment:</a:t>
           </a:r>
         </a:p>
       </dgm:t>
@@ -3683,7 +3683,7 @@
               </a:solidFill>
               <a:latin typeface="Calibri" panose="020F0502020204030204" pitchFamily="34" charset="0"/>
             </a:rPr>
-            <a:t>Institutionen und Standards bewahren, etwa für Arbeits- und Umweltschutz</a:t>
+            <a:t>Preserve institutions and standards, such as for labour and environmental protection</a:t>
           </a:r>
         </a:p>
       </dgm:t>
@@ -3730,7 +3730,7 @@
               </a:solidFill>
               <a:latin typeface="Calibri" panose="020F0502020204030204" pitchFamily="34" charset="0"/>
             </a:rPr>
-            <a:t>Offene Märkte für grenzüberschreitenden Handel und Investitionen anstreben</a:t>
+            <a:t>Pursue open markets for cross-border trade and investment</a:t>
           </a:r>
         </a:p>
       </dgm:t>
@@ -3777,7 +3777,7 @@
               </a:solidFill>
               <a:latin typeface="Calibri" panose="020F0502020204030204" pitchFamily="34" charset="0"/>
             </a:rPr>
-            <a:t>Multilaterale Zusammenarbeit fördern, z. B. bei Gewinnverkürzung und Gewinnverlagerung sowie der Wettbewerbspolitik</a:t>
+            <a:t>Promote multilateral cooperation, e.g. on tax base erosion and profit shifting and competition policy</a:t>
           </a:r>
         </a:p>
       </dgm:t>
@@ -3824,7 +3824,7 @@
               </a:solidFill>
               <a:latin typeface="Calibri" panose="020F0502020204030204" pitchFamily="34" charset="0"/>
             </a:rPr>
-            <a:t>Korruption, illegalen Handel und Produktfälschung bekämpfen</a:t>
+            <a:t>Combat corruption, illicit trade and counterfeiting</a:t>
           </a:r>
         </a:p>
       </dgm:t>
@@ -4079,7 +4079,7 @@
             <a:rPr lang="en-GB" sz="1600" b="1" dirty="0" smtClean="0">
               <a:latin typeface="Calibri" panose="020F0502020204030204" pitchFamily="34" charset="0"/>
             </a:rPr>
-            <a:t>Das internationale System gerechter gestalten und besser zum Funktionieren bringen</a:t>
+            <a:t>Make the international system fairer and work better</a:t>
           </a:r>
           <a:endParaRPr lang="en-GB" sz="1600" b="1" dirty="0">
             <a:latin typeface="Calibri" panose="020F0502020204030204" pitchFamily="34" charset="0"/>
@@ -4127,7 +4127,7 @@
               </a:solidFill>
               <a:latin typeface="Calibri" panose="020F0502020204030204" pitchFamily="34" charset="0"/>
             </a:rPr>
-            <a:t>Maßnahmen zur Förderung neuer Unternehmen, Innovation und Beschäftigung</a:t>
+            <a:t>Policies to encourage new firms, innovation &amp; job creation</a:t>
           </a:r>
           <a:endParaRPr lang="en-GB" sz="1600" b="1" dirty="0">
             <a:solidFill>
@@ -4175,13 +4175,13 @@
             <a:rPr lang="en-GB" sz="1600" b="1" dirty="0" smtClean="0">
               <a:latin typeface="Calibri" panose="020F0502020204030204" pitchFamily="34" charset="0"/>
             </a:rPr>
-            <a:t>Gezielte Maßnahmen, um Menschen zu helfen, neue </a:t>
+            <a:t>Targeted policies to help people seize new </a:t>
           </a:r>
           <a:r>
             <a:rPr lang="en-GB" sz="1550" b="1" dirty="0" smtClean="0">
               <a:latin typeface="Calibri" panose="020F0502020204030204" pitchFamily="34" charset="0"/>
             </a:rPr>
-            <a:t>Chancen zu ergreifen</a:t>
+            <a:t>opportunities</a:t>
           </a:r>
           <a:endParaRPr lang="en-GB" sz="1550" b="1" dirty="0">
             <a:latin typeface="Calibri" panose="020F0502020204030204" pitchFamily="34" charset="0"/>
@@ -4433,19 +4433,19 @@
             <a:rPr lang="en-GB" sz="2000" kern="1200" dirty="0" smtClean="0">
               <a:latin typeface="Calibri" panose="020F0502020204030204" pitchFamily="34" charset="0"/>
             </a:rPr>
-            <a:t>Globales Wachstum dürfte moderat anziehen </a:t>
+            <a:t>Global growth expected to pick-up modestly </a:t>
           </a:r>
           <a:r>
             <a:rPr lang="en-GB" sz="2000" kern="1200" smtClean="0">
               <a:latin typeface="Calibri" panose="020F0502020204030204" pitchFamily="34" charset="0"/>
             </a:rPr>
-            <a:t>mit Aufwärts</a:t>
+            <a:t>with upside </a:t>
           </a:r>
           <a:r>
             <a:rPr lang="en-GB" sz="2000" kern="1200" dirty="0" smtClean="0">
               <a:latin typeface="Calibri" panose="020F0502020204030204" pitchFamily="34" charset="0"/>
             </a:rPr>
-            <a:t>risiken</a:t>
+            <a:t>risks</a:t>
           </a:r>
         </a:p>
       </dsp:txBody>
@@ -4512,7 +4512,7 @@
               </a:solidFill>
               <a:latin typeface="Calibri" panose="020F0502020204030204" pitchFamily="34" charset="0"/>
             </a:rPr>
-            <a:t>Es bleibt mehr zu tun, um die Gewinne aus Strukturtrends und Handel breiter zu teilen</a:t>
+            <a:t>Confidence is increasing and investment and trade are picking up from low levels</a:t>
           </a:r>
         </a:p>
         <a:p>
@@ -4537,7 +4537,7 @@
               </a:solidFill>
               <a:latin typeface="Calibri" panose="020F0502020204030204" pitchFamily="34" charset="0"/>
             </a:rPr>
-            <a:t>Ein integrierter Politikansatz ist nötig, damit die Globalisierung allen zugutekommt</a:t>
+            <a:t>Growth is broad based; recovery in commodity producers helps the modest global upturn</a:t>
           </a:r>
           <a:endParaRPr lang="en-GB" sz="1600" kern="1200" dirty="0" smtClean="0">
             <a:solidFill>
@@ -4570,7 +4570,7 @@
               </a:solidFill>
               <a:latin typeface="Calibri" panose="020F0502020204030204" pitchFamily="34" charset="0"/>
             </a:rPr>
-            <a:t>Veränderungen bei Technologie, Verbraucherpräferenzen und Handel vollziehen sich gleichzeitig</a:t>
+            <a:t>Signs of rising demand for high-tech goods and investment to upgrade capital</a:t>
           </a:r>
         </a:p>
       </dsp:txBody>
@@ -4648,7 +4648,7 @@
             <a:rPr lang="en-GB" sz="2000" kern="1200" dirty="0" smtClean="0">
               <a:latin typeface="Calibri" panose="020F0502020204030204" pitchFamily="34" charset="0"/>
             </a:rPr>
-            <a:t>Gleichere Wettbewerbsbedingungen für das internationale System</a:t>
+            <a:t>Productivity and wage growth remain subdued; financial stability risks persist</a:t>
           </a:r>
         </a:p>
       </dsp:txBody>
@@ -4715,7 +4715,7 @@
               </a:solidFill>
               <a:latin typeface="Calibri" panose="020F0502020204030204" pitchFamily="34" charset="0"/>
             </a:rPr>
-            <a:t>Das Vertrauen steigt, und Investitionen und Handel ziehen von niedrigem Niveau aus an</a:t>
+            <a:t>Headline employment indicators are improving but labour markets have not recovered</a:t>
           </a:r>
         </a:p>
         <a:p>
@@ -4740,7 +4740,7 @@
               </a:solidFill>
               <a:latin typeface="Calibri" panose="020F0502020204030204" pitchFamily="34" charset="0"/>
             </a:rPr>
-            <a:t>Anzeichen für steigende Nachfrage nach Hightech-Gütern und Investitionen zur Modernisierung des Kapitals</a:t>
+            <a:t>Financial risks from high and rising credit growth, house price increases, interest rate gaps</a:t>
           </a:r>
           <a:endParaRPr lang="en-GB" sz="1600" kern="1200" dirty="0" smtClean="0">
             <a:solidFill>
@@ -4826,7 +4826,7 @@
             <a:rPr lang="en-GB" sz="2000" kern="1200" dirty="0" smtClean="0">
               <a:latin typeface="Calibri" panose="020F0502020204030204" pitchFamily="34" charset="0"/>
             </a:rPr>
-            <a:t>Inländische Reformen zur Stärkung von Wettbewerb, Beschäftigung, Qualifikationen und Innovation</a:t>
+            <a:t>More needs to be done to share the gains from structural trends and trade</a:t>
           </a:r>
         </a:p>
       </dsp:txBody>
@@ -4893,7 +4893,7 @@
               </a:solidFill>
               <a:latin typeface="Calibri" panose="020F0502020204030204" pitchFamily="34" charset="0"/>
             </a:rPr>
-            <a:t>Produktivitäts- und Lohnwachstum bleiben gedämpft; Risiken für die Finanzstabilität bestehen fort</a:t>
+            <a:t>Changes to technology, consumer preferences and trade are occurring simultaneously</a:t>
           </a:r>
         </a:p>
         <a:p>
@@ -4918,7 +4918,7 @@
               </a:solidFill>
               <a:latin typeface="Calibri" panose="020F0502020204030204" pitchFamily="34" charset="0"/>
             </a:rPr>
-            <a:t>Arbeitsplatzverluste durch Aktivitätsverlagerungen konzentrieren sich auf das verarbeitende Gewerbe und bestimmte Regionen</a:t>
+            <a:t>Job losses from shifts in activity are concentrated in manufacturing and specific regions</a:t>
           </a:r>
         </a:p>
       </dsp:txBody>
@@ -4996,7 +4996,7 @@
             <a:rPr lang="en-GB" sz="2000" kern="1200" dirty="0" smtClean="0">
               <a:latin typeface="Calibri" panose="020F0502020204030204" pitchFamily="34" charset="0"/>
             </a:rPr>
-            <a:t>Das Wachstum ist breit angelegt; die Erholung bei Rohstoffproduzenten stützt den moderaten globalen Aufschwung</a:t>
+            <a:t>An integrated policy approach is needed to make globalisation work for all</a:t>
           </a:r>
         </a:p>
       </dsp:txBody>
@@ -5063,7 +5063,7 @@
               </a:solidFill>
               <a:latin typeface="Calibri" panose="020F0502020204030204" pitchFamily="34" charset="0"/>
             </a:rPr>
-            <a:t>Die wichtigsten Beschäftigungsindikatoren verbessern sich, doch die Arbeitsmärkte haben sich noch nicht erholt</a:t>
+            <a:t>A more level playing field for the international system</a:t>
           </a:r>
         </a:p>
         <a:p>
@@ -5088,7 +5088,7 @@
               </a:solidFill>
               <a:latin typeface="Calibri" panose="020F0502020204030204" pitchFamily="34" charset="0"/>
             </a:rPr>
-            <a:t>Finanzielle Risiken durch hohes und steigendes Kreditwachstum, steigende Immobilienpreise und Zinsdivergenzen</a:t>
+            <a:t>Domestic reforms to boost competition, job creation, skills and innovation</a:t>
           </a:r>
         </a:p>
         <a:p>
@@ -5113,7 +5113,7 @@
               </a:solidFill>
               <a:latin typeface="Calibri" panose="020F0502020204030204" pitchFamily="34" charset="0"/>
             </a:rPr>
-            <a:t>Gezielte Maßnahmen, um Menschen, die zurückbleiben, neue Chancen zu eröffnen</a:t>
+            <a:t>Targeted policies to help people who are left behind seize new opportunities</a:t>
           </a:r>
         </a:p>
       </dsp:txBody>
